--- a/Figures and settings.pptx
+++ b/Figures and settings.pptx
@@ -5,25 +5,26 @@
     <p:sldMasterId id="2147483648" r:id="rId1"/>
   </p:sldMasterIdLst>
   <p:notesMasterIdLst>
-    <p:notesMasterId r:id="rId18"/>
+    <p:notesMasterId r:id="rId19"/>
   </p:notesMasterIdLst>
   <p:sldIdLst>
     <p:sldId id="368" r:id="rId2"/>
-    <p:sldId id="367" r:id="rId3"/>
-    <p:sldId id="258" r:id="rId4"/>
-    <p:sldId id="259" r:id="rId5"/>
-    <p:sldId id="364" r:id="rId6"/>
-    <p:sldId id="365" r:id="rId7"/>
-    <p:sldId id="366" r:id="rId8"/>
-    <p:sldId id="355" r:id="rId9"/>
-    <p:sldId id="356" r:id="rId10"/>
-    <p:sldId id="363" r:id="rId11"/>
-    <p:sldId id="272" r:id="rId12"/>
-    <p:sldId id="278" r:id="rId13"/>
-    <p:sldId id="273" r:id="rId14"/>
-    <p:sldId id="311" r:id="rId15"/>
-    <p:sldId id="305" r:id="rId16"/>
-    <p:sldId id="306" r:id="rId17"/>
+    <p:sldId id="369" r:id="rId3"/>
+    <p:sldId id="367" r:id="rId4"/>
+    <p:sldId id="258" r:id="rId5"/>
+    <p:sldId id="259" r:id="rId6"/>
+    <p:sldId id="364" r:id="rId7"/>
+    <p:sldId id="365" r:id="rId8"/>
+    <p:sldId id="366" r:id="rId9"/>
+    <p:sldId id="355" r:id="rId10"/>
+    <p:sldId id="356" r:id="rId11"/>
+    <p:sldId id="363" r:id="rId12"/>
+    <p:sldId id="272" r:id="rId13"/>
+    <p:sldId id="278" r:id="rId14"/>
+    <p:sldId id="273" r:id="rId15"/>
+    <p:sldId id="311" r:id="rId16"/>
+    <p:sldId id="305" r:id="rId17"/>
+    <p:sldId id="306" r:id="rId18"/>
   </p:sldIdLst>
   <p:sldSz cx="12192000" cy="6858000"/>
   <p:notesSz cx="6858000" cy="9144000"/>
@@ -130,87 +131,111 @@
 </p:presentation>
 </file>
 
+<file path=ppt/revisionInfo.xml><?xml version="1.0" encoding="utf-8"?>
+<p1510:revInfo xmlns:a="http://schemas.openxmlformats.org/drawingml/2006/main" xmlns:r="http://schemas.openxmlformats.org/officeDocument/2006/relationships" xmlns:p1510="http://schemas.microsoft.com/office/powerpoint/2015/10/main">
+  <p1510:revLst>
+    <p1510:client id="{9879F2A7-2F06-4ED9-9AF7-B481FA687F18}" v="12" dt="2026-02-27T20:25:16.801"/>
+  </p1510:revLst>
+</p1510:revInfo>
+</file>
+
 <file path=ppt/changesInfos/changesInfo1.xml><?xml version="1.0" encoding="utf-8"?>
 <pc:chgInfo xmlns:a="http://schemas.openxmlformats.org/drawingml/2006/main" xmlns:r="http://schemas.openxmlformats.org/officeDocument/2006/relationships" xmlns:ac="http://schemas.microsoft.com/office/drawing/2013/main/command" xmlns:pc="http://schemas.microsoft.com/office/powerpoint/2013/main/command">
   <pc:docChgLst>
-    <pc:chgData name="Joshua Reiss" userId="71f87c30-4769-4a42-a082-a6a82298c8cb" providerId="ADAL" clId="{A0C6B147-1166-4B44-A00D-F3D77F199F8E}"/>
-    <pc:docChg chg="undo redo custSel addSld modSld">
-      <pc:chgData name="Joshua Reiss" userId="71f87c30-4769-4a42-a082-a6a82298c8cb" providerId="ADAL" clId="{A0C6B147-1166-4B44-A00D-F3D77F199F8E}" dt="2025-10-31T17:11:40.655" v="408" actId="478"/>
+    <pc:chgData name="Josh Reiss" userId="71f87c30-4769-4a42-a082-a6a82298c8cb" providerId="ADAL" clId="{807DF37C-79DE-476F-BD54-E80C59AAF8FB}"/>
+    <pc:docChg chg="custSel addSld modSld">
+      <pc:chgData name="Josh Reiss" userId="71f87c30-4769-4a42-a082-a6a82298c8cb" providerId="ADAL" clId="{807DF37C-79DE-476F-BD54-E80C59AAF8FB}" dt="2026-02-27T20:28:04.950" v="373" actId="114"/>
       <pc:docMkLst>
         <pc:docMk/>
       </pc:docMkLst>
-      <pc:sldChg chg="addSp delSp modSp new mod modClrScheme chgLayout">
-        <pc:chgData name="Joshua Reiss" userId="71f87c30-4769-4a42-a082-a6a82298c8cb" providerId="ADAL" clId="{A0C6B147-1166-4B44-A00D-F3D77F199F8E}" dt="2025-10-31T17:11:40.655" v="408" actId="478"/>
+      <pc:sldChg chg="addSp delSp modSp mod modNotesTx">
+        <pc:chgData name="Josh Reiss" userId="71f87c30-4769-4a42-a082-a6a82298c8cb" providerId="ADAL" clId="{807DF37C-79DE-476F-BD54-E80C59AAF8FB}" dt="2026-02-27T20:28:04.950" v="373" actId="114"/>
         <pc:sldMkLst>
           <pc:docMk/>
           <pc:sldMk cId="1293024889" sldId="368"/>
         </pc:sldMkLst>
-        <pc:spChg chg="add mod ord">
-          <ac:chgData name="Joshua Reiss" userId="71f87c30-4769-4a42-a082-a6a82298c8cb" providerId="ADAL" clId="{A0C6B147-1166-4B44-A00D-F3D77F199F8E}" dt="2025-10-31T17:06:59.566" v="206" actId="1076"/>
+        <pc:spChg chg="add mod">
+          <ac:chgData name="Josh Reiss" userId="71f87c30-4769-4a42-a082-a6a82298c8cb" providerId="ADAL" clId="{807DF37C-79DE-476F-BD54-E80C59AAF8FB}" dt="2026-02-27T20:15:18.710" v="246" actId="1036"/>
+          <ac:spMkLst>
+            <pc:docMk/>
+            <pc:sldMk cId="1293024889" sldId="368"/>
+            <ac:spMk id="2" creationId="{100CEB02-631A-3799-F6E0-112C6A9EF93F}"/>
+          </ac:spMkLst>
+        </pc:spChg>
+        <pc:spChg chg="add mod">
+          <ac:chgData name="Josh Reiss" userId="71f87c30-4769-4a42-a082-a6a82298c8cb" providerId="ADAL" clId="{807DF37C-79DE-476F-BD54-E80C59AAF8FB}" dt="2026-02-27T20:15:18.710" v="246" actId="1036"/>
+          <ac:spMkLst>
+            <pc:docMk/>
+            <pc:sldMk cId="1293024889" sldId="368"/>
+            <ac:spMk id="3" creationId="{CD8891DF-0342-6FE8-55AF-EF7F8097A065}"/>
+          </ac:spMkLst>
+        </pc:spChg>
+        <pc:spChg chg="mod">
+          <ac:chgData name="Josh Reiss" userId="71f87c30-4769-4a42-a082-a6a82298c8cb" providerId="ADAL" clId="{807DF37C-79DE-476F-BD54-E80C59AAF8FB}" dt="2026-02-27T20:15:07.100" v="204" actId="27636"/>
           <ac:spMkLst>
             <pc:docMk/>
             <pc:sldMk cId="1293024889" sldId="368"/>
             <ac:spMk id="4" creationId="{22B0266F-5591-1A35-A92C-35930DC0C2BA}"/>
           </ac:spMkLst>
         </pc:spChg>
-        <pc:spChg chg="add mod">
-          <ac:chgData name="Joshua Reiss" userId="71f87c30-4769-4a42-a082-a6a82298c8cb" providerId="ADAL" clId="{A0C6B147-1166-4B44-A00D-F3D77F199F8E}" dt="2025-10-31T17:11:34.575" v="407" actId="1038"/>
+        <pc:spChg chg="mod">
+          <ac:chgData name="Josh Reiss" userId="71f87c30-4769-4a42-a082-a6a82298c8cb" providerId="ADAL" clId="{807DF37C-79DE-476F-BD54-E80C59AAF8FB}" dt="2026-02-27T20:15:18.710" v="246" actId="1036"/>
           <ac:spMkLst>
             <pc:docMk/>
             <pc:sldMk cId="1293024889" sldId="368"/>
             <ac:spMk id="6" creationId="{69A28950-484A-6121-6EFF-21555AC6BAF8}"/>
           </ac:spMkLst>
         </pc:spChg>
-        <pc:spChg chg="add mod">
-          <ac:chgData name="Joshua Reiss" userId="71f87c30-4769-4a42-a082-a6a82298c8cb" providerId="ADAL" clId="{A0C6B147-1166-4B44-A00D-F3D77F199F8E}" dt="2025-10-31T17:11:34.575" v="407" actId="1038"/>
+        <pc:spChg chg="mod">
+          <ac:chgData name="Josh Reiss" userId="71f87c30-4769-4a42-a082-a6a82298c8cb" providerId="ADAL" clId="{807DF37C-79DE-476F-BD54-E80C59AAF8FB}" dt="2026-02-27T20:15:18.710" v="246" actId="1036"/>
           <ac:spMkLst>
             <pc:docMk/>
             <pc:sldMk cId="1293024889" sldId="368"/>
             <ac:spMk id="7" creationId="{4035360A-93A2-65DC-663C-C1E677795E9A}"/>
           </ac:spMkLst>
         </pc:spChg>
-        <pc:spChg chg="add mod">
-          <ac:chgData name="Joshua Reiss" userId="71f87c30-4769-4a42-a082-a6a82298c8cb" providerId="ADAL" clId="{A0C6B147-1166-4B44-A00D-F3D77F199F8E}" dt="2025-10-31T17:11:34.575" v="407" actId="1038"/>
+        <pc:spChg chg="mod">
+          <ac:chgData name="Josh Reiss" userId="71f87c30-4769-4a42-a082-a6a82298c8cb" providerId="ADAL" clId="{807DF37C-79DE-476F-BD54-E80C59AAF8FB}" dt="2026-02-27T20:15:18.710" v="246" actId="1036"/>
           <ac:spMkLst>
             <pc:docMk/>
             <pc:sldMk cId="1293024889" sldId="368"/>
             <ac:spMk id="18" creationId="{0A430868-9414-991D-9968-0A5480F695C5}"/>
           </ac:spMkLst>
         </pc:spChg>
-        <pc:spChg chg="add mod">
-          <ac:chgData name="Joshua Reiss" userId="71f87c30-4769-4a42-a082-a6a82298c8cb" providerId="ADAL" clId="{A0C6B147-1166-4B44-A00D-F3D77F199F8E}" dt="2025-10-31T17:11:34.575" v="407" actId="1038"/>
+        <pc:spChg chg="mod">
+          <ac:chgData name="Josh Reiss" userId="71f87c30-4769-4a42-a082-a6a82298c8cb" providerId="ADAL" clId="{807DF37C-79DE-476F-BD54-E80C59AAF8FB}" dt="2026-02-27T20:15:18.710" v="246" actId="1036"/>
           <ac:spMkLst>
             <pc:docMk/>
             <pc:sldMk cId="1293024889" sldId="368"/>
             <ac:spMk id="19" creationId="{CF6BDC19-07F9-97DD-DC5B-594700C6B1C0}"/>
           </ac:spMkLst>
         </pc:spChg>
-        <pc:spChg chg="add mod">
-          <ac:chgData name="Joshua Reiss" userId="71f87c30-4769-4a42-a082-a6a82298c8cb" providerId="ADAL" clId="{A0C6B147-1166-4B44-A00D-F3D77F199F8E}" dt="2025-10-31T17:11:28.290" v="401" actId="1038"/>
+        <pc:spChg chg="mod">
+          <ac:chgData name="Josh Reiss" userId="71f87c30-4769-4a42-a082-a6a82298c8cb" providerId="ADAL" clId="{807DF37C-79DE-476F-BD54-E80C59AAF8FB}" dt="2026-02-27T20:15:18.710" v="246" actId="1036"/>
           <ac:spMkLst>
             <pc:docMk/>
             <pc:sldMk cId="1293024889" sldId="368"/>
             <ac:spMk id="22" creationId="{8CF37C9F-CA85-D694-C2A0-2FCB927EBEDB}"/>
           </ac:spMkLst>
         </pc:spChg>
-        <pc:spChg chg="add mod">
-          <ac:chgData name="Joshua Reiss" userId="71f87c30-4769-4a42-a082-a6a82298c8cb" providerId="ADAL" clId="{A0C6B147-1166-4B44-A00D-F3D77F199F8E}" dt="2025-10-31T17:10:54.227" v="351" actId="1037"/>
+        <pc:spChg chg="mod">
+          <ac:chgData name="Josh Reiss" userId="71f87c30-4769-4a42-a082-a6a82298c8cb" providerId="ADAL" clId="{807DF37C-79DE-476F-BD54-E80C59AAF8FB}" dt="2026-02-27T20:20:15.379" v="286" actId="20577"/>
           <ac:spMkLst>
             <pc:docMk/>
             <pc:sldMk cId="1293024889" sldId="368"/>
             <ac:spMk id="23" creationId="{04DB7D8B-094F-BA7E-4025-43970FA1F22F}"/>
           </ac:spMkLst>
         </pc:spChg>
-        <pc:spChg chg="add mod">
-          <ac:chgData name="Joshua Reiss" userId="71f87c30-4769-4a42-a082-a6a82298c8cb" providerId="ADAL" clId="{A0C6B147-1166-4B44-A00D-F3D77F199F8E}" dt="2025-10-31T17:11:12.408" v="385" actId="1037"/>
+        <pc:spChg chg="del mod">
+          <ac:chgData name="Josh Reiss" userId="71f87c30-4769-4a42-a082-a6a82298c8cb" providerId="ADAL" clId="{807DF37C-79DE-476F-BD54-E80C59AAF8FB}" dt="2026-02-27T20:21:58.572" v="305" actId="21"/>
           <ac:spMkLst>
             <pc:docMk/>
             <pc:sldMk cId="1293024889" sldId="368"/>
             <ac:spMk id="24" creationId="{D9E0928B-17B4-908A-2513-7E0B5086D4FC}"/>
           </ac:spMkLst>
         </pc:spChg>
-        <pc:spChg chg="add mod">
-          <ac:chgData name="Joshua Reiss" userId="71f87c30-4769-4a42-a082-a6a82298c8cb" providerId="ADAL" clId="{A0C6B147-1166-4B44-A00D-F3D77F199F8E}" dt="2025-10-31T17:11:18.866" v="394" actId="1036"/>
+        <pc:spChg chg="mod">
+          <ac:chgData name="Josh Reiss" userId="71f87c30-4769-4a42-a082-a6a82298c8cb" providerId="ADAL" clId="{807DF37C-79DE-476F-BD54-E80C59AAF8FB}" dt="2026-02-27T20:24:49.346" v="354" actId="1035"/>
           <ac:spMkLst>
             <pc:docMk/>
             <pc:sldMk cId="1293024889" sldId="368"/>
@@ -218,15 +243,55 @@
           </ac:spMkLst>
         </pc:spChg>
         <pc:spChg chg="add mod">
-          <ac:chgData name="Joshua Reiss" userId="71f87c30-4769-4a42-a082-a6a82298c8cb" providerId="ADAL" clId="{A0C6B147-1166-4B44-A00D-F3D77F199F8E}" dt="2025-10-31T17:11:12.408" v="385" actId="1037"/>
+          <ac:chgData name="Josh Reiss" userId="71f87c30-4769-4a42-a082-a6a82298c8cb" providerId="ADAL" clId="{807DF37C-79DE-476F-BD54-E80C59AAF8FB}" dt="2026-02-27T20:28:04.950" v="373" actId="114"/>
+          <ac:spMkLst>
+            <pc:docMk/>
+            <pc:sldMk cId="1293024889" sldId="368"/>
+            <ac:spMk id="28" creationId="{93722E25-CE8C-08FC-7D19-5FDAD800316F}"/>
+          </ac:spMkLst>
+        </pc:spChg>
+        <pc:spChg chg="mod">
+          <ac:chgData name="Josh Reiss" userId="71f87c30-4769-4a42-a082-a6a82298c8cb" providerId="ADAL" clId="{807DF37C-79DE-476F-BD54-E80C59AAF8FB}" dt="2026-02-27T20:15:18.710" v="246" actId="1036"/>
           <ac:spMkLst>
             <pc:docMk/>
             <pc:sldMk cId="1293024889" sldId="368"/>
             <ac:spMk id="29" creationId="{E70AF4C3-315A-5E5A-9CF3-414B306A52D0}"/>
           </ac:spMkLst>
         </pc:spChg>
+        <pc:spChg chg="add mod">
+          <ac:chgData name="Josh Reiss" userId="71f87c30-4769-4a42-a082-a6a82298c8cb" providerId="ADAL" clId="{807DF37C-79DE-476F-BD54-E80C59AAF8FB}" dt="2026-02-27T20:28:04.950" v="373" actId="114"/>
+          <ac:spMkLst>
+            <pc:docMk/>
+            <pc:sldMk cId="1293024889" sldId="368"/>
+            <ac:spMk id="30" creationId="{A8DD9C8E-D3EB-C89C-7CD0-22E6AF5EC0D7}"/>
+          </ac:spMkLst>
+        </pc:spChg>
+        <pc:spChg chg="add mod">
+          <ac:chgData name="Josh Reiss" userId="71f87c30-4769-4a42-a082-a6a82298c8cb" providerId="ADAL" clId="{807DF37C-79DE-476F-BD54-E80C59AAF8FB}" dt="2026-02-27T20:24:49.346" v="354" actId="1035"/>
+          <ac:spMkLst>
+            <pc:docMk/>
+            <pc:sldMk cId="1293024889" sldId="368"/>
+            <ac:spMk id="32" creationId="{D9E0928B-17B4-908A-2513-7E0B5086D4FC}"/>
+          </ac:spMkLst>
+        </pc:spChg>
+        <pc:cxnChg chg="add mod">
+          <ac:chgData name="Josh Reiss" userId="71f87c30-4769-4a42-a082-a6a82298c8cb" providerId="ADAL" clId="{807DF37C-79DE-476F-BD54-E80C59AAF8FB}" dt="2026-02-27T20:12:50.341" v="173" actId="1076"/>
+          <ac:cxnSpMkLst>
+            <pc:docMk/>
+            <pc:sldMk cId="1293024889" sldId="368"/>
+            <ac:cxnSpMk id="5" creationId="{99943160-07A4-74EA-7365-FD43EAC0D3AB}"/>
+          </ac:cxnSpMkLst>
+        </pc:cxnChg>
+        <pc:cxnChg chg="add mod">
+          <ac:chgData name="Josh Reiss" userId="71f87c30-4769-4a42-a082-a6a82298c8cb" providerId="ADAL" clId="{807DF37C-79DE-476F-BD54-E80C59AAF8FB}" dt="2026-02-27T20:13:58.365" v="196" actId="14100"/>
+          <ac:cxnSpMkLst>
+            <pc:docMk/>
+            <pc:sldMk cId="1293024889" sldId="368"/>
+            <ac:cxnSpMk id="10" creationId="{95199996-88DC-04E6-DBA4-CA4048D1E75B}"/>
+          </ac:cxnSpMkLst>
+        </pc:cxnChg>
         <pc:cxnChg chg="mod">
-          <ac:chgData name="Joshua Reiss" userId="71f87c30-4769-4a42-a082-a6a82298c8cb" providerId="ADAL" clId="{A0C6B147-1166-4B44-A00D-F3D77F199F8E}" dt="2025-10-31T17:11:34.575" v="407" actId="1038"/>
+          <ac:chgData name="Josh Reiss" userId="71f87c30-4769-4a42-a082-a6a82298c8cb" providerId="ADAL" clId="{807DF37C-79DE-476F-BD54-E80C59AAF8FB}" dt="2026-02-27T20:12:31.537" v="171" actId="1036"/>
           <ac:cxnSpMkLst>
             <pc:docMk/>
             <pc:sldMk cId="1293024889" sldId="368"/>
@@ -234,7 +299,7 @@
           </ac:cxnSpMkLst>
         </pc:cxnChg>
         <pc:cxnChg chg="mod">
-          <ac:chgData name="Joshua Reiss" userId="71f87c30-4769-4a42-a082-a6a82298c8cb" providerId="ADAL" clId="{A0C6B147-1166-4B44-A00D-F3D77F199F8E}" dt="2025-10-31T17:11:34.575" v="407" actId="1038"/>
+          <ac:chgData name="Josh Reiss" userId="71f87c30-4769-4a42-a082-a6a82298c8cb" providerId="ADAL" clId="{807DF37C-79DE-476F-BD54-E80C59AAF8FB}" dt="2026-02-27T20:13:47.126" v="193" actId="14100"/>
           <ac:cxnSpMkLst>
             <pc:docMk/>
             <pc:sldMk cId="1293024889" sldId="368"/>
@@ -242,15 +307,23 @@
           </ac:cxnSpMkLst>
         </pc:cxnChg>
         <pc:cxnChg chg="add mod">
-          <ac:chgData name="Joshua Reiss" userId="71f87c30-4769-4a42-a082-a6a82298c8cb" providerId="ADAL" clId="{A0C6B147-1166-4B44-A00D-F3D77F199F8E}" dt="2025-10-31T17:11:34.575" v="407" actId="1038"/>
+          <ac:chgData name="Josh Reiss" userId="71f87c30-4769-4a42-a082-a6a82298c8cb" providerId="ADAL" clId="{807DF37C-79DE-476F-BD54-E80C59AAF8FB}" dt="2026-02-27T20:14:50.087" v="202" actId="692"/>
+          <ac:cxnSpMkLst>
+            <pc:docMk/>
+            <pc:sldMk cId="1293024889" sldId="368"/>
+            <ac:cxnSpMk id="15" creationId="{F889ADE6-65E6-4C16-1088-9B8ADF7FD15A}"/>
+          </ac:cxnSpMkLst>
+        </pc:cxnChg>
+        <pc:cxnChg chg="mod">
+          <ac:chgData name="Josh Reiss" userId="71f87c30-4769-4a42-a082-a6a82298c8cb" providerId="ADAL" clId="{807DF37C-79DE-476F-BD54-E80C59AAF8FB}" dt="2026-02-27T20:12:31.537" v="171" actId="1036"/>
           <ac:cxnSpMkLst>
             <pc:docMk/>
             <pc:sldMk cId="1293024889" sldId="368"/>
             <ac:cxnSpMk id="20" creationId="{80C88542-6CC0-0F02-885C-417AEAB295DC}"/>
           </ac:cxnSpMkLst>
         </pc:cxnChg>
-        <pc:cxnChg chg="add mod">
-          <ac:chgData name="Joshua Reiss" userId="71f87c30-4769-4a42-a082-a6a82298c8cb" providerId="ADAL" clId="{A0C6B147-1166-4B44-A00D-F3D77F199F8E}" dt="2025-10-31T17:11:34.575" v="407" actId="1038"/>
+        <pc:cxnChg chg="mod">
+          <ac:chgData name="Josh Reiss" userId="71f87c30-4769-4a42-a082-a6a82298c8cb" providerId="ADAL" clId="{807DF37C-79DE-476F-BD54-E80C59AAF8FB}" dt="2026-02-27T20:13:47.126" v="193" actId="14100"/>
           <ac:cxnSpMkLst>
             <pc:docMk/>
             <pc:sldMk cId="1293024889" sldId="368"/>
@@ -258,31 +331,39 @@
           </ac:cxnSpMkLst>
         </pc:cxnChg>
         <pc:cxnChg chg="add mod">
-          <ac:chgData name="Joshua Reiss" userId="71f87c30-4769-4a42-a082-a6a82298c8cb" providerId="ADAL" clId="{A0C6B147-1166-4B44-A00D-F3D77F199F8E}" dt="2025-10-31T17:11:12.408" v="385" actId="1037"/>
+          <ac:chgData name="Josh Reiss" userId="71f87c30-4769-4a42-a082-a6a82298c8cb" providerId="ADAL" clId="{807DF37C-79DE-476F-BD54-E80C59AAF8FB}" dt="2026-02-27T20:24:49.346" v="354" actId="1035"/>
+          <ac:cxnSpMkLst>
+            <pc:docMk/>
+            <pc:sldMk cId="1293024889" sldId="368"/>
+            <ac:cxnSpMk id="31" creationId="{39DD345E-A6DF-A3B2-9A78-70B05EF3F496}"/>
+          </ac:cxnSpMkLst>
+        </pc:cxnChg>
+        <pc:cxnChg chg="mod">
+          <ac:chgData name="Josh Reiss" userId="71f87c30-4769-4a42-a082-a6a82298c8cb" providerId="ADAL" clId="{807DF37C-79DE-476F-BD54-E80C59AAF8FB}" dt="2026-02-27T20:21:58.572" v="305" actId="21"/>
           <ac:cxnSpMkLst>
             <pc:docMk/>
             <pc:sldMk cId="1293024889" sldId="368"/>
             <ac:cxnSpMk id="34" creationId="{34526BE1-6C35-67CF-56C8-49AEBD5019E1}"/>
           </ac:cxnSpMkLst>
         </pc:cxnChg>
-        <pc:cxnChg chg="add mod">
-          <ac:chgData name="Joshua Reiss" userId="71f87c30-4769-4a42-a082-a6a82298c8cb" providerId="ADAL" clId="{A0C6B147-1166-4B44-A00D-F3D77F199F8E}" dt="2025-10-31T17:11:28.290" v="401" actId="1038"/>
+        <pc:cxnChg chg="mod">
+          <ac:chgData name="Josh Reiss" userId="71f87c30-4769-4a42-a082-a6a82298c8cb" providerId="ADAL" clId="{807DF37C-79DE-476F-BD54-E80C59AAF8FB}" dt="2026-02-27T20:13:41.181" v="192" actId="1076"/>
           <ac:cxnSpMkLst>
             <pc:docMk/>
             <pc:sldMk cId="1293024889" sldId="368"/>
             <ac:cxnSpMk id="37" creationId="{319CFE43-885E-65A1-EAF2-F9E2174F6347}"/>
           </ac:cxnSpMkLst>
         </pc:cxnChg>
-        <pc:cxnChg chg="add mod">
-          <ac:chgData name="Joshua Reiss" userId="71f87c30-4769-4a42-a082-a6a82298c8cb" providerId="ADAL" clId="{A0C6B147-1166-4B44-A00D-F3D77F199F8E}" dt="2025-10-31T17:11:18.866" v="394" actId="1036"/>
+        <pc:cxnChg chg="del mod">
+          <ac:chgData name="Josh Reiss" userId="71f87c30-4769-4a42-a082-a6a82298c8cb" providerId="ADAL" clId="{807DF37C-79DE-476F-BD54-E80C59AAF8FB}" dt="2026-02-27T20:21:39.540" v="302" actId="21"/>
           <ac:cxnSpMkLst>
             <pc:docMk/>
             <pc:sldMk cId="1293024889" sldId="368"/>
             <ac:cxnSpMk id="40" creationId="{39DD345E-A6DF-A3B2-9A78-70B05EF3F496}"/>
           </ac:cxnSpMkLst>
         </pc:cxnChg>
-        <pc:cxnChg chg="add mod">
-          <ac:chgData name="Joshua Reiss" userId="71f87c30-4769-4a42-a082-a6a82298c8cb" providerId="ADAL" clId="{A0C6B147-1166-4B44-A00D-F3D77F199F8E}" dt="2025-10-31T17:11:18.866" v="394" actId="1036"/>
+        <pc:cxnChg chg="mod">
+          <ac:chgData name="Josh Reiss" userId="71f87c30-4769-4a42-a082-a6a82298c8cb" providerId="ADAL" clId="{807DF37C-79DE-476F-BD54-E80C59AAF8FB}" dt="2026-02-27T20:24:49.346" v="354" actId="1035"/>
           <ac:cxnSpMkLst>
             <pc:docMk/>
             <pc:sldMk cId="1293024889" sldId="368"/>
@@ -290,135 +371,35 @@
           </ac:cxnSpMkLst>
         </pc:cxnChg>
         <pc:cxnChg chg="add mod">
-          <ac:chgData name="Joshua Reiss" userId="71f87c30-4769-4a42-a082-a6a82298c8cb" providerId="ADAL" clId="{A0C6B147-1166-4B44-A00D-F3D77F199F8E}" dt="2025-10-31T17:11:12.408" v="385" actId="1037"/>
+          <ac:chgData name="Josh Reiss" userId="71f87c30-4769-4a42-a082-a6a82298c8cb" providerId="ADAL" clId="{807DF37C-79DE-476F-BD54-E80C59AAF8FB}" dt="2026-02-27T20:26:36.125" v="370" actId="692"/>
+          <ac:cxnSpMkLst>
+            <pc:docMk/>
+            <pc:sldMk cId="1293024889" sldId="368"/>
+            <ac:cxnSpMk id="45" creationId="{5EC52057-8907-823C-1AB0-4ABC6BC3D0C3}"/>
+          </ac:cxnSpMkLst>
+        </pc:cxnChg>
+        <pc:cxnChg chg="mod">
+          <ac:chgData name="Josh Reiss" userId="71f87c30-4769-4a42-a082-a6a82298c8cb" providerId="ADAL" clId="{807DF37C-79DE-476F-BD54-E80C59AAF8FB}" dt="2026-02-27T20:27:33.848" v="372" actId="14100"/>
           <ac:cxnSpMkLst>
             <pc:docMk/>
             <pc:sldMk cId="1293024889" sldId="368"/>
             <ac:cxnSpMk id="46" creationId="{E16FAEAC-E7D1-5E83-B0E9-E4772F4C84CA}"/>
           </ac:cxnSpMkLst>
         </pc:cxnChg>
+        <pc:cxnChg chg="add mod">
+          <ac:chgData name="Josh Reiss" userId="71f87c30-4769-4a42-a082-a6a82298c8cb" providerId="ADAL" clId="{807DF37C-79DE-476F-BD54-E80C59AAF8FB}" dt="2026-02-27T20:26:43.676" v="371" actId="14100"/>
+          <ac:cxnSpMkLst>
+            <pc:docMk/>
+            <pc:sldMk cId="1293024889" sldId="368"/>
+            <ac:cxnSpMk id="49" creationId="{C21905E5-2897-E164-D968-673BD7372C61}"/>
+          </ac:cxnSpMkLst>
+        </pc:cxnChg>
       </pc:sldChg>
-    </pc:docChg>
-  </pc:docChgLst>
-  <pc:docChgLst>
-    <pc:chgData name="Joshua Reiss" userId="71f87c30-4769-4a42-a082-a6a82298c8cb" providerId="ADAL" clId="{2DD4C6F9-B693-482E-B1B8-D61335F4EE17}"/>
-    <pc:docChg chg="modSld">
-      <pc:chgData name="Joshua Reiss" userId="71f87c30-4769-4a42-a082-a6a82298c8cb" providerId="ADAL" clId="{2DD4C6F9-B693-482E-B1B8-D61335F4EE17}" dt="2025-07-23T10:21:46.483" v="0" actId="164"/>
-      <pc:docMkLst>
-        <pc:docMk/>
-      </pc:docMkLst>
-      <pc:sldChg chg="addSp modSp">
-        <pc:chgData name="Joshua Reiss" userId="71f87c30-4769-4a42-a082-a6a82298c8cb" providerId="ADAL" clId="{2DD4C6F9-B693-482E-B1B8-D61335F4EE17}" dt="2025-07-23T10:21:46.483" v="0" actId="164"/>
+      <pc:sldChg chg="add">
+        <pc:chgData name="Josh Reiss" userId="71f87c30-4769-4a42-a082-a6a82298c8cb" providerId="ADAL" clId="{807DF37C-79DE-476F-BD54-E80C59AAF8FB}" dt="2026-02-27T20:11:15.829" v="0"/>
         <pc:sldMkLst>
           <pc:docMk/>
-          <pc:sldMk cId="4287236545" sldId="352"/>
-        </pc:sldMkLst>
-      </pc:sldChg>
-    </pc:docChg>
-  </pc:docChgLst>
-  <pc:docChgLst>
-    <pc:chgData name="Joshua Reiss" userId="71f87c30-4769-4a42-a082-a6a82298c8cb" providerId="ADAL" clId="{D788B803-6CAF-456E-9D5B-399D0D7F1309}"/>
-    <pc:docChg chg="undo custSel addSld delSld modSld">
-      <pc:chgData name="Joshua Reiss" userId="71f87c30-4769-4a42-a082-a6a82298c8cb" providerId="ADAL" clId="{D788B803-6CAF-456E-9D5B-399D0D7F1309}" dt="2025-04-02T15:03:00.425" v="2167" actId="692"/>
-      <pc:docMkLst>
-        <pc:docMk/>
-      </pc:docMkLst>
-      <pc:sldChg chg="modSp add">
-        <pc:chgData name="Joshua Reiss" userId="71f87c30-4769-4a42-a082-a6a82298c8cb" providerId="ADAL" clId="{D788B803-6CAF-456E-9D5B-399D0D7F1309}" dt="2025-03-13T14:44:17.415" v="200" actId="5736"/>
-        <pc:sldMkLst>
-          <pc:docMk/>
-          <pc:sldMk cId="1710399065" sldId="272"/>
-        </pc:sldMkLst>
-      </pc:sldChg>
-      <pc:sldChg chg="add">
-        <pc:chgData name="Joshua Reiss" userId="71f87c30-4769-4a42-a082-a6a82298c8cb" providerId="ADAL" clId="{D788B803-6CAF-456E-9D5B-399D0D7F1309}" dt="2025-03-13T13:04:18.144" v="199"/>
-        <pc:sldMkLst>
-          <pc:docMk/>
-          <pc:sldMk cId="2879517915" sldId="273"/>
-        </pc:sldMkLst>
-      </pc:sldChg>
-      <pc:sldChg chg="add">
-        <pc:chgData name="Joshua Reiss" userId="71f87c30-4769-4a42-a082-a6a82298c8cb" providerId="ADAL" clId="{D788B803-6CAF-456E-9D5B-399D0D7F1309}" dt="2025-03-13T13:04:18.144" v="199"/>
-        <pc:sldMkLst>
-          <pc:docMk/>
-          <pc:sldMk cId="90723974" sldId="278"/>
-        </pc:sldMkLst>
-      </pc:sldChg>
-      <pc:sldChg chg="add">
-        <pc:chgData name="Joshua Reiss" userId="71f87c30-4769-4a42-a082-a6a82298c8cb" providerId="ADAL" clId="{D788B803-6CAF-456E-9D5B-399D0D7F1309}" dt="2025-03-13T13:04:18.144" v="199"/>
-        <pc:sldMkLst>
-          <pc:docMk/>
-          <pc:sldMk cId="1496450886" sldId="305"/>
-        </pc:sldMkLst>
-      </pc:sldChg>
-      <pc:sldChg chg="add">
-        <pc:chgData name="Joshua Reiss" userId="71f87c30-4769-4a42-a082-a6a82298c8cb" providerId="ADAL" clId="{D788B803-6CAF-456E-9D5B-399D0D7F1309}" dt="2025-03-13T13:04:18.144" v="199"/>
-        <pc:sldMkLst>
-          <pc:docMk/>
-          <pc:sldMk cId="1320625119" sldId="306"/>
-        </pc:sldMkLst>
-      </pc:sldChg>
-      <pc:sldChg chg="add">
-        <pc:chgData name="Joshua Reiss" userId="71f87c30-4769-4a42-a082-a6a82298c8cb" providerId="ADAL" clId="{D788B803-6CAF-456E-9D5B-399D0D7F1309}" dt="2025-03-13T13:04:18.144" v="199"/>
-        <pc:sldMkLst>
-          <pc:docMk/>
-          <pc:sldMk cId="2261269671" sldId="311"/>
-        </pc:sldMkLst>
-      </pc:sldChg>
-      <pc:sldChg chg="modSp mod">
-        <pc:chgData name="Joshua Reiss" userId="71f87c30-4769-4a42-a082-a6a82298c8cb" providerId="ADAL" clId="{D788B803-6CAF-456E-9D5B-399D0D7F1309}" dt="2025-03-13T20:53:53.421" v="209" actId="1036"/>
-        <pc:sldMkLst>
-          <pc:docMk/>
-          <pc:sldMk cId="1068395398" sldId="351"/>
-        </pc:sldMkLst>
-      </pc:sldChg>
-      <pc:sldChg chg="addSp delSp modSp new mod">
-        <pc:chgData name="Joshua Reiss" userId="71f87c30-4769-4a42-a082-a6a82298c8cb" providerId="ADAL" clId="{D788B803-6CAF-456E-9D5B-399D0D7F1309}" dt="2025-03-12T13:16:47.584" v="198" actId="207"/>
-        <pc:sldMkLst>
-          <pc:docMk/>
-          <pc:sldMk cId="3176130722" sldId="362"/>
-        </pc:sldMkLst>
-      </pc:sldChg>
-      <pc:sldChg chg="add">
-        <pc:chgData name="Joshua Reiss" userId="71f87c30-4769-4a42-a082-a6a82298c8cb" providerId="ADAL" clId="{D788B803-6CAF-456E-9D5B-399D0D7F1309}" dt="2025-03-13T13:04:18.144" v="199"/>
-        <pc:sldMkLst>
-          <pc:docMk/>
-          <pc:sldMk cId="23973663" sldId="363"/>
-        </pc:sldMkLst>
-      </pc:sldChg>
-      <pc:sldChg chg="add del">
-        <pc:chgData name="Joshua Reiss" userId="71f87c30-4769-4a42-a082-a6a82298c8cb" providerId="ADAL" clId="{D788B803-6CAF-456E-9D5B-399D0D7F1309}" dt="2025-03-14T21:23:05.601" v="211"/>
-        <pc:sldMkLst>
-          <pc:docMk/>
-          <pc:sldMk cId="1769010252" sldId="364"/>
-        </pc:sldMkLst>
-      </pc:sldChg>
-      <pc:sldChg chg="addSp delSp modSp add mod">
-        <pc:chgData name="Joshua Reiss" userId="71f87c30-4769-4a42-a082-a6a82298c8cb" providerId="ADAL" clId="{D788B803-6CAF-456E-9D5B-399D0D7F1309}" dt="2025-03-14T21:37:44.031" v="505" actId="20577"/>
-        <pc:sldMkLst>
-          <pc:docMk/>
-          <pc:sldMk cId="2016982695" sldId="364"/>
-        </pc:sldMkLst>
-      </pc:sldChg>
-      <pc:sldChg chg="addSp delSp modSp add mod">
-        <pc:chgData name="Joshua Reiss" userId="71f87c30-4769-4a42-a082-a6a82298c8cb" providerId="ADAL" clId="{D788B803-6CAF-456E-9D5B-399D0D7F1309}" dt="2025-03-22T11:29:57.645" v="1202" actId="1076"/>
-        <pc:sldMkLst>
-          <pc:docMk/>
-          <pc:sldMk cId="201943988" sldId="365"/>
-        </pc:sldMkLst>
-      </pc:sldChg>
-      <pc:sldChg chg="addSp delSp modSp add mod">
-        <pc:chgData name="Joshua Reiss" userId="71f87c30-4769-4a42-a082-a6a82298c8cb" providerId="ADAL" clId="{D788B803-6CAF-456E-9D5B-399D0D7F1309}" dt="2025-03-23T09:26:15.203" v="1445" actId="1076"/>
-        <pc:sldMkLst>
-          <pc:docMk/>
-          <pc:sldMk cId="1978429239" sldId="366"/>
-        </pc:sldMkLst>
-      </pc:sldChg>
-      <pc:sldChg chg="addSp delSp modSp add mod">
-        <pc:chgData name="Joshua Reiss" userId="71f87c30-4769-4a42-a082-a6a82298c8cb" providerId="ADAL" clId="{D788B803-6CAF-456E-9D5B-399D0D7F1309}" dt="2025-04-02T15:03:00.425" v="2167" actId="692"/>
-        <pc:sldMkLst>
-          <pc:docMk/>
-          <pc:sldMk cId="361188305" sldId="367"/>
+          <pc:sldMk cId="2618786155" sldId="369"/>
         </pc:sldMkLst>
       </pc:sldChg>
     </pc:docChg>
@@ -429,7 +410,7 @@
 <file path=ppt/charts/chart1.xml><?xml version="1.0" encoding="utf-8"?>
 <c:chartSpace xmlns:c="http://schemas.openxmlformats.org/drawingml/2006/chart" xmlns:a="http://schemas.openxmlformats.org/drawingml/2006/main" xmlns:r="http://schemas.openxmlformats.org/officeDocument/2006/relationships" xmlns:c16r2="http://schemas.microsoft.com/office/drawing/2015/06/chart">
   <c:date1904 val="0"/>
-  <c:lang val="en-US"/>
+  <c:lang val="en-GB"/>
   <c:roundedCorners val="0"/>
   <mc:AlternateContent xmlns:mc="http://schemas.openxmlformats.org/markup-compatibility/2006">
     <mc:Choice xmlns:c14="http://schemas.microsoft.com/office/drawing/2007/8/2/chart" Requires="c14">
@@ -4413,7 +4394,7 @@
           <a:p>
             <a:fld id="{D8E06A3B-885D-47A2-BBBF-3C17C577BFA5}" type="datetimeFigureOut">
               <a:rPr lang="en-GB" smtClean="0"/>
-              <a:t>31/10/2025</a:t>
+              <a:t>27/02/2026</a:t>
             </a:fld>
             <a:endParaRPr lang="en-GB"/>
           </a:p>
@@ -4725,6 +4706,545 @@
           <a:bodyPr/>
           <a:lstStyle/>
           <a:p>
+            <a:r>
+              <a:rPr lang="en-GB" sz="1200" b="0" kern="1200" dirty="0" err="1">
+                <a:solidFill>
+                  <a:schemeClr val="tx1"/>
+                </a:solidFill>
+                <a:effectLst/>
+                <a:latin typeface="+mn-lt"/>
+                <a:ea typeface="+mn-ea"/>
+                <a:cs typeface="+mn-cs"/>
+              </a:rPr>
+              <a:t>DecayGain</a:t>
+            </a:r>
+            <a:r>
+              <a:rPr lang="en-GB" sz="1200" b="0" kern="1200" dirty="0">
+                <a:solidFill>
+                  <a:schemeClr val="tx1"/>
+                </a:solidFill>
+                <a:effectLst/>
+                <a:latin typeface="+mn-lt"/>
+                <a:ea typeface="+mn-ea"/>
+                <a:cs typeface="+mn-cs"/>
+              </a:rPr>
+              <a:t> = new </a:t>
+            </a:r>
+            <a:r>
+              <a:rPr lang="en-GB" sz="1200" b="0" kern="1200" dirty="0" err="1">
+                <a:solidFill>
+                  <a:schemeClr val="tx1"/>
+                </a:solidFill>
+                <a:effectLst/>
+                <a:latin typeface="+mn-lt"/>
+                <a:ea typeface="+mn-ea"/>
+                <a:cs typeface="+mn-cs"/>
+              </a:rPr>
+              <a:t>GainNode</a:t>
+            </a:r>
+            <a:r>
+              <a:rPr lang="en-GB" sz="1200" b="0" kern="1200" dirty="0">
+                <a:solidFill>
+                  <a:schemeClr val="tx1"/>
+                </a:solidFill>
+                <a:effectLst/>
+                <a:latin typeface="+mn-lt"/>
+                <a:ea typeface="+mn-ea"/>
+                <a:cs typeface="+mn-cs"/>
+              </a:rPr>
+              <a:t>(context,{gain:0})</a:t>
+            </a:r>
+          </a:p>
+          <a:p>
+            <a:r>
+              <a:rPr lang="en-GB" sz="1200" b="0" kern="1200" dirty="0">
+                <a:solidFill>
+                  <a:schemeClr val="tx1"/>
+                </a:solidFill>
+                <a:effectLst/>
+                <a:latin typeface="+mn-lt"/>
+                <a:ea typeface="+mn-ea"/>
+                <a:cs typeface="+mn-cs"/>
+              </a:rPr>
+              <a:t>  LPFilter1.connect(</a:t>
+            </a:r>
+            <a:r>
+              <a:rPr lang="en-GB" sz="1200" b="0" kern="1200" dirty="0" err="1">
+                <a:solidFill>
+                  <a:schemeClr val="tx1"/>
+                </a:solidFill>
+                <a:effectLst/>
+                <a:latin typeface="+mn-lt"/>
+                <a:ea typeface="+mn-ea"/>
+                <a:cs typeface="+mn-cs"/>
+              </a:rPr>
+              <a:t>DecayGain</a:t>
+            </a:r>
+            <a:r>
+              <a:rPr lang="en-GB" sz="1200" b="0" kern="1200" dirty="0">
+                <a:solidFill>
+                  <a:schemeClr val="tx1"/>
+                </a:solidFill>
+                <a:effectLst/>
+                <a:latin typeface="+mn-lt"/>
+                <a:ea typeface="+mn-ea"/>
+                <a:cs typeface="+mn-cs"/>
+              </a:rPr>
+              <a:t>)</a:t>
+            </a:r>
+          </a:p>
+          <a:p>
+            <a:r>
+              <a:rPr lang="en-GB" sz="1200" b="0" kern="1200" dirty="0">
+                <a:solidFill>
+                  <a:schemeClr val="tx1"/>
+                </a:solidFill>
+                <a:effectLst/>
+                <a:latin typeface="+mn-lt"/>
+                <a:ea typeface="+mn-ea"/>
+                <a:cs typeface="+mn-cs"/>
+              </a:rPr>
+              <a:t>  </a:t>
+            </a:r>
+            <a:r>
+              <a:rPr lang="en-GB" sz="1200" b="0" kern="1200" dirty="0" err="1">
+                <a:solidFill>
+                  <a:schemeClr val="tx1"/>
+                </a:solidFill>
+                <a:effectLst/>
+                <a:latin typeface="+mn-lt"/>
+                <a:ea typeface="+mn-ea"/>
+                <a:cs typeface="+mn-cs"/>
+              </a:rPr>
+              <a:t>DecayGain.connect</a:t>
+            </a:r>
+            <a:r>
+              <a:rPr lang="en-GB" sz="1200" b="0" kern="1200" dirty="0">
+                <a:solidFill>
+                  <a:schemeClr val="tx1"/>
+                </a:solidFill>
+                <a:effectLst/>
+                <a:latin typeface="+mn-lt"/>
+                <a:ea typeface="+mn-ea"/>
+                <a:cs typeface="+mn-cs"/>
+              </a:rPr>
+              <a:t>(</a:t>
+            </a:r>
+            <a:r>
+              <a:rPr lang="en-GB" sz="1200" b="0" kern="1200" dirty="0" err="1">
+                <a:solidFill>
+                  <a:schemeClr val="tx1"/>
+                </a:solidFill>
+                <a:effectLst/>
+                <a:latin typeface="+mn-lt"/>
+                <a:ea typeface="+mn-ea"/>
+                <a:cs typeface="+mn-cs"/>
+              </a:rPr>
+              <a:t>aDelay</a:t>
+            </a:r>
+            <a:r>
+              <a:rPr lang="en-GB" sz="1200" b="0" kern="1200" dirty="0">
+                <a:solidFill>
+                  <a:schemeClr val="tx1"/>
+                </a:solidFill>
+                <a:effectLst/>
+                <a:latin typeface="+mn-lt"/>
+                <a:ea typeface="+mn-ea"/>
+                <a:cs typeface="+mn-cs"/>
+              </a:rPr>
+              <a:t>)</a:t>
+            </a:r>
+          </a:p>
+          <a:p>
+            <a:r>
+              <a:rPr lang="en-GB" sz="1200" b="0" kern="1200" dirty="0">
+                <a:solidFill>
+                  <a:schemeClr val="tx1"/>
+                </a:solidFill>
+                <a:effectLst/>
+                <a:latin typeface="+mn-lt"/>
+                <a:ea typeface="+mn-ea"/>
+                <a:cs typeface="+mn-cs"/>
+              </a:rPr>
+              <a:t>  </a:t>
+            </a:r>
+            <a:r>
+              <a:rPr lang="en-GB" sz="1200" b="0" kern="1200" dirty="0" err="1">
+                <a:solidFill>
+                  <a:schemeClr val="tx1"/>
+                </a:solidFill>
+                <a:effectLst/>
+                <a:latin typeface="+mn-lt"/>
+                <a:ea typeface="+mn-ea"/>
+                <a:cs typeface="+mn-cs"/>
+              </a:rPr>
+              <a:t>DriveNode.connect</a:t>
+            </a:r>
+            <a:r>
+              <a:rPr lang="en-GB" sz="1200" b="0" kern="1200" dirty="0">
+                <a:solidFill>
+                  <a:schemeClr val="tx1"/>
+                </a:solidFill>
+                <a:effectLst/>
+                <a:latin typeface="+mn-lt"/>
+                <a:ea typeface="+mn-ea"/>
+                <a:cs typeface="+mn-cs"/>
+              </a:rPr>
+              <a:t>(</a:t>
+            </a:r>
+            <a:r>
+              <a:rPr lang="en-GB" sz="1200" b="0" kern="1200" dirty="0" err="1">
+                <a:solidFill>
+                  <a:schemeClr val="tx1"/>
+                </a:solidFill>
+                <a:effectLst/>
+                <a:latin typeface="+mn-lt"/>
+                <a:ea typeface="+mn-ea"/>
+                <a:cs typeface="+mn-cs"/>
+              </a:rPr>
+              <a:t>aDelay</a:t>
+            </a:r>
+            <a:r>
+              <a:rPr lang="en-GB" sz="1200" b="0" kern="1200" dirty="0">
+                <a:solidFill>
+                  <a:schemeClr val="tx1"/>
+                </a:solidFill>
+                <a:effectLst/>
+                <a:latin typeface="+mn-lt"/>
+                <a:ea typeface="+mn-ea"/>
+                <a:cs typeface="+mn-cs"/>
+              </a:rPr>
+              <a:t>)</a:t>
+            </a:r>
+          </a:p>
+          <a:p>
+            <a:r>
+              <a:rPr lang="en-GB" sz="1200" b="0" kern="1200" dirty="0">
+                <a:solidFill>
+                  <a:schemeClr val="tx1"/>
+                </a:solidFill>
+                <a:effectLst/>
+                <a:latin typeface="+mn-lt"/>
+                <a:ea typeface="+mn-ea"/>
+                <a:cs typeface="+mn-cs"/>
+              </a:rPr>
+              <a:t>  </a:t>
+            </a:r>
+            <a:r>
+              <a:rPr lang="en-GB" sz="1200" b="0" kern="1200" dirty="0" err="1">
+                <a:solidFill>
+                  <a:schemeClr val="tx1"/>
+                </a:solidFill>
+                <a:effectLst/>
+                <a:latin typeface="+mn-lt"/>
+                <a:ea typeface="+mn-ea"/>
+                <a:cs typeface="+mn-cs"/>
+              </a:rPr>
+              <a:t>aDelay.connect</a:t>
+            </a:r>
+            <a:r>
+              <a:rPr lang="en-GB" sz="1200" b="0" kern="1200" dirty="0">
+                <a:solidFill>
+                  <a:schemeClr val="tx1"/>
+                </a:solidFill>
+                <a:effectLst/>
+                <a:latin typeface="+mn-lt"/>
+                <a:ea typeface="+mn-ea"/>
+                <a:cs typeface="+mn-cs"/>
+              </a:rPr>
+              <a:t>(LPFilter1)</a:t>
+            </a:r>
+          </a:p>
+          <a:p>
+            <a:r>
+              <a:rPr lang="en-GB" sz="1200" b="0" kern="1200" dirty="0">
+                <a:solidFill>
+                  <a:schemeClr val="tx1"/>
+                </a:solidFill>
+                <a:effectLst/>
+                <a:latin typeface="+mn-lt"/>
+                <a:ea typeface="+mn-ea"/>
+                <a:cs typeface="+mn-cs"/>
+              </a:rPr>
+              <a:t>  </a:t>
+            </a:r>
+            <a:r>
+              <a:rPr lang="en-GB" sz="1200" b="0" kern="1200" dirty="0" err="1">
+                <a:solidFill>
+                  <a:schemeClr val="tx1"/>
+                </a:solidFill>
+                <a:effectLst/>
+                <a:latin typeface="+mn-lt"/>
+                <a:ea typeface="+mn-ea"/>
+                <a:cs typeface="+mn-cs"/>
+              </a:rPr>
+              <a:t>DecayGain.connect</a:t>
+            </a:r>
+            <a:r>
+              <a:rPr lang="en-GB" sz="1200" b="0" kern="1200" dirty="0">
+                <a:solidFill>
+                  <a:schemeClr val="tx1"/>
+                </a:solidFill>
+                <a:effectLst/>
+                <a:latin typeface="+mn-lt"/>
+                <a:ea typeface="+mn-ea"/>
+                <a:cs typeface="+mn-cs"/>
+              </a:rPr>
+              <a:t>(</a:t>
+            </a:r>
+            <a:r>
+              <a:rPr lang="en-GB" sz="1200" b="0" kern="1200" dirty="0" err="1">
+                <a:solidFill>
+                  <a:schemeClr val="tx1"/>
+                </a:solidFill>
+                <a:effectLst/>
+                <a:latin typeface="+mn-lt"/>
+                <a:ea typeface="+mn-ea"/>
+                <a:cs typeface="+mn-cs"/>
+              </a:rPr>
+              <a:t>context.destination</a:t>
+            </a:r>
+            <a:r>
+              <a:rPr lang="en-GB" sz="1200" b="0" kern="1200" dirty="0">
+                <a:solidFill>
+                  <a:schemeClr val="tx1"/>
+                </a:solidFill>
+                <a:effectLst/>
+                <a:latin typeface="+mn-lt"/>
+                <a:ea typeface="+mn-ea"/>
+                <a:cs typeface="+mn-cs"/>
+              </a:rPr>
+              <a:t>)  </a:t>
+            </a:r>
+          </a:p>
+          <a:p>
+            <a:endParaRPr lang="en-GB" dirty="0"/>
+          </a:p>
+          <a:p>
+            <a:r>
+              <a:rPr lang="en-GB" sz="1200" b="0" kern="1200" dirty="0">
+                <a:solidFill>
+                  <a:schemeClr val="tx1"/>
+                </a:solidFill>
+                <a:effectLst/>
+                <a:latin typeface="+mn-lt"/>
+                <a:ea typeface="+mn-ea"/>
+                <a:cs typeface="+mn-cs"/>
+              </a:rPr>
+              <a:t>  </a:t>
+            </a:r>
+            <a:r>
+              <a:rPr lang="en-GB" sz="1200" b="0" kern="1200" dirty="0" err="1">
+                <a:solidFill>
+                  <a:schemeClr val="tx1"/>
+                </a:solidFill>
+                <a:effectLst/>
+                <a:latin typeface="+mn-lt"/>
+                <a:ea typeface="+mn-ea"/>
+                <a:cs typeface="+mn-cs"/>
+              </a:rPr>
+              <a:t>DecayGain.connect</a:t>
+            </a:r>
+            <a:r>
+              <a:rPr lang="en-GB" sz="1200" b="0" kern="1200" dirty="0">
+                <a:solidFill>
+                  <a:schemeClr val="tx1"/>
+                </a:solidFill>
+                <a:effectLst/>
+                <a:latin typeface="+mn-lt"/>
+                <a:ea typeface="+mn-ea"/>
+                <a:cs typeface="+mn-cs"/>
+              </a:rPr>
+              <a:t>(</a:t>
+            </a:r>
+            <a:r>
+              <a:rPr lang="en-GB" sz="1200" b="0" kern="1200" dirty="0" err="1">
+                <a:solidFill>
+                  <a:schemeClr val="tx1"/>
+                </a:solidFill>
+                <a:effectLst/>
+                <a:latin typeface="+mn-lt"/>
+                <a:ea typeface="+mn-ea"/>
+                <a:cs typeface="+mn-cs"/>
+              </a:rPr>
+              <a:t>aDelay</a:t>
+            </a:r>
+            <a:r>
+              <a:rPr lang="en-GB" sz="1200" b="0" kern="1200" dirty="0">
+                <a:solidFill>
+                  <a:schemeClr val="tx1"/>
+                </a:solidFill>
+                <a:effectLst/>
+                <a:latin typeface="+mn-lt"/>
+                <a:ea typeface="+mn-ea"/>
+                <a:cs typeface="+mn-cs"/>
+              </a:rPr>
+              <a:t>)</a:t>
+            </a:r>
+          </a:p>
+          <a:p>
+            <a:r>
+              <a:rPr lang="en-GB" sz="1200" b="0" kern="1200" dirty="0">
+                <a:solidFill>
+                  <a:schemeClr val="tx1"/>
+                </a:solidFill>
+                <a:effectLst/>
+                <a:latin typeface="+mn-lt"/>
+                <a:ea typeface="+mn-ea"/>
+                <a:cs typeface="+mn-cs"/>
+              </a:rPr>
+              <a:t>  </a:t>
+            </a:r>
+            <a:r>
+              <a:rPr lang="en-GB" sz="1200" b="0" kern="1200" dirty="0" err="1">
+                <a:solidFill>
+                  <a:schemeClr val="tx1"/>
+                </a:solidFill>
+                <a:effectLst/>
+                <a:latin typeface="+mn-lt"/>
+                <a:ea typeface="+mn-ea"/>
+                <a:cs typeface="+mn-cs"/>
+              </a:rPr>
+              <a:t>DriveNode.connect</a:t>
+            </a:r>
+            <a:r>
+              <a:rPr lang="en-GB" sz="1200" b="0" kern="1200" dirty="0">
+                <a:solidFill>
+                  <a:schemeClr val="tx1"/>
+                </a:solidFill>
+                <a:effectLst/>
+                <a:latin typeface="+mn-lt"/>
+                <a:ea typeface="+mn-ea"/>
+                <a:cs typeface="+mn-cs"/>
+              </a:rPr>
+              <a:t>(</a:t>
+            </a:r>
+            <a:r>
+              <a:rPr lang="en-GB" sz="1200" b="0" kern="1200" dirty="0" err="1">
+                <a:solidFill>
+                  <a:schemeClr val="tx1"/>
+                </a:solidFill>
+                <a:effectLst/>
+                <a:latin typeface="+mn-lt"/>
+                <a:ea typeface="+mn-ea"/>
+                <a:cs typeface="+mn-cs"/>
+              </a:rPr>
+              <a:t>aDelay</a:t>
+            </a:r>
+            <a:r>
+              <a:rPr lang="en-GB" sz="1200" b="0" kern="1200" dirty="0">
+                <a:solidFill>
+                  <a:schemeClr val="tx1"/>
+                </a:solidFill>
+                <a:effectLst/>
+                <a:latin typeface="+mn-lt"/>
+                <a:ea typeface="+mn-ea"/>
+                <a:cs typeface="+mn-cs"/>
+              </a:rPr>
+              <a:t>)</a:t>
+            </a:r>
+          </a:p>
+          <a:p>
+            <a:r>
+              <a:rPr lang="en-GB" sz="1200" b="0" kern="1200" dirty="0">
+                <a:solidFill>
+                  <a:schemeClr val="tx1"/>
+                </a:solidFill>
+                <a:effectLst/>
+                <a:latin typeface="+mn-lt"/>
+                <a:ea typeface="+mn-ea"/>
+                <a:cs typeface="+mn-cs"/>
+              </a:rPr>
+              <a:t>  </a:t>
+            </a:r>
+            <a:r>
+              <a:rPr lang="en-GB" sz="1200" b="0" kern="1200" dirty="0" err="1">
+                <a:solidFill>
+                  <a:schemeClr val="tx1"/>
+                </a:solidFill>
+                <a:effectLst/>
+                <a:latin typeface="+mn-lt"/>
+                <a:ea typeface="+mn-ea"/>
+                <a:cs typeface="+mn-cs"/>
+              </a:rPr>
+              <a:t>aDelay.connect</a:t>
+            </a:r>
+            <a:r>
+              <a:rPr lang="en-GB" sz="1200" b="0" kern="1200" dirty="0">
+                <a:solidFill>
+                  <a:schemeClr val="tx1"/>
+                </a:solidFill>
+                <a:effectLst/>
+                <a:latin typeface="+mn-lt"/>
+                <a:ea typeface="+mn-ea"/>
+                <a:cs typeface="+mn-cs"/>
+              </a:rPr>
+              <a:t>(LPFilter1)</a:t>
+            </a:r>
+          </a:p>
+          <a:p>
+            <a:r>
+              <a:rPr lang="en-GB" sz="1200" b="0" kern="1200" dirty="0">
+                <a:solidFill>
+                  <a:schemeClr val="tx1"/>
+                </a:solidFill>
+                <a:effectLst/>
+                <a:latin typeface="+mn-lt"/>
+                <a:ea typeface="+mn-ea"/>
+                <a:cs typeface="+mn-cs"/>
+              </a:rPr>
+              <a:t>  </a:t>
+            </a:r>
+            <a:r>
+              <a:rPr lang="en-GB" sz="1200" b="0" kern="1200" dirty="0" err="1">
+                <a:solidFill>
+                  <a:schemeClr val="tx1"/>
+                </a:solidFill>
+                <a:effectLst/>
+                <a:latin typeface="+mn-lt"/>
+                <a:ea typeface="+mn-ea"/>
+                <a:cs typeface="+mn-cs"/>
+              </a:rPr>
+              <a:t>DecayGain.connect</a:t>
+            </a:r>
+            <a:r>
+              <a:rPr lang="en-GB" sz="1200" b="0" kern="1200" dirty="0">
+                <a:solidFill>
+                  <a:schemeClr val="tx1"/>
+                </a:solidFill>
+                <a:effectLst/>
+                <a:latin typeface="+mn-lt"/>
+                <a:ea typeface="+mn-ea"/>
+                <a:cs typeface="+mn-cs"/>
+              </a:rPr>
+              <a:t>(</a:t>
+            </a:r>
+            <a:r>
+              <a:rPr lang="en-GB" sz="1200" b="0" kern="1200" dirty="0" err="1">
+                <a:solidFill>
+                  <a:schemeClr val="tx1"/>
+                </a:solidFill>
+                <a:effectLst/>
+                <a:latin typeface="+mn-lt"/>
+                <a:ea typeface="+mn-ea"/>
+                <a:cs typeface="+mn-cs"/>
+              </a:rPr>
+              <a:t>context.destination</a:t>
+            </a:r>
+            <a:r>
+              <a:rPr lang="en-GB" sz="1200" b="0" kern="1200" dirty="0">
+                <a:solidFill>
+                  <a:schemeClr val="tx1"/>
+                </a:solidFill>
+                <a:effectLst/>
+                <a:latin typeface="+mn-lt"/>
+                <a:ea typeface="+mn-ea"/>
+                <a:cs typeface="+mn-cs"/>
+              </a:rPr>
+              <a:t>)  </a:t>
+            </a:r>
+          </a:p>
+          <a:p>
             <a:endParaRPr lang="en-GB" dirty="0"/>
           </a:p>
         </p:txBody>
@@ -4746,7 +5266,91 @@
           <a:p>
             <a:fld id="{D0B1D951-C98B-42A2-8282-D55336F714E5}" type="slidenum">
               <a:rPr lang="en-GB" smtClean="0"/>
-              <a:t>3</a:t>
+              <a:t>1</a:t>
+            </a:fld>
+            <a:endParaRPr lang="en-GB"/>
+          </a:p>
+        </p:txBody>
+      </p:sp>
+    </p:spTree>
+    <p:extLst>
+      <p:ext uri="{BB962C8B-B14F-4D97-AF65-F5344CB8AC3E}">
+        <p14:creationId xmlns:p14="http://schemas.microsoft.com/office/powerpoint/2010/main" val="1211539124"/>
+      </p:ext>
+    </p:extLst>
+  </p:cSld>
+  <p:clrMapOvr>
+    <a:masterClrMapping/>
+  </p:clrMapOvr>
+</p:notes>
+</file>
+
+<file path=ppt/notesSlides/notesSlide2.xml><?xml version="1.0" encoding="utf-8"?>
+<p:notes xmlns:a="http://schemas.openxmlformats.org/drawingml/2006/main" xmlns:r="http://schemas.openxmlformats.org/officeDocument/2006/relationships" xmlns:p="http://schemas.openxmlformats.org/presentationml/2006/main">
+  <p:cSld>
+    <p:spTree>
+      <p:nvGrpSpPr>
+        <p:cNvPr id="1" name=""/>
+        <p:cNvGrpSpPr/>
+        <p:nvPr/>
+      </p:nvGrpSpPr>
+      <p:grpSpPr>
+        <a:xfrm>
+          <a:off x="0" y="0"/>
+          <a:ext cx="0" cy="0"/>
+          <a:chOff x="0" y="0"/>
+          <a:chExt cx="0" cy="0"/>
+        </a:xfrm>
+      </p:grpSpPr>
+      <p:sp>
+        <p:nvSpPr>
+          <p:cNvPr id="2" name="Slide Image Placeholder 1"/>
+          <p:cNvSpPr>
+            <a:spLocks noGrp="1" noRot="1" noChangeAspect="1"/>
+          </p:cNvSpPr>
+          <p:nvPr>
+            <p:ph type="sldImg"/>
+          </p:nvPr>
+        </p:nvSpPr>
+        <p:spPr/>
+      </p:sp>
+      <p:sp>
+        <p:nvSpPr>
+          <p:cNvPr id="3" name="Notes Placeholder 2"/>
+          <p:cNvSpPr>
+            <a:spLocks noGrp="1"/>
+          </p:cNvSpPr>
+          <p:nvPr>
+            <p:ph type="body" idx="1"/>
+          </p:nvPr>
+        </p:nvSpPr>
+        <p:spPr/>
+        <p:txBody>
+          <a:bodyPr/>
+          <a:lstStyle/>
+          <a:p>
+            <a:endParaRPr lang="en-GB" dirty="0"/>
+          </a:p>
+        </p:txBody>
+      </p:sp>
+      <p:sp>
+        <p:nvSpPr>
+          <p:cNvPr id="4" name="Slide Number Placeholder 3"/>
+          <p:cNvSpPr>
+            <a:spLocks noGrp="1"/>
+          </p:cNvSpPr>
+          <p:nvPr>
+            <p:ph type="sldNum" sz="quarter" idx="5"/>
+          </p:nvPr>
+        </p:nvSpPr>
+        <p:spPr/>
+        <p:txBody>
+          <a:bodyPr/>
+          <a:lstStyle/>
+          <a:p>
+            <a:fld id="{D0B1D951-C98B-42A2-8282-D55336F714E5}" type="slidenum">
+              <a:rPr lang="en-GB" smtClean="0"/>
+              <a:t>4</a:t>
             </a:fld>
             <a:endParaRPr lang="en-GB"/>
           </a:p>
@@ -4914,7 +5518,7 @@
           <a:p>
             <a:fld id="{53F5E260-054C-4638-8D97-401FEF531A6C}" type="datetimeFigureOut">
               <a:rPr lang="en-GB" smtClean="0"/>
-              <a:t>31/10/2025</a:t>
+              <a:t>27/02/2026</a:t>
             </a:fld>
             <a:endParaRPr lang="en-GB"/>
           </a:p>
@@ -5114,7 +5718,7 @@
           <a:p>
             <a:fld id="{53F5E260-054C-4638-8D97-401FEF531A6C}" type="datetimeFigureOut">
               <a:rPr lang="en-GB" smtClean="0"/>
-              <a:t>31/10/2025</a:t>
+              <a:t>27/02/2026</a:t>
             </a:fld>
             <a:endParaRPr lang="en-GB"/>
           </a:p>
@@ -5324,7 +5928,7 @@
           <a:p>
             <a:fld id="{53F5E260-054C-4638-8D97-401FEF531A6C}" type="datetimeFigureOut">
               <a:rPr lang="en-GB" smtClean="0"/>
-              <a:t>31/10/2025</a:t>
+              <a:t>27/02/2026</a:t>
             </a:fld>
             <a:endParaRPr lang="en-GB"/>
           </a:p>
@@ -5524,7 +6128,7 @@
           <a:p>
             <a:fld id="{53F5E260-054C-4638-8D97-401FEF531A6C}" type="datetimeFigureOut">
               <a:rPr lang="en-GB" smtClean="0"/>
-              <a:t>31/10/2025</a:t>
+              <a:t>27/02/2026</a:t>
             </a:fld>
             <a:endParaRPr lang="en-GB"/>
           </a:p>
@@ -5800,7 +6404,7 @@
           <a:p>
             <a:fld id="{53F5E260-054C-4638-8D97-401FEF531A6C}" type="datetimeFigureOut">
               <a:rPr lang="en-GB" smtClean="0"/>
-              <a:t>31/10/2025</a:t>
+              <a:t>27/02/2026</a:t>
             </a:fld>
             <a:endParaRPr lang="en-GB"/>
           </a:p>
@@ -6068,7 +6672,7 @@
           <a:p>
             <a:fld id="{53F5E260-054C-4638-8D97-401FEF531A6C}" type="datetimeFigureOut">
               <a:rPr lang="en-GB" smtClean="0"/>
-              <a:t>31/10/2025</a:t>
+              <a:t>27/02/2026</a:t>
             </a:fld>
             <a:endParaRPr lang="en-GB"/>
           </a:p>
@@ -6483,7 +7087,7 @@
           <a:p>
             <a:fld id="{53F5E260-054C-4638-8D97-401FEF531A6C}" type="datetimeFigureOut">
               <a:rPr lang="en-GB" smtClean="0"/>
-              <a:t>31/10/2025</a:t>
+              <a:t>27/02/2026</a:t>
             </a:fld>
             <a:endParaRPr lang="en-GB"/>
           </a:p>
@@ -6625,7 +7229,7 @@
           <a:p>
             <a:fld id="{53F5E260-054C-4638-8D97-401FEF531A6C}" type="datetimeFigureOut">
               <a:rPr lang="en-GB" smtClean="0"/>
-              <a:t>31/10/2025</a:t>
+              <a:t>27/02/2026</a:t>
             </a:fld>
             <a:endParaRPr lang="en-GB"/>
           </a:p>
@@ -6738,7 +7342,7 @@
           <a:p>
             <a:fld id="{53F5E260-054C-4638-8D97-401FEF531A6C}" type="datetimeFigureOut">
               <a:rPr lang="en-GB" smtClean="0"/>
-              <a:t>31/10/2025</a:t>
+              <a:t>27/02/2026</a:t>
             </a:fld>
             <a:endParaRPr lang="en-GB"/>
           </a:p>
@@ -7051,7 +7655,7 @@
           <a:p>
             <a:fld id="{53F5E260-054C-4638-8D97-401FEF531A6C}" type="datetimeFigureOut">
               <a:rPr lang="en-GB" smtClean="0"/>
-              <a:t>31/10/2025</a:t>
+              <a:t>27/02/2026</a:t>
             </a:fld>
             <a:endParaRPr lang="en-GB"/>
           </a:p>
@@ -7340,7 +7944,7 @@
           <a:p>
             <a:fld id="{53F5E260-054C-4638-8D97-401FEF531A6C}" type="datetimeFigureOut">
               <a:rPr lang="en-GB" smtClean="0"/>
-              <a:t>31/10/2025</a:t>
+              <a:t>27/02/2026</a:t>
             </a:fld>
             <a:endParaRPr lang="en-GB"/>
           </a:p>
@@ -7583,7 +8187,7 @@
           <a:p>
             <a:fld id="{53F5E260-054C-4638-8D97-401FEF531A6C}" type="datetimeFigureOut">
               <a:rPr lang="en-GB" smtClean="0"/>
-              <a:t>31/10/2025</a:t>
+              <a:t>27/02/2026</a:t>
             </a:fld>
             <a:endParaRPr lang="en-GB"/>
           </a:p>
@@ -8016,14 +8620,21 @@
             <p:ph type="title"/>
           </p:nvPr>
         </p:nvSpPr>
-        <p:spPr/>
+        <p:spPr>
+          <a:xfrm>
+            <a:off x="1530350" y="365125"/>
+            <a:ext cx="9823449" cy="574039"/>
+          </a:xfrm>
+        </p:spPr>
         <p:txBody>
-          <a:bodyPr/>
+          <a:bodyPr>
+            <a:normAutofit fontScale="90000"/>
+          </a:bodyPr>
           <a:lstStyle/>
           <a:p>
             <a:r>
               <a:rPr lang="en-US" dirty="0"/>
-              <a:t>Guitar pluck</a:t>
+              <a:t>Plucked string</a:t>
             </a:r>
             <a:endParaRPr lang="en-GB" dirty="0"/>
           </a:p>
@@ -8043,7 +8654,7 @@
         </p:nvSpPr>
         <p:spPr>
           <a:xfrm>
-            <a:off x="582750" y="2070454"/>
+            <a:off x="582750" y="5497987"/>
             <a:ext cx="1116000" cy="648000"/>
           </a:xfrm>
           <a:prstGeom prst="rect">
@@ -8095,7 +8706,7 @@
         </p:nvSpPr>
         <p:spPr>
           <a:xfrm>
-            <a:off x="2188346" y="2070454"/>
+            <a:off x="2188346" y="5497987"/>
             <a:ext cx="1116000" cy="648000"/>
           </a:xfrm>
           <a:prstGeom prst="rect">
@@ -8158,7 +8769,7 @@
         </p:nvCxnSpPr>
         <p:spPr>
           <a:xfrm>
-            <a:off x="1698750" y="2394454"/>
+            <a:off x="1698750" y="5821987"/>
             <a:ext cx="489596" cy="0"/>
           </a:xfrm>
           <a:prstGeom prst="straightConnector1">
@@ -8203,9 +8814,9 @@
           <p:nvPr/>
         </p:nvCxnSpPr>
         <p:spPr>
-          <a:xfrm>
-            <a:off x="3304346" y="2394454"/>
-            <a:ext cx="579624" cy="667666"/>
+          <a:xfrm flipV="1">
+            <a:off x="3304346" y="4871870"/>
+            <a:ext cx="579624" cy="950117"/>
           </a:xfrm>
           <a:prstGeom prst="straightConnector1">
             <a:avLst/>
@@ -8246,7 +8857,7 @@
         </p:nvSpPr>
         <p:spPr>
           <a:xfrm>
-            <a:off x="582750" y="3357226"/>
+            <a:off x="582750" y="4548996"/>
             <a:ext cx="1116000" cy="648000"/>
           </a:xfrm>
           <a:prstGeom prst="rect">
@@ -8279,11 +8890,7 @@
             <a:pPr algn="ctr"/>
             <a:r>
               <a:rPr lang="en-US" dirty="0"/>
-              <a:t>C</a:t>
-            </a:r>
-            <a:r>
-              <a:rPr lang="en-GB" dirty="0" err="1"/>
-              <a:t>haracter</a:t>
+              <a:t>Sawtooth</a:t>
             </a:r>
             <a:r>
               <a:rPr lang="en-GB" dirty="0"/>
@@ -8306,7 +8913,7 @@
         </p:nvSpPr>
         <p:spPr>
           <a:xfrm>
-            <a:off x="2188346" y="3357226"/>
+            <a:off x="2188346" y="4548996"/>
             <a:ext cx="1116000" cy="648000"/>
           </a:xfrm>
           <a:prstGeom prst="rect">
@@ -8339,7 +8946,7 @@
             <a:pPr algn="ctr"/>
             <a:r>
               <a:rPr lang="en-GB" dirty="0"/>
-              <a:t>Character</a:t>
+              <a:t>Sawtooth</a:t>
             </a:r>
           </a:p>
           <a:p>
@@ -8369,7 +8976,7 @@
         </p:nvCxnSpPr>
         <p:spPr>
           <a:xfrm>
-            <a:off x="1698750" y="3681226"/>
+            <a:off x="1698750" y="4872996"/>
             <a:ext cx="489596" cy="0"/>
           </a:xfrm>
           <a:prstGeom prst="straightConnector1">
@@ -8415,8 +9022,8 @@
         </p:nvCxnSpPr>
         <p:spPr>
           <a:xfrm flipV="1">
-            <a:off x="3304346" y="3062120"/>
-            <a:ext cx="579624" cy="619106"/>
+            <a:off x="3304346" y="4871870"/>
+            <a:ext cx="579624" cy="1126"/>
           </a:xfrm>
           <a:prstGeom prst="straightConnector1">
             <a:avLst/>
@@ -8457,8 +9064,8 @@
         </p:nvSpPr>
         <p:spPr>
           <a:xfrm>
-            <a:off x="3883970" y="2738120"/>
-            <a:ext cx="972000" cy="648000"/>
+            <a:off x="3883970" y="4547870"/>
+            <a:ext cx="1056324" cy="648000"/>
           </a:xfrm>
           <a:prstGeom prst="rect">
             <a:avLst/>
@@ -8490,14 +9097,7 @@
             <a:pPr algn="ctr"/>
             <a:r>
               <a:rPr lang="en-GB" dirty="0"/>
-              <a:t>Pluck</a:t>
-            </a:r>
-          </a:p>
-          <a:p>
-            <a:pPr algn="ctr"/>
-            <a:r>
-              <a:rPr lang="en-GB" dirty="0"/>
-              <a:t>Damper</a:t>
+              <a:t>Envelope</a:t>
             </a:r>
           </a:p>
         </p:txBody>
@@ -8516,7 +9116,7 @@
         </p:nvSpPr>
         <p:spPr>
           <a:xfrm>
-            <a:off x="5372294" y="2734162"/>
+            <a:off x="5372294" y="4543912"/>
             <a:ext cx="828000" cy="648000"/>
           </a:xfrm>
           <a:prstGeom prst="rect">
@@ -8549,59 +9149,7 @@
             <a:pPr algn="ctr"/>
             <a:r>
               <a:rPr lang="en-GB" dirty="0"/>
-              <a:t>Input</a:t>
-            </a:r>
-          </a:p>
-        </p:txBody>
-      </p:sp>
-      <p:sp>
-        <p:nvSpPr>
-          <p:cNvPr id="24" name="Rectangle 23">
-            <a:extLst>
-              <a:ext uri="{FF2B5EF4-FFF2-40B4-BE49-F238E27FC236}">
-                <a16:creationId xmlns:a16="http://schemas.microsoft.com/office/drawing/2014/main" id="{D9E0928B-17B4-908A-2513-7E0B5086D4FC}"/>
-              </a:ext>
-            </a:extLst>
-          </p:cNvPr>
-          <p:cNvSpPr/>
-          <p:nvPr/>
-        </p:nvSpPr>
-        <p:spPr>
-          <a:xfrm>
-            <a:off x="8589631" y="2743312"/>
-            <a:ext cx="900000" cy="648000"/>
-          </a:xfrm>
-          <a:prstGeom prst="rect">
-            <a:avLst/>
-          </a:prstGeom>
-          <a:solidFill>
-            <a:srgbClr val="7030A0"/>
-          </a:solidFill>
-        </p:spPr>
-        <p:style>
-          <a:lnRef idx="2">
-            <a:schemeClr val="accent1">
-              <a:shade val="50000"/>
-            </a:schemeClr>
-          </a:lnRef>
-          <a:fillRef idx="1">
-            <a:schemeClr val="accent1"/>
-          </a:fillRef>
-          <a:effectRef idx="0">
-            <a:schemeClr val="accent1"/>
-          </a:effectRef>
-          <a:fontRef idx="minor">
-            <a:schemeClr val="lt1"/>
-          </a:fontRef>
-        </p:style>
-        <p:txBody>
-          <a:bodyPr rtlCol="0" anchor="ctr"/>
-          <a:lstStyle/>
-          <a:p>
-            <a:pPr algn="ctr"/>
-            <a:r>
-              <a:rPr lang="en-GB" dirty="0"/>
-              <a:t>Output</a:t>
+              <a:t>Delay</a:t>
             </a:r>
           </a:p>
         </p:txBody>
@@ -8620,7 +9168,7 @@
         </p:nvSpPr>
         <p:spPr>
           <a:xfrm>
-            <a:off x="6988709" y="1974349"/>
+            <a:off x="6988709" y="4540936"/>
             <a:ext cx="1080000" cy="648000"/>
           </a:xfrm>
           <a:prstGeom prst="rect">
@@ -8653,14 +9201,7 @@
             <a:pPr algn="ctr"/>
             <a:r>
               <a:rPr lang="en-GB" dirty="0"/>
-              <a:t>Feedback</a:t>
-            </a:r>
-          </a:p>
-          <a:p>
-            <a:pPr algn="ctr"/>
-            <a:r>
-              <a:rPr lang="en-GB" dirty="0"/>
-              <a:t>Delay</a:t>
+              <a:t>LPF</a:t>
             </a:r>
           </a:p>
         </p:txBody>
@@ -8679,7 +9220,7 @@
         </p:nvSpPr>
         <p:spPr>
           <a:xfrm>
-            <a:off x="10063613" y="2743312"/>
+            <a:off x="10063613" y="4553062"/>
             <a:ext cx="1260000" cy="648000"/>
           </a:xfrm>
           <a:prstGeom prst="rect">
@@ -8728,14 +9269,13 @@
           </p:cNvPr>
           <p:cNvCxnSpPr>
             <a:cxnSpLocks/>
-            <a:stCxn id="24" idx="3"/>
             <a:endCxn id="29" idx="1"/>
           </p:cNvCxnSpPr>
           <p:nvPr/>
         </p:nvCxnSpPr>
         <p:spPr>
           <a:xfrm>
-            <a:off x="9489631" y="3067312"/>
+            <a:off x="9489631" y="4877062"/>
             <a:ext cx="573982" cy="0"/>
           </a:xfrm>
           <a:prstGeom prst="straightConnector1">
@@ -8774,61 +9314,13 @@
           </p:cNvPr>
           <p:cNvCxnSpPr>
             <a:cxnSpLocks/>
-            <a:stCxn id="22" idx="3"/>
-            <a:endCxn id="23" idx="1"/>
           </p:cNvCxnSpPr>
           <p:nvPr/>
         </p:nvCxnSpPr>
         <p:spPr>
           <a:xfrm flipV="1">
-            <a:off x="4855970" y="3058162"/>
+            <a:off x="4909942" y="4867912"/>
             <a:ext cx="516324" cy="3958"/>
-          </a:xfrm>
-          <a:prstGeom prst="straightConnector1">
-            <a:avLst/>
-          </a:prstGeom>
-          <a:ln w="31750">
-            <a:solidFill>
-              <a:schemeClr val="tx1"/>
-            </a:solidFill>
-            <a:tailEnd type="arrow" w="lg" len="lg"/>
-          </a:ln>
-        </p:spPr>
-        <p:style>
-          <a:lnRef idx="1">
-            <a:schemeClr val="accent1"/>
-          </a:lnRef>
-          <a:fillRef idx="0">
-            <a:schemeClr val="accent1"/>
-          </a:fillRef>
-          <a:effectRef idx="0">
-            <a:schemeClr val="accent1"/>
-          </a:effectRef>
-          <a:fontRef idx="minor">
-            <a:schemeClr val="tx1"/>
-          </a:fontRef>
-        </p:style>
-      </p:cxnSp>
-      <p:cxnSp>
-        <p:nvCxnSpPr>
-          <p:cNvPr id="40" name="Straight Arrow Connector 39">
-            <a:extLst>
-              <a:ext uri="{FF2B5EF4-FFF2-40B4-BE49-F238E27FC236}">
-                <a16:creationId xmlns:a16="http://schemas.microsoft.com/office/drawing/2014/main" id="{39DD345E-A6DF-A3B2-9A78-70B05EF3F496}"/>
-              </a:ext>
-            </a:extLst>
-          </p:cNvPr>
-          <p:cNvCxnSpPr>
-            <a:cxnSpLocks/>
-            <a:stCxn id="25" idx="3"/>
-            <a:endCxn id="24" idx="1"/>
-          </p:cNvCxnSpPr>
-          <p:nvPr/>
-        </p:nvCxnSpPr>
-        <p:spPr>
-          <a:xfrm>
-            <a:off x="8068709" y="2298349"/>
-            <a:ext cx="520922" cy="768963"/>
           </a:xfrm>
           <a:prstGeom prst="straightConnector1">
             <a:avLst/>
@@ -8873,8 +9365,8 @@
         </p:nvCxnSpPr>
         <p:spPr>
           <a:xfrm flipV="1">
-            <a:off x="6200294" y="2298349"/>
-            <a:ext cx="788415" cy="759813"/>
+            <a:off x="6200294" y="4864936"/>
+            <a:ext cx="788415" cy="2976"/>
           </a:xfrm>
           <a:prstGeom prst="straightConnector1">
             <a:avLst/>
@@ -8912,15 +9404,521 @@
           </p:cNvPr>
           <p:cNvCxnSpPr>
             <a:cxnSpLocks/>
-            <a:stCxn id="23" idx="3"/>
-            <a:endCxn id="24" idx="1"/>
+            <a:stCxn id="32" idx="0"/>
+          </p:cNvCxnSpPr>
+          <p:nvPr/>
+        </p:nvCxnSpPr>
+        <p:spPr>
+          <a:xfrm flipV="1">
+            <a:off x="9139479" y="3811789"/>
+            <a:ext cx="0" cy="729147"/>
+          </a:xfrm>
+          <a:prstGeom prst="straightConnector1">
+            <a:avLst/>
+          </a:prstGeom>
+          <a:ln w="31750">
+            <a:solidFill>
+              <a:schemeClr val="tx1"/>
+            </a:solidFill>
+            <a:tailEnd type="none" w="lg" len="lg"/>
+          </a:ln>
+        </p:spPr>
+        <p:style>
+          <a:lnRef idx="1">
+            <a:schemeClr val="accent1"/>
+          </a:lnRef>
+          <a:fillRef idx="0">
+            <a:schemeClr val="accent1"/>
+          </a:fillRef>
+          <a:effectRef idx="0">
+            <a:schemeClr val="accent1"/>
+          </a:effectRef>
+          <a:fontRef idx="minor">
+            <a:schemeClr val="tx1"/>
+          </a:fontRef>
+        </p:style>
+      </p:cxnSp>
+      <p:sp>
+        <p:nvSpPr>
+          <p:cNvPr id="2" name="Rectangle 1">
+            <a:extLst>
+              <a:ext uri="{FF2B5EF4-FFF2-40B4-BE49-F238E27FC236}">
+                <a16:creationId xmlns:a16="http://schemas.microsoft.com/office/drawing/2014/main" id="{100CEB02-631A-3799-F6E0-112C6A9EF93F}"/>
+              </a:ext>
+            </a:extLst>
+          </p:cNvPr>
+          <p:cNvSpPr/>
+          <p:nvPr/>
+        </p:nvSpPr>
+        <p:spPr>
+          <a:xfrm>
+            <a:off x="582750" y="3650933"/>
+            <a:ext cx="1116000" cy="648000"/>
+          </a:xfrm>
+          <a:prstGeom prst="rect">
+            <a:avLst/>
+          </a:prstGeom>
+          <a:solidFill>
+            <a:srgbClr val="7030A0"/>
+          </a:solidFill>
+        </p:spPr>
+        <p:style>
+          <a:lnRef idx="2">
+            <a:schemeClr val="accent1">
+              <a:shade val="50000"/>
+            </a:schemeClr>
+          </a:lnRef>
+          <a:fillRef idx="1">
+            <a:schemeClr val="accent1"/>
+          </a:fillRef>
+          <a:effectRef idx="0">
+            <a:schemeClr val="accent1"/>
+          </a:effectRef>
+          <a:fontRef idx="minor">
+            <a:schemeClr val="lt1"/>
+          </a:fontRef>
+        </p:style>
+        <p:txBody>
+          <a:bodyPr rtlCol="0" anchor="ctr"/>
+          <a:lstStyle/>
+          <a:p>
+            <a:pPr algn="ctr"/>
+            <a:r>
+              <a:rPr lang="en-GB" dirty="0"/>
+              <a:t>Sine</a:t>
+            </a:r>
+          </a:p>
+        </p:txBody>
+      </p:sp>
+      <p:sp>
+        <p:nvSpPr>
+          <p:cNvPr id="3" name="Rectangle 2">
+            <a:extLst>
+              <a:ext uri="{FF2B5EF4-FFF2-40B4-BE49-F238E27FC236}">
+                <a16:creationId xmlns:a16="http://schemas.microsoft.com/office/drawing/2014/main" id="{CD8891DF-0342-6FE8-55AF-EF7F8097A065}"/>
+              </a:ext>
+            </a:extLst>
+          </p:cNvPr>
+          <p:cNvSpPr/>
+          <p:nvPr/>
+        </p:nvSpPr>
+        <p:spPr>
+          <a:xfrm>
+            <a:off x="2188346" y="3650933"/>
+            <a:ext cx="1116000" cy="648000"/>
+          </a:xfrm>
+          <a:prstGeom prst="rect">
+            <a:avLst/>
+          </a:prstGeom>
+          <a:solidFill>
+            <a:srgbClr val="7030A0"/>
+          </a:solidFill>
+        </p:spPr>
+        <p:style>
+          <a:lnRef idx="2">
+            <a:schemeClr val="accent1">
+              <a:shade val="50000"/>
+            </a:schemeClr>
+          </a:lnRef>
+          <a:fillRef idx="1">
+            <a:schemeClr val="accent1"/>
+          </a:fillRef>
+          <a:effectRef idx="0">
+            <a:schemeClr val="accent1"/>
+          </a:effectRef>
+          <a:fontRef idx="minor">
+            <a:schemeClr val="lt1"/>
+          </a:fontRef>
+        </p:style>
+        <p:txBody>
+          <a:bodyPr rtlCol="0" anchor="ctr"/>
+          <a:lstStyle/>
+          <a:p>
+            <a:pPr algn="ctr"/>
+            <a:r>
+              <a:rPr lang="en-GB" dirty="0"/>
+              <a:t>Sine</a:t>
+            </a:r>
+          </a:p>
+          <a:p>
+            <a:pPr algn="ctr"/>
+            <a:r>
+              <a:rPr lang="en-GB" dirty="0"/>
+              <a:t>Gain</a:t>
+            </a:r>
+          </a:p>
+        </p:txBody>
+      </p:sp>
+      <p:cxnSp>
+        <p:nvCxnSpPr>
+          <p:cNvPr id="5" name="Straight Arrow Connector 4">
+            <a:extLst>
+              <a:ext uri="{FF2B5EF4-FFF2-40B4-BE49-F238E27FC236}">
+                <a16:creationId xmlns:a16="http://schemas.microsoft.com/office/drawing/2014/main" id="{99943160-07A4-74EA-7365-FD43EAC0D3AB}"/>
+              </a:ext>
+            </a:extLst>
+          </p:cNvPr>
+          <p:cNvCxnSpPr>
+            <a:cxnSpLocks/>
+            <a:stCxn id="2" idx="3"/>
+            <a:endCxn id="3" idx="1"/>
           </p:cNvCxnSpPr>
           <p:nvPr/>
         </p:nvCxnSpPr>
         <p:spPr>
           <a:xfrm>
-            <a:off x="6200294" y="3058162"/>
-            <a:ext cx="2389337" cy="9150"/>
+            <a:off x="1698750" y="3974933"/>
+            <a:ext cx="489596" cy="0"/>
+          </a:xfrm>
+          <a:prstGeom prst="straightConnector1">
+            <a:avLst/>
+          </a:prstGeom>
+          <a:ln w="31750">
+            <a:solidFill>
+              <a:schemeClr val="tx1"/>
+            </a:solidFill>
+            <a:tailEnd type="arrow" w="lg" len="lg"/>
+          </a:ln>
+        </p:spPr>
+        <p:style>
+          <a:lnRef idx="1">
+            <a:schemeClr val="accent1"/>
+          </a:lnRef>
+          <a:fillRef idx="0">
+            <a:schemeClr val="accent1"/>
+          </a:fillRef>
+          <a:effectRef idx="0">
+            <a:schemeClr val="accent1"/>
+          </a:effectRef>
+          <a:fontRef idx="minor">
+            <a:schemeClr val="tx1"/>
+          </a:fontRef>
+        </p:style>
+      </p:cxnSp>
+      <p:cxnSp>
+        <p:nvCxnSpPr>
+          <p:cNvPr id="10" name="Straight Arrow Connector 9">
+            <a:extLst>
+              <a:ext uri="{FF2B5EF4-FFF2-40B4-BE49-F238E27FC236}">
+                <a16:creationId xmlns:a16="http://schemas.microsoft.com/office/drawing/2014/main" id="{95199996-88DC-04E6-DBA4-CA4048D1E75B}"/>
+              </a:ext>
+            </a:extLst>
+          </p:cNvPr>
+          <p:cNvCxnSpPr>
+            <a:cxnSpLocks/>
+            <a:stCxn id="3" idx="3"/>
+            <a:endCxn id="22" idx="1"/>
+          </p:cNvCxnSpPr>
+          <p:nvPr/>
+        </p:nvCxnSpPr>
+        <p:spPr>
+          <a:xfrm>
+            <a:off x="3304346" y="3974933"/>
+            <a:ext cx="579624" cy="896937"/>
+          </a:xfrm>
+          <a:prstGeom prst="straightConnector1">
+            <a:avLst/>
+          </a:prstGeom>
+          <a:ln w="31750">
+            <a:solidFill>
+              <a:schemeClr val="tx1"/>
+            </a:solidFill>
+            <a:tailEnd type="arrow" w="lg" len="lg"/>
+          </a:ln>
+        </p:spPr>
+        <p:style>
+          <a:lnRef idx="1">
+            <a:schemeClr val="accent1"/>
+          </a:lnRef>
+          <a:fillRef idx="0">
+            <a:schemeClr val="accent1"/>
+          </a:fillRef>
+          <a:effectRef idx="0">
+            <a:schemeClr val="accent1"/>
+          </a:effectRef>
+          <a:fontRef idx="minor">
+            <a:schemeClr val="tx1"/>
+          </a:fontRef>
+        </p:style>
+      </p:cxnSp>
+      <p:cxnSp>
+        <p:nvCxnSpPr>
+          <p:cNvPr id="15" name="Straight Arrow Connector 14">
+            <a:extLst>
+              <a:ext uri="{FF2B5EF4-FFF2-40B4-BE49-F238E27FC236}">
+                <a16:creationId xmlns:a16="http://schemas.microsoft.com/office/drawing/2014/main" id="{F889ADE6-65E6-4C16-1088-9B8ADF7FD15A}"/>
+              </a:ext>
+            </a:extLst>
+          </p:cNvPr>
+          <p:cNvCxnSpPr>
+            <a:cxnSpLocks/>
+          </p:cNvCxnSpPr>
+          <p:nvPr/>
+        </p:nvCxnSpPr>
+        <p:spPr>
+          <a:xfrm>
+            <a:off x="5069393" y="3362220"/>
+            <a:ext cx="0" cy="3155183"/>
+          </a:xfrm>
+          <a:prstGeom prst="straightConnector1">
+            <a:avLst/>
+          </a:prstGeom>
+          <a:ln w="31750">
+            <a:solidFill>
+              <a:schemeClr val="tx1"/>
+            </a:solidFill>
+            <a:prstDash val="dash"/>
+            <a:tailEnd type="none" w="lg" len="lg"/>
+          </a:ln>
+        </p:spPr>
+        <p:style>
+          <a:lnRef idx="1">
+            <a:schemeClr val="accent1"/>
+          </a:lnRef>
+          <a:fillRef idx="0">
+            <a:schemeClr val="accent1"/>
+          </a:fillRef>
+          <a:effectRef idx="0">
+            <a:schemeClr val="accent1"/>
+          </a:effectRef>
+          <a:fontRef idx="minor">
+            <a:schemeClr val="tx1"/>
+          </a:fontRef>
+        </p:style>
+      </p:cxnSp>
+      <p:sp>
+        <p:nvSpPr>
+          <p:cNvPr id="28" name="TextBox 27">
+            <a:extLst>
+              <a:ext uri="{FF2B5EF4-FFF2-40B4-BE49-F238E27FC236}">
+                <a16:creationId xmlns:a16="http://schemas.microsoft.com/office/drawing/2014/main" id="{93722E25-CE8C-08FC-7D19-5FDAD800316F}"/>
+              </a:ext>
+            </a:extLst>
+          </p:cNvPr>
+          <p:cNvSpPr txBox="1"/>
+          <p:nvPr/>
+        </p:nvSpPr>
+        <p:spPr>
+          <a:xfrm>
+            <a:off x="1410473" y="3012855"/>
+            <a:ext cx="1555746" cy="369332"/>
+          </a:xfrm>
+          <a:prstGeom prst="rect">
+            <a:avLst/>
+          </a:prstGeom>
+          <a:noFill/>
+        </p:spPr>
+        <p:txBody>
+          <a:bodyPr wrap="square">
+            <a:spAutoFit/>
+          </a:bodyPr>
+          <a:lstStyle/>
+          <a:p>
+            <a:r>
+              <a:rPr lang="en-US" i="1" dirty="0"/>
+              <a:t>Excitation</a:t>
+            </a:r>
+            <a:endParaRPr lang="en-GB" i="1" dirty="0"/>
+          </a:p>
+        </p:txBody>
+      </p:sp>
+      <p:sp>
+        <p:nvSpPr>
+          <p:cNvPr id="30" name="TextBox 29">
+            <a:extLst>
+              <a:ext uri="{FF2B5EF4-FFF2-40B4-BE49-F238E27FC236}">
+                <a16:creationId xmlns:a16="http://schemas.microsoft.com/office/drawing/2014/main" id="{A8DD9C8E-D3EB-C89C-7CD0-22E6AF5EC0D7}"/>
+              </a:ext>
+            </a:extLst>
+          </p:cNvPr>
+          <p:cNvSpPr txBox="1"/>
+          <p:nvPr/>
+        </p:nvSpPr>
+        <p:spPr>
+          <a:xfrm>
+            <a:off x="6960105" y="3012855"/>
+            <a:ext cx="1555746" cy="369332"/>
+          </a:xfrm>
+          <a:prstGeom prst="rect">
+            <a:avLst/>
+          </a:prstGeom>
+          <a:noFill/>
+        </p:spPr>
+        <p:txBody>
+          <a:bodyPr wrap="square">
+            <a:spAutoFit/>
+          </a:bodyPr>
+          <a:lstStyle/>
+          <a:p>
+            <a:r>
+              <a:rPr lang="en-US" i="1" dirty="0"/>
+              <a:t>Waveguide</a:t>
+            </a:r>
+            <a:endParaRPr lang="en-GB" i="1" dirty="0"/>
+          </a:p>
+        </p:txBody>
+      </p:sp>
+      <p:cxnSp>
+        <p:nvCxnSpPr>
+          <p:cNvPr id="31" name="Straight Arrow Connector 30">
+            <a:extLst>
+              <a:ext uri="{FF2B5EF4-FFF2-40B4-BE49-F238E27FC236}">
+                <a16:creationId xmlns:a16="http://schemas.microsoft.com/office/drawing/2014/main" id="{39DD345E-A6DF-A3B2-9A78-70B05EF3F496}"/>
+              </a:ext>
+            </a:extLst>
+          </p:cNvPr>
+          <p:cNvCxnSpPr>
+            <a:cxnSpLocks/>
+            <a:stCxn id="25" idx="3"/>
+            <a:endCxn id="32" idx="1"/>
+          </p:cNvCxnSpPr>
+          <p:nvPr/>
+        </p:nvCxnSpPr>
+        <p:spPr>
+          <a:xfrm>
+            <a:off x="8068709" y="4864936"/>
+            <a:ext cx="620770" cy="0"/>
+          </a:xfrm>
+          <a:prstGeom prst="straightConnector1">
+            <a:avLst/>
+          </a:prstGeom>
+          <a:ln w="31750">
+            <a:solidFill>
+              <a:schemeClr val="tx1"/>
+            </a:solidFill>
+            <a:tailEnd type="arrow" w="lg" len="lg"/>
+          </a:ln>
+        </p:spPr>
+        <p:style>
+          <a:lnRef idx="1">
+            <a:schemeClr val="accent1"/>
+          </a:lnRef>
+          <a:fillRef idx="0">
+            <a:schemeClr val="accent1"/>
+          </a:fillRef>
+          <a:effectRef idx="0">
+            <a:schemeClr val="accent1"/>
+          </a:effectRef>
+          <a:fontRef idx="minor">
+            <a:schemeClr val="tx1"/>
+          </a:fontRef>
+        </p:style>
+      </p:cxnSp>
+      <p:sp>
+        <p:nvSpPr>
+          <p:cNvPr id="32" name="Rectangle 31">
+            <a:extLst>
+              <a:ext uri="{FF2B5EF4-FFF2-40B4-BE49-F238E27FC236}">
+                <a16:creationId xmlns:a16="http://schemas.microsoft.com/office/drawing/2014/main" id="{D9E0928B-17B4-908A-2513-7E0B5086D4FC}"/>
+              </a:ext>
+            </a:extLst>
+          </p:cNvPr>
+          <p:cNvSpPr/>
+          <p:nvPr/>
+        </p:nvSpPr>
+        <p:spPr>
+          <a:xfrm>
+            <a:off x="8689479" y="4540936"/>
+            <a:ext cx="900000" cy="648000"/>
+          </a:xfrm>
+          <a:prstGeom prst="rect">
+            <a:avLst/>
+          </a:prstGeom>
+          <a:solidFill>
+            <a:srgbClr val="7030A0"/>
+          </a:solidFill>
+        </p:spPr>
+        <p:style>
+          <a:lnRef idx="2">
+            <a:schemeClr val="accent1">
+              <a:shade val="50000"/>
+            </a:schemeClr>
+          </a:lnRef>
+          <a:fillRef idx="1">
+            <a:schemeClr val="accent1"/>
+          </a:fillRef>
+          <a:effectRef idx="0">
+            <a:schemeClr val="accent1"/>
+          </a:effectRef>
+          <a:fontRef idx="minor">
+            <a:schemeClr val="lt1"/>
+          </a:fontRef>
+        </p:style>
+        <p:txBody>
+          <a:bodyPr rtlCol="0" anchor="ctr"/>
+          <a:lstStyle/>
+          <a:p>
+            <a:pPr algn="ctr"/>
+            <a:r>
+              <a:rPr lang="en-GB" dirty="0"/>
+              <a:t>Decay Gain</a:t>
+            </a:r>
+          </a:p>
+        </p:txBody>
+      </p:sp>
+      <p:cxnSp>
+        <p:nvCxnSpPr>
+          <p:cNvPr id="45" name="Straight Arrow Connector 44">
+            <a:extLst>
+              <a:ext uri="{FF2B5EF4-FFF2-40B4-BE49-F238E27FC236}">
+                <a16:creationId xmlns:a16="http://schemas.microsoft.com/office/drawing/2014/main" id="{5EC52057-8907-823C-1AB0-4ABC6BC3D0C3}"/>
+              </a:ext>
+            </a:extLst>
+          </p:cNvPr>
+          <p:cNvCxnSpPr>
+            <a:cxnSpLocks/>
+          </p:cNvCxnSpPr>
+          <p:nvPr/>
+        </p:nvCxnSpPr>
+        <p:spPr>
+          <a:xfrm flipH="1">
+            <a:off x="5783734" y="3811789"/>
+            <a:ext cx="3355745" cy="0"/>
+          </a:xfrm>
+          <a:prstGeom prst="straightConnector1">
+            <a:avLst/>
+          </a:prstGeom>
+          <a:ln w="31750">
+            <a:solidFill>
+              <a:schemeClr val="tx1"/>
+            </a:solidFill>
+            <a:tailEnd type="none" w="lg" len="lg"/>
+          </a:ln>
+        </p:spPr>
+        <p:style>
+          <a:lnRef idx="1">
+            <a:schemeClr val="accent1"/>
+          </a:lnRef>
+          <a:fillRef idx="0">
+            <a:schemeClr val="accent1"/>
+          </a:fillRef>
+          <a:effectRef idx="0">
+            <a:schemeClr val="accent1"/>
+          </a:effectRef>
+          <a:fontRef idx="minor">
+            <a:schemeClr val="tx1"/>
+          </a:fontRef>
+        </p:style>
+      </p:cxnSp>
+      <p:cxnSp>
+        <p:nvCxnSpPr>
+          <p:cNvPr id="49" name="Straight Arrow Connector 48">
+            <a:extLst>
+              <a:ext uri="{FF2B5EF4-FFF2-40B4-BE49-F238E27FC236}">
+                <a16:creationId xmlns:a16="http://schemas.microsoft.com/office/drawing/2014/main" id="{C21905E5-2897-E164-D968-673BD7372C61}"/>
+              </a:ext>
+            </a:extLst>
+          </p:cNvPr>
+          <p:cNvCxnSpPr>
+            <a:cxnSpLocks/>
+            <a:endCxn id="23" idx="0"/>
+          </p:cNvCxnSpPr>
+          <p:nvPr/>
+        </p:nvCxnSpPr>
+        <p:spPr>
+          <a:xfrm>
+            <a:off x="5786294" y="3811789"/>
+            <a:ext cx="0" cy="732123"/>
           </a:xfrm>
           <a:prstGeom prst="straightConnector1">
             <a:avLst/>
@@ -8965,7 +9963,13 @@
   <p:cSld>
     <p:spTree>
       <p:nvGrpSpPr>
-        <p:cNvPr id="1" name=""/>
+        <p:cNvPr id="1" name="">
+          <a:extLst>
+            <a:ext uri="{FF2B5EF4-FFF2-40B4-BE49-F238E27FC236}">
+              <a16:creationId xmlns:a16="http://schemas.microsoft.com/office/drawing/2014/main" id="{D73B9F21-9062-7418-2625-6FCA8C5BAD04}"/>
+            </a:ext>
+          </a:extLst>
+        </p:cNvPr>
         <p:cNvGrpSpPr/>
         <p:nvPr/>
       </p:nvGrpSpPr>
@@ -8982,7 +9986,7 @@
           <p:cNvPr id="2" name="Title 1">
             <a:extLst>
               <a:ext uri="{FF2B5EF4-FFF2-40B4-BE49-F238E27FC236}">
-                <a16:creationId xmlns:a16="http://schemas.microsoft.com/office/drawing/2014/main" id="{CA15A9C7-17CC-4176-A591-2D8582D8ED04}"/>
+                <a16:creationId xmlns:a16="http://schemas.microsoft.com/office/drawing/2014/main" id="{466FDC71-4D61-F953-7925-BB2244595418}"/>
               </a:ext>
             </a:extLst>
           </p:cNvPr>
@@ -8996,104 +10000,465 @@
         <p:spPr>
           <a:xfrm>
             <a:off x="838200" y="365126"/>
-            <a:ext cx="10474628" cy="636580"/>
-          </a:xfrm>
-        </p:spPr>
-        <p:txBody>
-          <a:bodyPr>
-            <a:normAutofit fontScale="90000"/>
-          </a:bodyPr>
-          <a:lstStyle/>
-          <a:p>
-            <a:r>
-              <a:rPr lang="en-GB" dirty="0"/>
-              <a:t>Figure 1.2</a:t>
-            </a:r>
-          </a:p>
-        </p:txBody>
-      </p:sp>
-      <p:sp>
-        <p:nvSpPr>
-          <p:cNvPr id="3" name="Content Placeholder 2">
-            <a:extLst>
-              <a:ext uri="{FF2B5EF4-FFF2-40B4-BE49-F238E27FC236}">
-                <a16:creationId xmlns:a16="http://schemas.microsoft.com/office/drawing/2014/main" id="{00BDC442-26ED-41FE-8C90-4C80544A0F20}"/>
-              </a:ext>
-            </a:extLst>
-          </p:cNvPr>
-          <p:cNvSpPr>
-            <a:spLocks noGrp="1"/>
-          </p:cNvSpPr>
-          <p:nvPr>
-            <p:ph idx="1"/>
-          </p:nvPr>
-        </p:nvSpPr>
-        <p:spPr>
-          <a:xfrm>
-            <a:off x="838200" y="5435855"/>
-            <a:ext cx="10915746" cy="1057020"/>
+            <a:ext cx="10515600" cy="1059638"/>
           </a:xfrm>
         </p:spPr>
         <p:txBody>
           <a:bodyPr/>
           <a:lstStyle/>
           <a:p>
-            <a:pPr marL="0" indent="0">
-              <a:buNone/>
-            </a:pPr>
-            <a:r>
-              <a:rPr lang="en-GB" dirty="0"/>
-              <a:t>ALT TEXT</a:t>
-            </a:r>
-          </a:p>
-          <a:p>
-            <a:pPr marL="0" indent="0">
-              <a:buNone/>
-            </a:pPr>
-            <a:r>
-              <a:rPr lang="en-US" sz="1800" b="1" dirty="0">
-                <a:effectLst/>
-                <a:latin typeface="Times New Roman" panose="02020603050405020304" pitchFamily="18" charset="0"/>
-                <a:ea typeface="Times New Roman" panose="02020603050405020304" pitchFamily="18" charset="0"/>
-              </a:rPr>
-              <a:t>Figure 1.2. A complex audio routing graph. It applies an envelope, </a:t>
-            </a:r>
-            <a:r>
-              <a:rPr lang="en-US" sz="1800" b="1" dirty="0" err="1">
-                <a:effectLst/>
-                <a:latin typeface="Times New Roman" panose="02020603050405020304" pitchFamily="18" charset="0"/>
-                <a:ea typeface="Times New Roman" panose="02020603050405020304" pitchFamily="18" charset="0"/>
-              </a:rPr>
-              <a:t>filterbank</a:t>
-            </a:r>
-            <a:r>
-              <a:rPr lang="en-US" sz="1800" b="1" dirty="0">
-                <a:effectLst/>
-                <a:latin typeface="Times New Roman" panose="02020603050405020304" pitchFamily="18" charset="0"/>
-                <a:ea typeface="Times New Roman" panose="02020603050405020304" pitchFamily="18" charset="0"/>
-              </a:rPr>
-              <a:t>, distortion and reverb to noise.</a:t>
-            </a:r>
-            <a:endParaRPr lang="en-GB" sz="1800" b="1" dirty="0">
-              <a:effectLst/>
-              <a:latin typeface="Times New Roman" panose="02020603050405020304" pitchFamily="18" charset="0"/>
-              <a:ea typeface="Times New Roman" panose="02020603050405020304" pitchFamily="18" charset="0"/>
-            </a:endParaRPr>
-          </a:p>
-          <a:p>
-            <a:pPr marL="0" indent="0">
-              <a:buNone/>
-            </a:pPr>
+            <a:r>
+              <a:rPr lang="en-US" dirty="0"/>
+              <a:t>Flute example</a:t>
+            </a:r>
             <a:endParaRPr lang="en-GB" dirty="0"/>
           </a:p>
         </p:txBody>
       </p:sp>
+      <p:graphicFrame>
+        <p:nvGraphicFramePr>
+          <p:cNvPr id="7" name="Table 6">
+            <a:extLst>
+              <a:ext uri="{FF2B5EF4-FFF2-40B4-BE49-F238E27FC236}">
+                <a16:creationId xmlns:a16="http://schemas.microsoft.com/office/drawing/2014/main" id="{A55A3BCE-03BD-E9C3-A608-B6729A0AB1FB}"/>
+              </a:ext>
+            </a:extLst>
+          </p:cNvPr>
+          <p:cNvGraphicFramePr>
+            <a:graphicFrameLocks noGrp="1"/>
+          </p:cNvGraphicFramePr>
+          <p:nvPr>
+            <p:extLst>
+              <p:ext uri="{D42A27DB-BD31-4B8C-83A1-F6EECF244321}">
+                <p14:modId xmlns:p14="http://schemas.microsoft.com/office/powerpoint/2010/main" val="664045263"/>
+              </p:ext>
+            </p:extLst>
+          </p:nvPr>
+        </p:nvGraphicFramePr>
+        <p:xfrm>
+          <a:off x="2248678" y="4414589"/>
+          <a:ext cx="6913983" cy="2225040"/>
+        </p:xfrm>
+        <a:graphic>
+          <a:graphicData uri="http://schemas.openxmlformats.org/drawingml/2006/table">
+            <a:tbl>
+              <a:tblPr firstRow="1" firstCol="1" bandRow="1">
+                <a:tableStyleId>{5C22544A-7EE6-4342-B048-85BDC9FD1C3A}</a:tableStyleId>
+              </a:tblPr>
+              <a:tblGrid>
+                <a:gridCol w="2659224">
+                  <a:extLst>
+                    <a:ext uri="{9D8B030D-6E8A-4147-A177-3AD203B41FA5}">
+                      <a16:colId xmlns:a16="http://schemas.microsoft.com/office/drawing/2014/main" val="4050174211"/>
+                    </a:ext>
+                  </a:extLst>
+                </a:gridCol>
+                <a:gridCol w="1418253">
+                  <a:extLst>
+                    <a:ext uri="{9D8B030D-6E8A-4147-A177-3AD203B41FA5}">
+                      <a16:colId xmlns:a16="http://schemas.microsoft.com/office/drawing/2014/main" val="804342274"/>
+                    </a:ext>
+                  </a:extLst>
+                </a:gridCol>
+                <a:gridCol w="1418253">
+                  <a:extLst>
+                    <a:ext uri="{9D8B030D-6E8A-4147-A177-3AD203B41FA5}">
+                      <a16:colId xmlns:a16="http://schemas.microsoft.com/office/drawing/2014/main" val="810714715"/>
+                    </a:ext>
+                  </a:extLst>
+                </a:gridCol>
+                <a:gridCol w="1418253">
+                  <a:extLst>
+                    <a:ext uri="{9D8B030D-6E8A-4147-A177-3AD203B41FA5}">
+                      <a16:colId xmlns:a16="http://schemas.microsoft.com/office/drawing/2014/main" val="482378900"/>
+                    </a:ext>
+                  </a:extLst>
+                </a:gridCol>
+              </a:tblGrid>
+              <a:tr h="370840">
+                <a:tc>
+                  <a:txBody>
+                    <a:bodyPr/>
+                    <a:lstStyle/>
+                    <a:p>
+                      <a:endParaRPr lang="en-GB" dirty="0"/>
+                    </a:p>
+                  </a:txBody>
+                  <a:tcPr/>
+                </a:tc>
+                <a:tc>
+                  <a:txBody>
+                    <a:bodyPr/>
+                    <a:lstStyle/>
+                    <a:p>
+                      <a:r>
+                        <a:rPr lang="en-US" dirty="0"/>
+                        <a:t>Minimum</a:t>
+                      </a:r>
+                      <a:endParaRPr lang="en-GB" dirty="0"/>
+                    </a:p>
+                  </a:txBody>
+                  <a:tcPr/>
+                </a:tc>
+                <a:tc>
+                  <a:txBody>
+                    <a:bodyPr/>
+                    <a:lstStyle/>
+                    <a:p>
+                      <a:r>
+                        <a:rPr lang="en-US" dirty="0"/>
+                        <a:t>Initial value</a:t>
+                      </a:r>
+                      <a:endParaRPr lang="en-GB" dirty="0"/>
+                    </a:p>
+                  </a:txBody>
+                  <a:tcPr/>
+                </a:tc>
+                <a:tc>
+                  <a:txBody>
+                    <a:bodyPr/>
+                    <a:lstStyle/>
+                    <a:p>
+                      <a:r>
+                        <a:rPr lang="en-US" dirty="0"/>
+                        <a:t>Maximum</a:t>
+                      </a:r>
+                      <a:endParaRPr lang="en-GB" dirty="0"/>
+                    </a:p>
+                  </a:txBody>
+                  <a:tcPr/>
+                </a:tc>
+                <a:extLst>
+                  <a:ext uri="{0D108BD9-81ED-4DB2-BD59-A6C34878D82A}">
+                    <a16:rowId xmlns:a16="http://schemas.microsoft.com/office/drawing/2014/main" val="857141677"/>
+                  </a:ext>
+                </a:extLst>
+              </a:tr>
+              <a:tr h="370840">
+                <a:tc>
+                  <a:txBody>
+                    <a:bodyPr/>
+                    <a:lstStyle/>
+                    <a:p>
+                      <a:r>
+                        <a:rPr lang="en-US" dirty="0"/>
+                        <a:t>Bandpass frequency (Hz)</a:t>
+                      </a:r>
+                      <a:endParaRPr lang="en-GB" dirty="0"/>
+                    </a:p>
+                  </a:txBody>
+                  <a:tcPr/>
+                </a:tc>
+                <a:tc>
+                  <a:txBody>
+                    <a:bodyPr/>
+                    <a:lstStyle/>
+                    <a:p>
+                      <a:r>
+                        <a:rPr lang="en-US" dirty="0"/>
+                        <a:t>80</a:t>
+                      </a:r>
+                      <a:endParaRPr lang="en-GB" dirty="0"/>
+                    </a:p>
+                  </a:txBody>
+                  <a:tcPr/>
+                </a:tc>
+                <a:tc>
+                  <a:txBody>
+                    <a:bodyPr/>
+                    <a:lstStyle/>
+                    <a:p>
+                      <a:r>
+                        <a:rPr lang="en-US" dirty="0"/>
+                        <a:t>1100</a:t>
+                      </a:r>
+                      <a:endParaRPr lang="en-GB" dirty="0"/>
+                    </a:p>
+                  </a:txBody>
+                  <a:tcPr/>
+                </a:tc>
+                <a:tc>
+                  <a:txBody>
+                    <a:bodyPr/>
+                    <a:lstStyle/>
+                    <a:p>
+                      <a:r>
+                        <a:rPr lang="en-US" dirty="0"/>
+                        <a:t>4200</a:t>
+                      </a:r>
+                      <a:endParaRPr lang="en-GB" dirty="0"/>
+                    </a:p>
+                  </a:txBody>
+                  <a:tcPr/>
+                </a:tc>
+                <a:extLst>
+                  <a:ext uri="{0D108BD9-81ED-4DB2-BD59-A6C34878D82A}">
+                    <a16:rowId xmlns:a16="http://schemas.microsoft.com/office/drawing/2014/main" val="904711003"/>
+                  </a:ext>
+                </a:extLst>
+              </a:tr>
+              <a:tr h="370840">
+                <a:tc>
+                  <a:txBody>
+                    <a:bodyPr/>
+                    <a:lstStyle/>
+                    <a:p>
+                      <a:r>
+                        <a:rPr lang="en-US" dirty="0"/>
+                        <a:t>Lowpass frequency (Hz)</a:t>
+                      </a:r>
+                      <a:endParaRPr lang="en-GB" dirty="0"/>
+                    </a:p>
+                  </a:txBody>
+                  <a:tcPr/>
+                </a:tc>
+                <a:tc>
+                  <a:txBody>
+                    <a:bodyPr/>
+                    <a:lstStyle/>
+                    <a:p>
+                      <a:r>
+                        <a:rPr lang="en-US" dirty="0"/>
+                        <a:t>80</a:t>
+                      </a:r>
+                      <a:endParaRPr lang="en-GB" dirty="0"/>
+                    </a:p>
+                  </a:txBody>
+                  <a:tcPr/>
+                </a:tc>
+                <a:tc>
+                  <a:txBody>
+                    <a:bodyPr/>
+                    <a:lstStyle/>
+                    <a:p>
+                      <a:r>
+                        <a:rPr lang="en-US" dirty="0"/>
+                        <a:t>3500</a:t>
+                      </a:r>
+                      <a:endParaRPr lang="en-GB" dirty="0"/>
+                    </a:p>
+                  </a:txBody>
+                  <a:tcPr/>
+                </a:tc>
+                <a:tc>
+                  <a:txBody>
+                    <a:bodyPr/>
+                    <a:lstStyle/>
+                    <a:p>
+                      <a:r>
+                        <a:rPr lang="en-US" dirty="0"/>
+                        <a:t>10000</a:t>
+                      </a:r>
+                      <a:endParaRPr lang="en-GB" dirty="0"/>
+                    </a:p>
+                  </a:txBody>
+                  <a:tcPr/>
+                </a:tc>
+                <a:extLst>
+                  <a:ext uri="{0D108BD9-81ED-4DB2-BD59-A6C34878D82A}">
+                    <a16:rowId xmlns:a16="http://schemas.microsoft.com/office/drawing/2014/main" val="3732809095"/>
+                  </a:ext>
+                </a:extLst>
+              </a:tr>
+              <a:tr h="370840">
+                <a:tc>
+                  <a:txBody>
+                    <a:bodyPr/>
+                    <a:lstStyle/>
+                    <a:p>
+                      <a:r>
+                        <a:rPr lang="en-US" dirty="0"/>
+                        <a:t>Crossfade</a:t>
+                      </a:r>
+                      <a:endParaRPr lang="en-GB" dirty="0"/>
+                    </a:p>
+                  </a:txBody>
+                  <a:tcPr/>
+                </a:tc>
+                <a:tc>
+                  <a:txBody>
+                    <a:bodyPr/>
+                    <a:lstStyle/>
+                    <a:p>
+                      <a:r>
+                        <a:rPr lang="en-US" dirty="0"/>
+                        <a:t>0</a:t>
+                      </a:r>
+                      <a:endParaRPr lang="en-GB" dirty="0"/>
+                    </a:p>
+                  </a:txBody>
+                  <a:tcPr/>
+                </a:tc>
+                <a:tc>
+                  <a:txBody>
+                    <a:bodyPr/>
+                    <a:lstStyle/>
+                    <a:p>
+                      <a:r>
+                        <a:rPr lang="en-US" dirty="0"/>
+                        <a:t>0.6</a:t>
+                      </a:r>
+                      <a:endParaRPr lang="en-GB" dirty="0"/>
+                    </a:p>
+                  </a:txBody>
+                  <a:tcPr/>
+                </a:tc>
+                <a:tc>
+                  <a:txBody>
+                    <a:bodyPr/>
+                    <a:lstStyle/>
+                    <a:p>
+                      <a:r>
+                        <a:rPr lang="en-US" dirty="0"/>
+                        <a:t>0.95</a:t>
+                      </a:r>
+                      <a:endParaRPr lang="en-GB" dirty="0"/>
+                    </a:p>
+                  </a:txBody>
+                  <a:tcPr/>
+                </a:tc>
+                <a:extLst>
+                  <a:ext uri="{0D108BD9-81ED-4DB2-BD59-A6C34878D82A}">
+                    <a16:rowId xmlns:a16="http://schemas.microsoft.com/office/drawing/2014/main" val="1932081808"/>
+                  </a:ext>
+                </a:extLst>
+              </a:tr>
+              <a:tr h="370840">
+                <a:tc>
+                  <a:txBody>
+                    <a:bodyPr/>
+                    <a:lstStyle/>
+                    <a:p>
+                      <a:r>
+                        <a:rPr lang="en-US" dirty="0"/>
+                        <a:t>Feedback</a:t>
+                      </a:r>
+                      <a:endParaRPr lang="en-GB" dirty="0"/>
+                    </a:p>
+                  </a:txBody>
+                  <a:tcPr/>
+                </a:tc>
+                <a:tc>
+                  <a:txBody>
+                    <a:bodyPr/>
+                    <a:lstStyle/>
+                    <a:p>
+                      <a:r>
+                        <a:rPr lang="en-US" dirty="0"/>
+                        <a:t>-2</a:t>
+                      </a:r>
+                      <a:endParaRPr lang="en-GB" dirty="0"/>
+                    </a:p>
+                  </a:txBody>
+                  <a:tcPr/>
+                </a:tc>
+                <a:tc>
+                  <a:txBody>
+                    <a:bodyPr/>
+                    <a:lstStyle/>
+                    <a:p>
+                      <a:r>
+                        <a:rPr lang="en-US" dirty="0"/>
+                        <a:t>1.4</a:t>
+                      </a:r>
+                      <a:endParaRPr lang="en-GB" dirty="0"/>
+                    </a:p>
+                  </a:txBody>
+                  <a:tcPr/>
+                </a:tc>
+                <a:tc>
+                  <a:txBody>
+                    <a:bodyPr/>
+                    <a:lstStyle/>
+                    <a:p>
+                      <a:r>
+                        <a:rPr lang="en-US" dirty="0"/>
+                        <a:t>2</a:t>
+                      </a:r>
+                      <a:endParaRPr lang="en-GB" dirty="0"/>
+                    </a:p>
+                  </a:txBody>
+                  <a:tcPr/>
+                </a:tc>
+                <a:extLst>
+                  <a:ext uri="{0D108BD9-81ED-4DB2-BD59-A6C34878D82A}">
+                    <a16:rowId xmlns:a16="http://schemas.microsoft.com/office/drawing/2014/main" val="1577052905"/>
+                  </a:ext>
+                </a:extLst>
+              </a:tr>
+              <a:tr h="370840">
+                <a:tc>
+                  <a:txBody>
+                    <a:bodyPr/>
+                    <a:lstStyle/>
+                    <a:p>
+                      <a:r>
+                        <a:rPr lang="en-US" dirty="0"/>
+                        <a:t>Exciter cutoff (Hz)</a:t>
+                      </a:r>
+                      <a:endParaRPr lang="en-GB" dirty="0"/>
+                    </a:p>
+                  </a:txBody>
+                  <a:tcPr/>
+                </a:tc>
+                <a:tc>
+                  <a:txBody>
+                    <a:bodyPr/>
+                    <a:lstStyle/>
+                    <a:p>
+                      <a:r>
+                        <a:rPr lang="en-US" dirty="0"/>
+                        <a:t>80</a:t>
+                      </a:r>
+                      <a:endParaRPr lang="en-GB" dirty="0"/>
+                    </a:p>
+                  </a:txBody>
+                  <a:tcPr/>
+                </a:tc>
+                <a:tc>
+                  <a:txBody>
+                    <a:bodyPr/>
+                    <a:lstStyle/>
+                    <a:p>
+                      <a:r>
+                        <a:rPr lang="en-US" dirty="0"/>
+                        <a:t>700</a:t>
+                      </a:r>
+                      <a:endParaRPr lang="en-GB" dirty="0"/>
+                    </a:p>
+                  </a:txBody>
+                  <a:tcPr/>
+                </a:tc>
+                <a:tc>
+                  <a:txBody>
+                    <a:bodyPr/>
+                    <a:lstStyle/>
+                    <a:p>
+                      <a:r>
+                        <a:rPr lang="en-US" dirty="0"/>
+                        <a:t>10000</a:t>
+                      </a:r>
+                      <a:endParaRPr lang="en-GB" dirty="0"/>
+                    </a:p>
+                  </a:txBody>
+                  <a:tcPr/>
+                </a:tc>
+                <a:extLst>
+                  <a:ext uri="{0D108BD9-81ED-4DB2-BD59-A6C34878D82A}">
+                    <a16:rowId xmlns:a16="http://schemas.microsoft.com/office/drawing/2014/main" val="3635758170"/>
+                  </a:ext>
+                </a:extLst>
+              </a:tr>
+            </a:tbl>
+          </a:graphicData>
+        </a:graphic>
+      </p:graphicFrame>
       <p:sp>
         <p:nvSpPr>
-          <p:cNvPr id="32" name="Rectangle 31">
+          <p:cNvPr id="8" name="Rectangle 7">
             <a:extLst>
               <a:ext uri="{FF2B5EF4-FFF2-40B4-BE49-F238E27FC236}">
-                <a16:creationId xmlns:a16="http://schemas.microsoft.com/office/drawing/2014/main" id="{46E0C75C-FA02-4D9A-A201-3C445623B266}"/>
+                <a16:creationId xmlns:a16="http://schemas.microsoft.com/office/drawing/2014/main" id="{D687D345-9BA3-5787-FBDA-4E26BD192E9F}"/>
               </a:ext>
             </a:extLst>
           </p:cNvPr>
@@ -9102,17 +10467,14 @@
         </p:nvSpPr>
         <p:spPr>
           <a:xfrm>
-            <a:off x="3241980" y="2913067"/>
-            <a:ext cx="1291134" cy="282435"/>
+            <a:off x="1804854" y="3270501"/>
+            <a:ext cx="1122740" cy="648000"/>
           </a:xfrm>
           <a:prstGeom prst="rect">
             <a:avLst/>
           </a:prstGeom>
           <a:solidFill>
-            <a:schemeClr val="tx1">
-              <a:lumMod val="50000"/>
-              <a:lumOff val="50000"/>
-            </a:schemeClr>
+            <a:srgbClr val="7030A0"/>
           </a:solidFill>
         </p:spPr>
         <p:style>
@@ -9137,19 +10499,18 @@
           <a:p>
             <a:pPr algn="ctr"/>
             <a:r>
-              <a:rPr lang="en-GB" sz="1400" dirty="0" err="1"/>
-              <a:t>gainNode</a:t>
-            </a:r>
-            <a:endParaRPr lang="en-GB" sz="1400" dirty="0"/>
+              <a:rPr lang="en-GB" dirty="0"/>
+              <a:t>Excitation</a:t>
+            </a:r>
           </a:p>
         </p:txBody>
       </p:sp>
       <p:sp>
         <p:nvSpPr>
-          <p:cNvPr id="33" name="Rectangle 32">
+          <p:cNvPr id="9" name="Rectangle 8">
             <a:extLst>
               <a:ext uri="{FF2B5EF4-FFF2-40B4-BE49-F238E27FC236}">
-                <a16:creationId xmlns:a16="http://schemas.microsoft.com/office/drawing/2014/main" id="{97F043BD-EF02-4717-A01A-AC097A33E36C}"/>
+                <a16:creationId xmlns:a16="http://schemas.microsoft.com/office/drawing/2014/main" id="{963AB04F-C2CD-9063-D820-66A93FD05E58}"/>
               </a:ext>
             </a:extLst>
           </p:cNvPr>
@@ -9158,17 +10519,14 @@
         </p:nvSpPr>
         <p:spPr>
           <a:xfrm>
-            <a:off x="4935005" y="2671093"/>
-            <a:ext cx="1291134" cy="394972"/>
+            <a:off x="3103287" y="1854976"/>
+            <a:ext cx="1080000" cy="648000"/>
           </a:xfrm>
           <a:prstGeom prst="rect">
             <a:avLst/>
           </a:prstGeom>
           <a:solidFill>
-            <a:schemeClr val="tx1">
-              <a:lumMod val="50000"/>
-              <a:lumOff val="50000"/>
-            </a:schemeClr>
+            <a:srgbClr val="7030A0"/>
           </a:solidFill>
         </p:spPr>
         <p:style>
@@ -9193,26 +10551,18 @@
           <a:p>
             <a:pPr algn="ctr"/>
             <a:r>
-              <a:rPr lang="en-GB" sz="1400" dirty="0" err="1"/>
-              <a:t>BiquadNode</a:t>
-            </a:r>
-            <a:endParaRPr lang="en-GB" sz="1400" dirty="0"/>
-          </a:p>
-          <a:p>
-            <a:pPr algn="ctr"/>
-            <a:r>
-              <a:rPr lang="en-GB" sz="1400" i="1" dirty="0"/>
-              <a:t>Peaking</a:t>
+              <a:rPr lang="en-GB" dirty="0"/>
+              <a:t>Sigmoid</a:t>
             </a:r>
           </a:p>
         </p:txBody>
       </p:sp>
       <p:sp>
         <p:nvSpPr>
-          <p:cNvPr id="34" name="Rectangle 33">
+          <p:cNvPr id="10" name="Rectangle 9">
             <a:extLst>
               <a:ext uri="{FF2B5EF4-FFF2-40B4-BE49-F238E27FC236}">
-                <a16:creationId xmlns:a16="http://schemas.microsoft.com/office/drawing/2014/main" id="{B6B1E425-2765-4065-806E-C191C8F76460}"/>
+                <a16:creationId xmlns:a16="http://schemas.microsoft.com/office/drawing/2014/main" id="{4CB746D3-4225-3F91-8E4F-E90781ED0162}"/>
               </a:ext>
             </a:extLst>
           </p:cNvPr>
@@ -9221,17 +10571,14 @@
         </p:nvSpPr>
         <p:spPr>
           <a:xfrm>
-            <a:off x="4935005" y="2186649"/>
-            <a:ext cx="1291134" cy="394972"/>
+            <a:off x="7491376" y="3270501"/>
+            <a:ext cx="1296000" cy="648000"/>
           </a:xfrm>
           <a:prstGeom prst="rect">
             <a:avLst/>
           </a:prstGeom>
           <a:solidFill>
-            <a:schemeClr val="tx1">
-              <a:lumMod val="50000"/>
-              <a:lumOff val="50000"/>
-            </a:schemeClr>
+            <a:srgbClr val="7030A0"/>
           </a:solidFill>
         </p:spPr>
         <p:style>
@@ -9256,27 +10603,198 @@
           <a:p>
             <a:pPr algn="ctr"/>
             <a:r>
-              <a:rPr lang="en-GB" sz="1400" dirty="0" err="1"/>
-              <a:t>BiquadNode</a:t>
-            </a:r>
-            <a:endParaRPr lang="en-GB" sz="1400" dirty="0"/>
-          </a:p>
-          <a:p>
-            <a:pPr algn="ctr"/>
-            <a:r>
-              <a:rPr lang="en-GB" sz="1400" i="1" dirty="0" err="1"/>
-              <a:t>Lowshelf</a:t>
-            </a:r>
-            <a:endParaRPr lang="en-GB" sz="1400" i="1" dirty="0"/>
+              <a:rPr lang="en-GB" dirty="0"/>
+              <a:t>Crossfade</a:t>
+            </a:r>
           </a:p>
         </p:txBody>
       </p:sp>
+      <p:cxnSp>
+        <p:nvCxnSpPr>
+          <p:cNvPr id="11" name="Straight Arrow Connector 10">
+            <a:extLst>
+              <a:ext uri="{FF2B5EF4-FFF2-40B4-BE49-F238E27FC236}">
+                <a16:creationId xmlns:a16="http://schemas.microsoft.com/office/drawing/2014/main" id="{6D015CE4-78D5-7FB0-DD35-79D2CE3F1478}"/>
+              </a:ext>
+            </a:extLst>
+          </p:cNvPr>
+          <p:cNvCxnSpPr>
+            <a:cxnSpLocks/>
+          </p:cNvCxnSpPr>
+          <p:nvPr/>
+        </p:nvCxnSpPr>
+        <p:spPr>
+          <a:xfrm>
+            <a:off x="2927594" y="3594501"/>
+            <a:ext cx="436841" cy="0"/>
+          </a:xfrm>
+          <a:prstGeom prst="straightConnector1">
+            <a:avLst/>
+          </a:prstGeom>
+          <a:ln w="31750">
+            <a:solidFill>
+              <a:schemeClr val="tx1"/>
+            </a:solidFill>
+            <a:tailEnd type="arrow" w="lg" len="lg"/>
+          </a:ln>
+        </p:spPr>
+        <p:style>
+          <a:lnRef idx="1">
+            <a:schemeClr val="accent1"/>
+          </a:lnRef>
+          <a:fillRef idx="0">
+            <a:schemeClr val="accent1"/>
+          </a:fillRef>
+          <a:effectRef idx="0">
+            <a:schemeClr val="accent1"/>
+          </a:effectRef>
+          <a:fontRef idx="minor">
+            <a:schemeClr val="tx1"/>
+          </a:fontRef>
+        </p:style>
+      </p:cxnSp>
+      <p:cxnSp>
+        <p:nvCxnSpPr>
+          <p:cNvPr id="12" name="Straight Arrow Connector 11">
+            <a:extLst>
+              <a:ext uri="{FF2B5EF4-FFF2-40B4-BE49-F238E27FC236}">
+                <a16:creationId xmlns:a16="http://schemas.microsoft.com/office/drawing/2014/main" id="{130E5AA8-7BF7-D49D-139C-610FCBD50705}"/>
+              </a:ext>
+            </a:extLst>
+          </p:cNvPr>
+          <p:cNvCxnSpPr>
+            <a:cxnSpLocks/>
+            <a:endCxn id="9" idx="3"/>
+          </p:cNvCxnSpPr>
+          <p:nvPr/>
+        </p:nvCxnSpPr>
+        <p:spPr>
+          <a:xfrm flipH="1">
+            <a:off x="4183287" y="2178976"/>
+            <a:ext cx="3956089" cy="0"/>
+          </a:xfrm>
+          <a:prstGeom prst="straightConnector1">
+            <a:avLst/>
+          </a:prstGeom>
+          <a:ln w="31750">
+            <a:solidFill>
+              <a:schemeClr val="tx1"/>
+            </a:solidFill>
+            <a:tailEnd type="arrow" w="lg" len="lg"/>
+          </a:ln>
+        </p:spPr>
+        <p:style>
+          <a:lnRef idx="1">
+            <a:schemeClr val="accent1"/>
+          </a:lnRef>
+          <a:fillRef idx="0">
+            <a:schemeClr val="accent1"/>
+          </a:fillRef>
+          <a:effectRef idx="0">
+            <a:schemeClr val="accent1"/>
+          </a:effectRef>
+          <a:fontRef idx="minor">
+            <a:schemeClr val="tx1"/>
+          </a:fontRef>
+        </p:style>
+      </p:cxnSp>
+      <p:cxnSp>
+        <p:nvCxnSpPr>
+          <p:cNvPr id="13" name="Straight Arrow Connector 12">
+            <a:extLst>
+              <a:ext uri="{FF2B5EF4-FFF2-40B4-BE49-F238E27FC236}">
+                <a16:creationId xmlns:a16="http://schemas.microsoft.com/office/drawing/2014/main" id="{C7E7FA54-C360-394D-0D40-12C13FB4323B}"/>
+              </a:ext>
+            </a:extLst>
+          </p:cNvPr>
+          <p:cNvCxnSpPr>
+            <a:cxnSpLocks/>
+            <a:stCxn id="10" idx="0"/>
+          </p:cNvCxnSpPr>
+          <p:nvPr/>
+        </p:nvCxnSpPr>
+        <p:spPr>
+          <a:xfrm flipV="1">
+            <a:off x="8139376" y="2130188"/>
+            <a:ext cx="4337" cy="1140313"/>
+          </a:xfrm>
+          <a:prstGeom prst="straightConnector1">
+            <a:avLst/>
+          </a:prstGeom>
+          <a:ln w="31750">
+            <a:solidFill>
+              <a:schemeClr val="tx1"/>
+            </a:solidFill>
+            <a:tailEnd type="none" w="lg" len="lg"/>
+          </a:ln>
+        </p:spPr>
+        <p:style>
+          <a:lnRef idx="1">
+            <a:schemeClr val="accent1"/>
+          </a:lnRef>
+          <a:fillRef idx="0">
+            <a:schemeClr val="accent1"/>
+          </a:fillRef>
+          <a:effectRef idx="0">
+            <a:schemeClr val="accent1"/>
+          </a:effectRef>
+          <a:fontRef idx="minor">
+            <a:schemeClr val="tx1"/>
+          </a:fontRef>
+        </p:style>
+      </p:cxnSp>
+      <p:cxnSp>
+        <p:nvCxnSpPr>
+          <p:cNvPr id="14" name="Straight Arrow Connector 13">
+            <a:extLst>
+              <a:ext uri="{FF2B5EF4-FFF2-40B4-BE49-F238E27FC236}">
+                <a16:creationId xmlns:a16="http://schemas.microsoft.com/office/drawing/2014/main" id="{3509DA6E-3ADC-5BBD-DBAD-FB3AA50DDF9A}"/>
+              </a:ext>
+            </a:extLst>
+          </p:cNvPr>
+          <p:cNvCxnSpPr>
+            <a:cxnSpLocks/>
+            <a:stCxn id="9" idx="2"/>
+            <a:endCxn id="15" idx="0"/>
+          </p:cNvCxnSpPr>
+          <p:nvPr/>
+        </p:nvCxnSpPr>
+        <p:spPr>
+          <a:xfrm flipH="1">
+            <a:off x="3634435" y="2502976"/>
+            <a:ext cx="8852" cy="821525"/>
+          </a:xfrm>
+          <a:prstGeom prst="straightConnector1">
+            <a:avLst/>
+          </a:prstGeom>
+          <a:ln w="31750">
+            <a:solidFill>
+              <a:schemeClr val="tx1"/>
+            </a:solidFill>
+            <a:tailEnd type="arrow" w="lg" len="lg"/>
+          </a:ln>
+        </p:spPr>
+        <p:style>
+          <a:lnRef idx="1">
+            <a:schemeClr val="accent1"/>
+          </a:lnRef>
+          <a:fillRef idx="0">
+            <a:schemeClr val="accent1"/>
+          </a:fillRef>
+          <a:effectRef idx="0">
+            <a:schemeClr val="accent1"/>
+          </a:effectRef>
+          <a:fontRef idx="minor">
+            <a:schemeClr val="tx1"/>
+          </a:fontRef>
+        </p:style>
+      </p:cxnSp>
       <p:sp>
         <p:nvSpPr>
-          <p:cNvPr id="35" name="Rectangle 34">
+          <p:cNvPr id="15" name="Oval 14">
             <a:extLst>
               <a:ext uri="{FF2B5EF4-FFF2-40B4-BE49-F238E27FC236}">
-                <a16:creationId xmlns:a16="http://schemas.microsoft.com/office/drawing/2014/main" id="{6F4A2BC4-62D8-44B4-BB6D-65CCBB52F31B}"/>
+                <a16:creationId xmlns:a16="http://schemas.microsoft.com/office/drawing/2014/main" id="{0150F7FA-1FA9-926C-3FEA-2BA97BA0E0D7}"/>
               </a:ext>
             </a:extLst>
           </p:cNvPr>
@@ -9285,18 +10803,16 @@
         </p:nvSpPr>
         <p:spPr>
           <a:xfrm>
-            <a:off x="4935005" y="3179891"/>
-            <a:ext cx="1291134" cy="394972"/>
+            <a:off x="3364435" y="3324501"/>
+            <a:ext cx="540000" cy="540000"/>
           </a:xfrm>
-          <a:prstGeom prst="rect">
+          <a:prstGeom prst="ellipse">
             <a:avLst/>
           </a:prstGeom>
           <a:solidFill>
-            <a:schemeClr val="tx1">
-              <a:lumMod val="50000"/>
-              <a:lumOff val="50000"/>
-            </a:schemeClr>
+            <a:srgbClr val="7030A0"/>
           </a:solidFill>
+          <a:ln w="31750"/>
         </p:spPr>
         <p:style>
           <a:lnRef idx="2">
@@ -9320,48 +10836,43 @@
           <a:p>
             <a:pPr algn="ctr"/>
             <a:r>
-              <a:rPr lang="en-GB" sz="1400" dirty="0" err="1"/>
-              <a:t>BiquadNode</a:t>
-            </a:r>
-            <a:endParaRPr lang="en-GB" sz="1400" dirty="0"/>
-          </a:p>
-          <a:p>
-            <a:pPr algn="ctr"/>
-            <a:r>
-              <a:rPr lang="en-GB" sz="1400" i="1" dirty="0"/>
-              <a:t>Peaking</a:t>
+              <a:rPr lang="en-GB" sz="3600" dirty="0">
+                <a:solidFill>
+                  <a:schemeClr val="bg1"/>
+                </a:solidFill>
+              </a:rPr>
+              <a:t>+</a:t>
             </a:r>
           </a:p>
         </p:txBody>
       </p:sp>
       <p:cxnSp>
         <p:nvCxnSpPr>
-          <p:cNvPr id="36" name="Straight Arrow Connector 35">
+          <p:cNvPr id="16" name="Straight Arrow Connector 15">
             <a:extLst>
               <a:ext uri="{FF2B5EF4-FFF2-40B4-BE49-F238E27FC236}">
-                <a16:creationId xmlns:a16="http://schemas.microsoft.com/office/drawing/2014/main" id="{A36814BC-A775-440A-B1AD-F47A402C1AC1}"/>
+                <a16:creationId xmlns:a16="http://schemas.microsoft.com/office/drawing/2014/main" id="{D4BA2B7A-132B-1A40-6A37-CC9C9EDA4D64}"/>
               </a:ext>
             </a:extLst>
           </p:cNvPr>
           <p:cNvCxnSpPr>
             <a:cxnSpLocks/>
-            <a:stCxn id="32" idx="0"/>
           </p:cNvCxnSpPr>
           <p:nvPr/>
         </p:nvCxnSpPr>
         <p:spPr>
-          <a:xfrm flipV="1">
-            <a:off x="3887546" y="2327868"/>
-            <a:ext cx="1088980" cy="585199"/>
+          <a:xfrm>
+            <a:off x="3904435" y="3591901"/>
+            <a:ext cx="597712" cy="1"/>
           </a:xfrm>
           <a:prstGeom prst="straightConnector1">
             <a:avLst/>
           </a:prstGeom>
-          <a:ln w="19050">
+          <a:ln w="31750">
             <a:solidFill>
-              <a:srgbClr val="990099"/>
+              <a:schemeClr val="tx1"/>
             </a:solidFill>
-            <a:tailEnd type="triangle"/>
+            <a:tailEnd type="arrow" w="lg" len="lg"/>
           </a:ln>
         </p:spPr>
         <p:style>
@@ -9381,32 +10892,33 @@
       </p:cxnSp>
       <p:cxnSp>
         <p:nvCxnSpPr>
-          <p:cNvPr id="37" name="Straight Arrow Connector 36">
+          <p:cNvPr id="17" name="Straight Arrow Connector 16">
             <a:extLst>
               <a:ext uri="{FF2B5EF4-FFF2-40B4-BE49-F238E27FC236}">
-                <a16:creationId xmlns:a16="http://schemas.microsoft.com/office/drawing/2014/main" id="{3C32EBE5-2C25-402A-A9B0-B10D0CCF0B2D}"/>
+                <a16:creationId xmlns:a16="http://schemas.microsoft.com/office/drawing/2014/main" id="{179FBC64-626C-AC1B-ED95-FD90C6C70227}"/>
               </a:ext>
             </a:extLst>
           </p:cNvPr>
           <p:cNvCxnSpPr>
             <a:cxnSpLocks/>
-            <a:stCxn id="32" idx="3"/>
+            <a:stCxn id="22" idx="3"/>
+            <a:endCxn id="10" idx="1"/>
           </p:cNvCxnSpPr>
           <p:nvPr/>
         </p:nvCxnSpPr>
         <p:spPr>
-          <a:xfrm flipV="1">
-            <a:off x="4533114" y="2812312"/>
-            <a:ext cx="443413" cy="241972"/>
+          <a:xfrm>
+            <a:off x="6810187" y="3320101"/>
+            <a:ext cx="681189" cy="274400"/>
           </a:xfrm>
           <a:prstGeom prst="straightConnector1">
             <a:avLst/>
           </a:prstGeom>
-          <a:ln w="19050">
+          <a:ln w="31750">
             <a:solidFill>
-              <a:srgbClr val="990099"/>
+              <a:schemeClr val="tx1"/>
             </a:solidFill>
-            <a:tailEnd type="triangle"/>
+            <a:tailEnd type="arrow" w="lg" len="lg"/>
           </a:ln>
         </p:spPr>
         <p:style>
@@ -9426,170 +10938,33 @@
       </p:cxnSp>
       <p:cxnSp>
         <p:nvCxnSpPr>
-          <p:cNvPr id="38" name="Straight Arrow Connector 37">
+          <p:cNvPr id="18" name="Straight Arrow Connector 17">
             <a:extLst>
               <a:ext uri="{FF2B5EF4-FFF2-40B4-BE49-F238E27FC236}">
-                <a16:creationId xmlns:a16="http://schemas.microsoft.com/office/drawing/2014/main" id="{FCB1C893-EDE2-424D-9196-750829709FCF}"/>
+                <a16:creationId xmlns:a16="http://schemas.microsoft.com/office/drawing/2014/main" id="{2632A4E1-6B8C-125C-1045-9AD7E8B53DE2}"/>
               </a:ext>
             </a:extLst>
           </p:cNvPr>
           <p:cNvCxnSpPr>
             <a:cxnSpLocks/>
-            <a:stCxn id="32" idx="3"/>
-          </p:cNvCxnSpPr>
-          <p:nvPr/>
-        </p:nvCxnSpPr>
-        <p:spPr>
-          <a:xfrm>
-            <a:off x="4533114" y="3054285"/>
-            <a:ext cx="443413" cy="266826"/>
-          </a:xfrm>
-          <a:prstGeom prst="straightConnector1">
-            <a:avLst/>
-          </a:prstGeom>
-          <a:ln w="19050">
-            <a:solidFill>
-              <a:srgbClr val="990099"/>
-            </a:solidFill>
-            <a:tailEnd type="triangle"/>
-          </a:ln>
-        </p:spPr>
-        <p:style>
-          <a:lnRef idx="1">
-            <a:schemeClr val="accent1"/>
-          </a:lnRef>
-          <a:fillRef idx="0">
-            <a:schemeClr val="accent1"/>
-          </a:fillRef>
-          <a:effectRef idx="0">
-            <a:schemeClr val="accent1"/>
-          </a:effectRef>
-          <a:fontRef idx="minor">
-            <a:schemeClr val="tx1"/>
-          </a:fontRef>
-        </p:style>
-      </p:cxnSp>
-      <p:cxnSp>
-        <p:nvCxnSpPr>
-          <p:cNvPr id="39" name="Straight Arrow Connector 38">
-            <a:extLst>
-              <a:ext uri="{FF2B5EF4-FFF2-40B4-BE49-F238E27FC236}">
-                <a16:creationId xmlns:a16="http://schemas.microsoft.com/office/drawing/2014/main" id="{99A4A590-29D9-4381-AF50-D9FF0682C81D}"/>
-              </a:ext>
-            </a:extLst>
-          </p:cNvPr>
-          <p:cNvCxnSpPr>
-            <a:cxnSpLocks/>
-            <a:stCxn id="33" idx="3"/>
-            <a:endCxn id="47" idx="1"/>
-          </p:cNvCxnSpPr>
-          <p:nvPr/>
-        </p:nvCxnSpPr>
-        <p:spPr>
-          <a:xfrm>
-            <a:off x="6226139" y="2868579"/>
-            <a:ext cx="450359" cy="185706"/>
-          </a:xfrm>
-          <a:prstGeom prst="straightConnector1">
-            <a:avLst/>
-          </a:prstGeom>
-          <a:ln w="19050">
-            <a:solidFill>
-              <a:srgbClr val="990099"/>
-            </a:solidFill>
-            <a:tailEnd type="triangle"/>
-          </a:ln>
-        </p:spPr>
-        <p:style>
-          <a:lnRef idx="1">
-            <a:schemeClr val="accent1"/>
-          </a:lnRef>
-          <a:fillRef idx="0">
-            <a:schemeClr val="accent1"/>
-          </a:fillRef>
-          <a:effectRef idx="0">
-            <a:schemeClr val="accent1"/>
-          </a:effectRef>
-          <a:fontRef idx="minor">
-            <a:schemeClr val="tx1"/>
-          </a:fontRef>
-        </p:style>
-      </p:cxnSp>
-      <p:cxnSp>
-        <p:nvCxnSpPr>
-          <p:cNvPr id="40" name="Straight Arrow Connector 39">
-            <a:extLst>
-              <a:ext uri="{FF2B5EF4-FFF2-40B4-BE49-F238E27FC236}">
-                <a16:creationId xmlns:a16="http://schemas.microsoft.com/office/drawing/2014/main" id="{1152908B-3867-4478-ABC8-C0B32ABADFEB}"/>
-              </a:ext>
-            </a:extLst>
-          </p:cNvPr>
-          <p:cNvCxnSpPr>
-            <a:cxnSpLocks/>
-            <a:stCxn id="34" idx="3"/>
-            <a:endCxn id="47" idx="0"/>
-          </p:cNvCxnSpPr>
-          <p:nvPr/>
-        </p:nvCxnSpPr>
-        <p:spPr>
-          <a:xfrm>
-            <a:off x="6226139" y="2384135"/>
-            <a:ext cx="1194344" cy="528932"/>
-          </a:xfrm>
-          <a:prstGeom prst="straightConnector1">
-            <a:avLst/>
-          </a:prstGeom>
-          <a:ln w="19050">
-            <a:solidFill>
-              <a:srgbClr val="990099"/>
-            </a:solidFill>
-            <a:tailEnd type="triangle"/>
-          </a:ln>
-        </p:spPr>
-        <p:style>
-          <a:lnRef idx="1">
-            <a:schemeClr val="accent1"/>
-          </a:lnRef>
-          <a:fillRef idx="0">
-            <a:schemeClr val="accent1"/>
-          </a:fillRef>
-          <a:effectRef idx="0">
-            <a:schemeClr val="accent1"/>
-          </a:effectRef>
-          <a:fontRef idx="minor">
-            <a:schemeClr val="tx1"/>
-          </a:fontRef>
-        </p:style>
-      </p:cxnSp>
-      <p:cxnSp>
-        <p:nvCxnSpPr>
-          <p:cNvPr id="41" name="Straight Arrow Connector 40">
-            <a:extLst>
-              <a:ext uri="{FF2B5EF4-FFF2-40B4-BE49-F238E27FC236}">
-                <a16:creationId xmlns:a16="http://schemas.microsoft.com/office/drawing/2014/main" id="{86868C88-BA92-4318-AED9-F6695D8B481B}"/>
-              </a:ext>
-            </a:extLst>
-          </p:cNvPr>
-          <p:cNvCxnSpPr>
-            <a:cxnSpLocks/>
-            <a:stCxn id="35" idx="3"/>
-            <a:endCxn id="47" idx="1"/>
+            <a:stCxn id="21" idx="3"/>
+            <a:endCxn id="22" idx="1"/>
           </p:cNvCxnSpPr>
           <p:nvPr/>
         </p:nvCxnSpPr>
         <p:spPr>
           <a:xfrm flipV="1">
-            <a:off x="6226139" y="3054285"/>
-            <a:ext cx="450359" cy="323092"/>
+            <a:off x="5257089" y="3320101"/>
+            <a:ext cx="658194" cy="274401"/>
           </a:xfrm>
           <a:prstGeom prst="straightConnector1">
             <a:avLst/>
           </a:prstGeom>
-          <a:ln w="19050">
+          <a:ln w="31750">
             <a:solidFill>
-              <a:srgbClr val="990099"/>
+              <a:schemeClr val="tx1"/>
             </a:solidFill>
-            <a:tailEnd type="triangle"/>
+            <a:tailEnd type="arrow" w="lg" len="lg"/>
           </a:ln>
         </p:spPr>
         <p:style>
@@ -9609,10 +10984,10 @@
       </p:cxnSp>
       <p:sp>
         <p:nvSpPr>
-          <p:cNvPr id="42" name="Rectangle 41">
+          <p:cNvPr id="19" name="Rectangle 18">
             <a:extLst>
               <a:ext uri="{FF2B5EF4-FFF2-40B4-BE49-F238E27FC236}">
-                <a16:creationId xmlns:a16="http://schemas.microsoft.com/office/drawing/2014/main" id="{F776193D-D886-40E3-8E08-2ABCC32C2D40}"/>
+                <a16:creationId xmlns:a16="http://schemas.microsoft.com/office/drawing/2014/main" id="{A7EF1D8C-766D-4987-7919-46E701509059}"/>
               </a:ext>
             </a:extLst>
           </p:cNvPr>
@@ -9621,17 +10996,14 @@
         </p:nvSpPr>
         <p:spPr>
           <a:xfrm>
-            <a:off x="4935005" y="3645155"/>
-            <a:ext cx="1291134" cy="394972"/>
+            <a:off x="9383167" y="3270501"/>
+            <a:ext cx="907535" cy="648000"/>
           </a:xfrm>
           <a:prstGeom prst="rect">
             <a:avLst/>
           </a:prstGeom>
           <a:solidFill>
-            <a:schemeClr val="tx1">
-              <a:lumMod val="50000"/>
-              <a:lumOff val="50000"/>
-            </a:schemeClr>
+            <a:srgbClr val="7030A0"/>
           </a:solidFill>
         </p:spPr>
         <p:style>
@@ -9656,95 +11028,39 @@
           <a:p>
             <a:pPr algn="ctr"/>
             <a:r>
-              <a:rPr lang="en-GB" sz="1400" dirty="0" err="1"/>
-              <a:t>BiquadNode</a:t>
-            </a:r>
-            <a:endParaRPr lang="en-GB" sz="1400" dirty="0"/>
-          </a:p>
-          <a:p>
-            <a:pPr algn="ctr"/>
-            <a:r>
-              <a:rPr lang="en-GB" sz="1400" i="1" dirty="0" err="1"/>
-              <a:t>Highshelf</a:t>
-            </a:r>
-            <a:endParaRPr lang="en-GB" sz="1400" i="1" dirty="0"/>
+              <a:rPr lang="en-GB" dirty="0"/>
+              <a:t>Output</a:t>
+            </a:r>
           </a:p>
         </p:txBody>
       </p:sp>
       <p:cxnSp>
         <p:nvCxnSpPr>
-          <p:cNvPr id="43" name="Straight Arrow Connector 42">
+          <p:cNvPr id="20" name="Straight Arrow Connector 19">
             <a:extLst>
               <a:ext uri="{FF2B5EF4-FFF2-40B4-BE49-F238E27FC236}">
-                <a16:creationId xmlns:a16="http://schemas.microsoft.com/office/drawing/2014/main" id="{7A122360-8862-4E08-B270-2C207B85E167}"/>
+                <a16:creationId xmlns:a16="http://schemas.microsoft.com/office/drawing/2014/main" id="{D2CC6891-FC55-E9E2-2DE3-DA0CDB0A5686}"/>
               </a:ext>
             </a:extLst>
           </p:cNvPr>
           <p:cNvCxnSpPr>
             <a:cxnSpLocks/>
-            <a:stCxn id="32" idx="2"/>
           </p:cNvCxnSpPr>
           <p:nvPr/>
         </p:nvCxnSpPr>
         <p:spPr>
           <a:xfrm>
-            <a:off x="3887546" y="3195502"/>
-            <a:ext cx="1088980" cy="590872"/>
+            <a:off x="8787376" y="3594501"/>
+            <a:ext cx="595791" cy="0"/>
           </a:xfrm>
           <a:prstGeom prst="straightConnector1">
             <a:avLst/>
           </a:prstGeom>
-          <a:ln w="19050">
+          <a:ln w="31750">
             <a:solidFill>
-              <a:srgbClr val="990099"/>
+              <a:schemeClr val="tx1"/>
             </a:solidFill>
-            <a:tailEnd type="triangle"/>
-          </a:ln>
-        </p:spPr>
-        <p:style>
-          <a:lnRef idx="1">
-            <a:schemeClr val="accent1"/>
-          </a:lnRef>
-          <a:fillRef idx="0">
-            <a:schemeClr val="accent1"/>
-          </a:fillRef>
-          <a:effectRef idx="0">
-            <a:schemeClr val="accent1"/>
-          </a:effectRef>
-          <a:fontRef idx="minor">
-            <a:schemeClr val="tx1"/>
-          </a:fontRef>
-        </p:style>
-      </p:cxnSp>
-      <p:cxnSp>
-        <p:nvCxnSpPr>
-          <p:cNvPr id="44" name="Straight Arrow Connector 43">
-            <a:extLst>
-              <a:ext uri="{FF2B5EF4-FFF2-40B4-BE49-F238E27FC236}">
-                <a16:creationId xmlns:a16="http://schemas.microsoft.com/office/drawing/2014/main" id="{8CF94B65-96EE-480A-8501-52CE10057356}"/>
-              </a:ext>
-            </a:extLst>
-          </p:cNvPr>
-          <p:cNvCxnSpPr>
-            <a:cxnSpLocks/>
-            <a:stCxn id="42" idx="3"/>
-            <a:endCxn id="47" idx="2"/>
-          </p:cNvCxnSpPr>
-          <p:nvPr/>
-        </p:nvCxnSpPr>
-        <p:spPr>
-          <a:xfrm flipV="1">
-            <a:off x="6226139" y="3195502"/>
-            <a:ext cx="1194344" cy="647139"/>
-          </a:xfrm>
-          <a:prstGeom prst="straightConnector1">
-            <a:avLst/>
-          </a:prstGeom>
-          <a:ln w="19050">
-            <a:solidFill>
-              <a:srgbClr val="990099"/>
-            </a:solidFill>
-            <a:tailEnd type="triangle"/>
+            <a:tailEnd type="arrow" w="lg" len="lg"/>
           </a:ln>
         </p:spPr>
         <p:style>
@@ -9764,10 +11080,10 @@
       </p:cxnSp>
       <p:sp>
         <p:nvSpPr>
-          <p:cNvPr id="45" name="Rectangle 44">
+          <p:cNvPr id="21" name="Rectangle 20">
             <a:extLst>
               <a:ext uri="{FF2B5EF4-FFF2-40B4-BE49-F238E27FC236}">
-                <a16:creationId xmlns:a16="http://schemas.microsoft.com/office/drawing/2014/main" id="{910B863F-9F33-481A-AFD4-0307A3E555D5}"/>
+                <a16:creationId xmlns:a16="http://schemas.microsoft.com/office/drawing/2014/main" id="{F66D9AA5-5626-806F-7E51-BA8454A34AF0}"/>
               </a:ext>
             </a:extLst>
           </p:cNvPr>
@@ -9776,17 +11092,14 @@
         </p:nvSpPr>
         <p:spPr>
           <a:xfrm>
-            <a:off x="1267042" y="2829146"/>
-            <a:ext cx="1643572" cy="464311"/>
+            <a:off x="4362185" y="3394194"/>
+            <a:ext cx="894904" cy="400615"/>
           </a:xfrm>
           <a:prstGeom prst="rect">
             <a:avLst/>
           </a:prstGeom>
           <a:solidFill>
-            <a:schemeClr val="tx1">
-              <a:lumMod val="50000"/>
-              <a:lumOff val="50000"/>
-            </a:schemeClr>
+            <a:srgbClr val="7030A0"/>
           </a:solidFill>
         </p:spPr>
         <p:style>
@@ -9811,73 +11124,18 @@
           <a:p>
             <a:pPr algn="ctr"/>
             <a:r>
-              <a:rPr lang="en-GB" sz="1400" dirty="0" err="1"/>
-              <a:t>audioWorkletNode</a:t>
-            </a:r>
-            <a:endParaRPr lang="en-GB" sz="1400" dirty="0"/>
-          </a:p>
-          <a:p>
-            <a:pPr algn="ctr"/>
-            <a:r>
-              <a:rPr lang="en-GB" sz="1400" i="1" dirty="0" err="1"/>
-              <a:t>whiteNoise</a:t>
-            </a:r>
-            <a:endParaRPr lang="en-GB" sz="1400" i="1" dirty="0"/>
+              <a:rPr lang="en-GB" dirty="0"/>
+              <a:t>Delay</a:t>
+            </a:r>
           </a:p>
         </p:txBody>
       </p:sp>
-      <p:cxnSp>
-        <p:nvCxnSpPr>
-          <p:cNvPr id="46" name="Straight Arrow Connector 45">
+      <p:sp>
+        <p:nvSpPr>
+          <p:cNvPr id="22" name="Rectangle 21">
             <a:extLst>
               <a:ext uri="{FF2B5EF4-FFF2-40B4-BE49-F238E27FC236}">
-                <a16:creationId xmlns:a16="http://schemas.microsoft.com/office/drawing/2014/main" id="{0B364141-624E-4D3E-9EB0-5932EB012089}"/>
-              </a:ext>
-            </a:extLst>
-          </p:cNvPr>
-          <p:cNvCxnSpPr>
-            <a:cxnSpLocks/>
-            <a:stCxn id="45" idx="3"/>
-            <a:endCxn id="32" idx="1"/>
-          </p:cNvCxnSpPr>
-          <p:nvPr/>
-        </p:nvCxnSpPr>
-        <p:spPr>
-          <a:xfrm flipV="1">
-            <a:off x="2910614" y="3054285"/>
-            <a:ext cx="331366" cy="7017"/>
-          </a:xfrm>
-          <a:prstGeom prst="straightConnector1">
-            <a:avLst/>
-          </a:prstGeom>
-          <a:ln w="19050">
-            <a:solidFill>
-              <a:srgbClr val="990099"/>
-            </a:solidFill>
-            <a:tailEnd type="triangle"/>
-          </a:ln>
-        </p:spPr>
-        <p:style>
-          <a:lnRef idx="1">
-            <a:schemeClr val="accent1"/>
-          </a:lnRef>
-          <a:fillRef idx="0">
-            <a:schemeClr val="accent1"/>
-          </a:fillRef>
-          <a:effectRef idx="0">
-            <a:schemeClr val="accent1"/>
-          </a:effectRef>
-          <a:fontRef idx="minor">
-            <a:schemeClr val="tx1"/>
-          </a:fontRef>
-        </p:style>
-      </p:cxnSp>
-      <p:sp>
-        <p:nvSpPr>
-          <p:cNvPr id="47" name="Rectangle 46">
-            <a:extLst>
-              <a:ext uri="{FF2B5EF4-FFF2-40B4-BE49-F238E27FC236}">
-                <a16:creationId xmlns:a16="http://schemas.microsoft.com/office/drawing/2014/main" id="{C38311F9-B189-4B6A-8DF8-463E6E39901F}"/>
+                <a16:creationId xmlns:a16="http://schemas.microsoft.com/office/drawing/2014/main" id="{23214572-F1FB-57C6-EEC7-D016130F3ABD}"/>
               </a:ext>
             </a:extLst>
           </p:cNvPr>
@@ -9886,17 +11144,14 @@
         </p:nvSpPr>
         <p:spPr>
           <a:xfrm>
-            <a:off x="6676498" y="2913067"/>
-            <a:ext cx="1487970" cy="282435"/>
+            <a:off x="5915283" y="3119793"/>
+            <a:ext cx="894904" cy="400615"/>
           </a:xfrm>
           <a:prstGeom prst="rect">
             <a:avLst/>
           </a:prstGeom>
           <a:solidFill>
-            <a:schemeClr val="tx1">
-              <a:lumMod val="50000"/>
-              <a:lumOff val="50000"/>
-            </a:schemeClr>
+            <a:srgbClr val="7030A0"/>
           </a:solidFill>
         </p:spPr>
         <p:style>
@@ -9921,19 +11176,18 @@
           <a:p>
             <a:pPr algn="ctr"/>
             <a:r>
-              <a:rPr lang="en-GB" sz="1400" dirty="0" err="1"/>
-              <a:t>waveshaperNode</a:t>
-            </a:r>
-            <a:endParaRPr lang="en-GB" sz="1400" dirty="0"/>
+              <a:rPr lang="en-GB" b="1" dirty="0"/>
+              <a:t>BP</a:t>
+            </a:r>
           </a:p>
         </p:txBody>
       </p:sp>
       <p:sp>
         <p:nvSpPr>
-          <p:cNvPr id="48" name="Rectangle 47">
+          <p:cNvPr id="23" name="Rectangle 22">
             <a:extLst>
               <a:ext uri="{FF2B5EF4-FFF2-40B4-BE49-F238E27FC236}">
-                <a16:creationId xmlns:a16="http://schemas.microsoft.com/office/drawing/2014/main" id="{8377EF9B-A4C6-43E6-B49C-AD78CF5A2731}"/>
+                <a16:creationId xmlns:a16="http://schemas.microsoft.com/office/drawing/2014/main" id="{380588AD-8860-84C1-DCB2-22F0AB9A00CC}"/>
               </a:ext>
             </a:extLst>
           </p:cNvPr>
@@ -9942,17 +11196,14 @@
         </p:nvSpPr>
         <p:spPr>
           <a:xfrm>
-            <a:off x="10073877" y="2913067"/>
-            <a:ext cx="1119088" cy="282435"/>
+            <a:off x="5917692" y="3681087"/>
+            <a:ext cx="894904" cy="400615"/>
           </a:xfrm>
           <a:prstGeom prst="rect">
             <a:avLst/>
           </a:prstGeom>
           <a:solidFill>
-            <a:schemeClr val="tx1">
-              <a:lumMod val="50000"/>
-              <a:lumOff val="50000"/>
-            </a:schemeClr>
+            <a:srgbClr val="7030A0"/>
           </a:solidFill>
         </p:spPr>
         <p:style>
@@ -9977,288 +11228,41 @@
           <a:p>
             <a:pPr algn="ctr"/>
             <a:r>
-              <a:rPr lang="en-GB" sz="1400" dirty="0"/>
-              <a:t>destination</a:t>
+              <a:rPr lang="en-GB" b="1" dirty="0"/>
+              <a:t>LP</a:t>
             </a:r>
           </a:p>
         </p:txBody>
       </p:sp>
       <p:cxnSp>
         <p:nvCxnSpPr>
-          <p:cNvPr id="49" name="Straight Arrow Connector 48">
+          <p:cNvPr id="24" name="Straight Arrow Connector 23">
             <a:extLst>
               <a:ext uri="{FF2B5EF4-FFF2-40B4-BE49-F238E27FC236}">
-                <a16:creationId xmlns:a16="http://schemas.microsoft.com/office/drawing/2014/main" id="{C1AB5411-DF01-43B9-B074-0971C8D908AD}"/>
+                <a16:creationId xmlns:a16="http://schemas.microsoft.com/office/drawing/2014/main" id="{83718287-B0A3-AF62-6AF6-40005B9B8629}"/>
               </a:ext>
             </a:extLst>
           </p:cNvPr>
           <p:cNvCxnSpPr>
             <a:cxnSpLocks/>
-            <a:endCxn id="48" idx="1"/>
+            <a:stCxn id="21" idx="3"/>
+            <a:endCxn id="23" idx="1"/>
           </p:cNvCxnSpPr>
           <p:nvPr/>
         </p:nvCxnSpPr>
         <p:spPr>
           <a:xfrm>
-            <a:off x="9746520" y="3054284"/>
-            <a:ext cx="327358" cy="1"/>
+            <a:off x="5257089" y="3594502"/>
+            <a:ext cx="660603" cy="286893"/>
           </a:xfrm>
           <a:prstGeom prst="straightConnector1">
             <a:avLst/>
           </a:prstGeom>
-          <a:ln w="19050">
+          <a:ln w="31750">
             <a:solidFill>
-              <a:srgbClr val="990099"/>
+              <a:schemeClr val="tx1"/>
             </a:solidFill>
-            <a:tailEnd type="triangle"/>
-          </a:ln>
-        </p:spPr>
-        <p:style>
-          <a:lnRef idx="1">
-            <a:schemeClr val="accent1"/>
-          </a:lnRef>
-          <a:fillRef idx="0">
-            <a:schemeClr val="accent1"/>
-          </a:fillRef>
-          <a:effectRef idx="0">
-            <a:schemeClr val="accent1"/>
-          </a:effectRef>
-          <a:fontRef idx="minor">
-            <a:schemeClr val="tx1"/>
-          </a:fontRef>
-        </p:style>
-      </p:cxnSp>
-      <p:sp>
-        <p:nvSpPr>
-          <p:cNvPr id="50" name="Rectangle 49">
-            <a:extLst>
-              <a:ext uri="{FF2B5EF4-FFF2-40B4-BE49-F238E27FC236}">
-                <a16:creationId xmlns:a16="http://schemas.microsoft.com/office/drawing/2014/main" id="{60C7ADDE-E7D7-4D83-8A06-38E6F1AB7891}"/>
-              </a:ext>
-            </a:extLst>
-          </p:cNvPr>
-          <p:cNvSpPr/>
-          <p:nvPr/>
-        </p:nvSpPr>
-        <p:spPr>
-          <a:xfrm>
-            <a:off x="8465581" y="2915981"/>
-            <a:ext cx="1360781" cy="282435"/>
-          </a:xfrm>
-          <a:prstGeom prst="rect">
-            <a:avLst/>
-          </a:prstGeom>
-          <a:solidFill>
-            <a:schemeClr val="tx1">
-              <a:lumMod val="50000"/>
-              <a:lumOff val="50000"/>
-            </a:schemeClr>
-          </a:solidFill>
-        </p:spPr>
-        <p:style>
-          <a:lnRef idx="2">
-            <a:schemeClr val="accent1">
-              <a:shade val="50000"/>
-            </a:schemeClr>
-          </a:lnRef>
-          <a:fillRef idx="1">
-            <a:schemeClr val="accent1"/>
-          </a:fillRef>
-          <a:effectRef idx="0">
-            <a:schemeClr val="accent1"/>
-          </a:effectRef>
-          <a:fontRef idx="minor">
-            <a:schemeClr val="lt1"/>
-          </a:fontRef>
-        </p:style>
-        <p:txBody>
-          <a:bodyPr rtlCol="0" anchor="ctr"/>
-          <a:lstStyle/>
-          <a:p>
-            <a:pPr algn="ctr"/>
-            <a:r>
-              <a:rPr lang="en-GB" sz="1400" dirty="0" err="1"/>
-              <a:t>convolverNode</a:t>
-            </a:r>
-            <a:endParaRPr lang="en-GB" sz="1400" dirty="0"/>
-          </a:p>
-        </p:txBody>
-      </p:sp>
-      <p:cxnSp>
-        <p:nvCxnSpPr>
-          <p:cNvPr id="51" name="Straight Arrow Connector 50">
-            <a:extLst>
-              <a:ext uri="{FF2B5EF4-FFF2-40B4-BE49-F238E27FC236}">
-                <a16:creationId xmlns:a16="http://schemas.microsoft.com/office/drawing/2014/main" id="{22D89999-F377-4474-BDBA-4FC40984B6B0}"/>
-              </a:ext>
-            </a:extLst>
-          </p:cNvPr>
-          <p:cNvCxnSpPr>
-            <a:cxnSpLocks/>
-            <a:endCxn id="50" idx="1"/>
-          </p:cNvCxnSpPr>
-          <p:nvPr/>
-        </p:nvCxnSpPr>
-        <p:spPr>
-          <a:xfrm>
-            <a:off x="8083687" y="3057198"/>
-            <a:ext cx="381894" cy="1"/>
-          </a:xfrm>
-          <a:prstGeom prst="straightConnector1">
-            <a:avLst/>
-          </a:prstGeom>
-          <a:ln w="19050">
-            <a:solidFill>
-              <a:srgbClr val="990099"/>
-            </a:solidFill>
-            <a:tailEnd type="triangle"/>
-          </a:ln>
-        </p:spPr>
-        <p:style>
-          <a:lnRef idx="1">
-            <a:schemeClr val="accent1"/>
-          </a:lnRef>
-          <a:fillRef idx="0">
-            <a:schemeClr val="accent1"/>
-          </a:fillRef>
-          <a:effectRef idx="0">
-            <a:schemeClr val="accent1"/>
-          </a:effectRef>
-          <a:fontRef idx="minor">
-            <a:schemeClr val="tx1"/>
-          </a:fontRef>
-        </p:style>
-      </p:cxnSp>
-      <p:sp>
-        <p:nvSpPr>
-          <p:cNvPr id="52" name="Rectangle 51">
-            <a:extLst>
-              <a:ext uri="{FF2B5EF4-FFF2-40B4-BE49-F238E27FC236}">
-                <a16:creationId xmlns:a16="http://schemas.microsoft.com/office/drawing/2014/main" id="{639F975E-1AA5-448B-A01A-B302641D9F99}"/>
-              </a:ext>
-            </a:extLst>
-          </p:cNvPr>
-          <p:cNvSpPr/>
-          <p:nvPr/>
-        </p:nvSpPr>
-        <p:spPr>
-          <a:xfrm>
-            <a:off x="2636600" y="3728640"/>
-            <a:ext cx="1895180" cy="282435"/>
-          </a:xfrm>
-          <a:prstGeom prst="rect">
-            <a:avLst/>
-          </a:prstGeom>
-          <a:solidFill>
-            <a:srgbClr val="800080"/>
-          </a:solidFill>
-        </p:spPr>
-        <p:style>
-          <a:lnRef idx="2">
-            <a:schemeClr val="accent1">
-              <a:shade val="50000"/>
-            </a:schemeClr>
-          </a:lnRef>
-          <a:fillRef idx="1">
-            <a:schemeClr val="accent1"/>
-          </a:fillRef>
-          <a:effectRef idx="0">
-            <a:schemeClr val="accent1"/>
-          </a:effectRef>
-          <a:fontRef idx="minor">
-            <a:schemeClr val="lt1"/>
-          </a:fontRef>
-        </p:style>
-        <p:txBody>
-          <a:bodyPr rtlCol="0" anchor="ctr"/>
-          <a:lstStyle/>
-          <a:p>
-            <a:pPr algn="ctr"/>
-            <a:r>
-              <a:rPr lang="en-GB" sz="1400" dirty="0" err="1"/>
-              <a:t>setValueCurveAtTime</a:t>
-            </a:r>
-            <a:endParaRPr lang="en-GB" sz="1400" dirty="0"/>
-          </a:p>
-        </p:txBody>
-      </p:sp>
-      <p:sp>
-        <p:nvSpPr>
-          <p:cNvPr id="53" name="Rectangle 52">
-            <a:extLst>
-              <a:ext uri="{FF2B5EF4-FFF2-40B4-BE49-F238E27FC236}">
-                <a16:creationId xmlns:a16="http://schemas.microsoft.com/office/drawing/2014/main" id="{69D963B6-2441-4DC4-BB47-48CFCC409577}"/>
-              </a:ext>
-            </a:extLst>
-          </p:cNvPr>
-          <p:cNvSpPr/>
-          <p:nvPr/>
-        </p:nvSpPr>
-        <p:spPr>
-          <a:xfrm>
-            <a:off x="7203838" y="3634917"/>
-            <a:ext cx="987430" cy="282435"/>
-          </a:xfrm>
-          <a:prstGeom prst="rect">
-            <a:avLst/>
-          </a:prstGeom>
-          <a:solidFill>
-            <a:srgbClr val="800080"/>
-          </a:solidFill>
-        </p:spPr>
-        <p:style>
-          <a:lnRef idx="2">
-            <a:schemeClr val="accent1">
-              <a:shade val="50000"/>
-            </a:schemeClr>
-          </a:lnRef>
-          <a:fillRef idx="1">
-            <a:schemeClr val="accent1"/>
-          </a:fillRef>
-          <a:effectRef idx="0">
-            <a:schemeClr val="accent1"/>
-          </a:effectRef>
-          <a:fontRef idx="minor">
-            <a:schemeClr val="lt1"/>
-          </a:fontRef>
-        </p:style>
-        <p:txBody>
-          <a:bodyPr rtlCol="0" anchor="ctr"/>
-          <a:lstStyle/>
-          <a:p>
-            <a:pPr algn="ctr"/>
-            <a:r>
-              <a:rPr lang="en-GB" sz="1400" dirty="0"/>
-              <a:t>curve</a:t>
-            </a:r>
-          </a:p>
-        </p:txBody>
-      </p:sp>
-      <p:cxnSp>
-        <p:nvCxnSpPr>
-          <p:cNvPr id="54" name="Straight Arrow Connector 53">
-            <a:extLst>
-              <a:ext uri="{FF2B5EF4-FFF2-40B4-BE49-F238E27FC236}">
-                <a16:creationId xmlns:a16="http://schemas.microsoft.com/office/drawing/2014/main" id="{37CCE4A0-DAC6-450B-997B-BB91DB29446C}"/>
-              </a:ext>
-            </a:extLst>
-          </p:cNvPr>
-          <p:cNvCxnSpPr>
-            <a:cxnSpLocks/>
-            <a:stCxn id="53" idx="0"/>
-          </p:cNvCxnSpPr>
-          <p:nvPr/>
-        </p:nvCxnSpPr>
-        <p:spPr>
-          <a:xfrm flipV="1">
-            <a:off x="7697553" y="3191292"/>
-            <a:ext cx="0" cy="443625"/>
-          </a:xfrm>
-          <a:prstGeom prst="straightConnector1">
-            <a:avLst/>
-          </a:prstGeom>
-          <a:ln w="19050">
-            <a:tailEnd type="triangle"/>
+            <a:tailEnd type="arrow" w="lg" len="lg"/>
           </a:ln>
         </p:spPr>
         <p:style>
@@ -10278,130 +11282,33 @@
       </p:cxnSp>
       <p:cxnSp>
         <p:nvCxnSpPr>
-          <p:cNvPr id="55" name="Straight Arrow Connector 54">
+          <p:cNvPr id="26" name="Straight Arrow Connector 25">
             <a:extLst>
               <a:ext uri="{FF2B5EF4-FFF2-40B4-BE49-F238E27FC236}">
-                <a16:creationId xmlns:a16="http://schemas.microsoft.com/office/drawing/2014/main" id="{3DF3E151-29E0-436A-98FC-DC83BA5DE730}"/>
+                <a16:creationId xmlns:a16="http://schemas.microsoft.com/office/drawing/2014/main" id="{7FE88E37-B478-53B5-F3F0-4DD7DC050481}"/>
               </a:ext>
             </a:extLst>
           </p:cNvPr>
           <p:cNvCxnSpPr>
             <a:cxnSpLocks/>
-            <a:stCxn id="52" idx="0"/>
+            <a:stCxn id="23" idx="3"/>
+            <a:endCxn id="10" idx="1"/>
           </p:cNvCxnSpPr>
           <p:nvPr/>
         </p:nvCxnSpPr>
         <p:spPr>
           <a:xfrm flipV="1">
-            <a:off x="3584190" y="3179891"/>
-            <a:ext cx="0" cy="548749"/>
+            <a:off x="6812596" y="3594501"/>
+            <a:ext cx="678780" cy="286894"/>
           </a:xfrm>
           <a:prstGeom prst="straightConnector1">
             <a:avLst/>
           </a:prstGeom>
-          <a:ln w="19050">
+          <a:ln w="31750">
             <a:solidFill>
-              <a:srgbClr val="990099"/>
+              <a:schemeClr val="tx1"/>
             </a:solidFill>
-            <a:tailEnd type="triangle"/>
-          </a:ln>
-        </p:spPr>
-        <p:style>
-          <a:lnRef idx="1">
-            <a:schemeClr val="accent1"/>
-          </a:lnRef>
-          <a:fillRef idx="0">
-            <a:schemeClr val="accent1"/>
-          </a:fillRef>
-          <a:effectRef idx="0">
-            <a:schemeClr val="accent1"/>
-          </a:effectRef>
-          <a:fontRef idx="minor">
-            <a:schemeClr val="tx1"/>
-          </a:fontRef>
-        </p:style>
-      </p:cxnSp>
-      <p:sp>
-        <p:nvSpPr>
-          <p:cNvPr id="56" name="Rectangle 55">
-            <a:extLst>
-              <a:ext uri="{FF2B5EF4-FFF2-40B4-BE49-F238E27FC236}">
-                <a16:creationId xmlns:a16="http://schemas.microsoft.com/office/drawing/2014/main" id="{7BD10476-3A92-407A-84B4-B34B1C6860D1}"/>
-              </a:ext>
-            </a:extLst>
-          </p:cNvPr>
-          <p:cNvSpPr/>
-          <p:nvPr/>
-        </p:nvSpPr>
-        <p:spPr>
-          <a:xfrm>
-            <a:off x="8654164" y="3645155"/>
-            <a:ext cx="987430" cy="282435"/>
-          </a:xfrm>
-          <a:prstGeom prst="rect">
-            <a:avLst/>
-          </a:prstGeom>
-          <a:solidFill>
-            <a:srgbClr val="800080"/>
-          </a:solidFill>
-        </p:spPr>
-        <p:style>
-          <a:lnRef idx="2">
-            <a:schemeClr val="accent1">
-              <a:shade val="50000"/>
-            </a:schemeClr>
-          </a:lnRef>
-          <a:fillRef idx="1">
-            <a:schemeClr val="accent1"/>
-          </a:fillRef>
-          <a:effectRef idx="0">
-            <a:schemeClr val="accent1"/>
-          </a:effectRef>
-          <a:fontRef idx="minor">
-            <a:schemeClr val="lt1"/>
-          </a:fontRef>
-        </p:style>
-        <p:txBody>
-          <a:bodyPr rtlCol="0" anchor="ctr"/>
-          <a:lstStyle/>
-          <a:p>
-            <a:pPr algn="ctr"/>
-            <a:r>
-              <a:rPr lang="en-GB" sz="1400" dirty="0"/>
-              <a:t>buffer</a:t>
-            </a:r>
-          </a:p>
-        </p:txBody>
-      </p:sp>
-      <p:cxnSp>
-        <p:nvCxnSpPr>
-          <p:cNvPr id="57" name="Straight Arrow Connector 56">
-            <a:extLst>
-              <a:ext uri="{FF2B5EF4-FFF2-40B4-BE49-F238E27FC236}">
-                <a16:creationId xmlns:a16="http://schemas.microsoft.com/office/drawing/2014/main" id="{EAB4EB93-C8CD-4B1C-81E0-F61152C671D7}"/>
-              </a:ext>
-            </a:extLst>
-          </p:cNvPr>
-          <p:cNvCxnSpPr>
-            <a:cxnSpLocks/>
-            <a:stCxn id="56" idx="0"/>
-            <a:endCxn id="50" idx="2"/>
-          </p:cNvCxnSpPr>
-          <p:nvPr/>
-        </p:nvCxnSpPr>
-        <p:spPr>
-          <a:xfrm flipH="1" flipV="1">
-            <a:off x="9145972" y="3198416"/>
-            <a:ext cx="1907" cy="446739"/>
-          </a:xfrm>
-          <a:prstGeom prst="straightConnector1">
-            <a:avLst/>
-          </a:prstGeom>
-          <a:ln w="19050">
-            <a:solidFill>
-              <a:srgbClr val="990099"/>
-            </a:solidFill>
-            <a:tailEnd type="triangle"/>
+            <a:tailEnd type="arrow" w="lg" len="lg"/>
           </a:ln>
         </p:spPr>
         <p:style>
@@ -10422,7 +11329,7 @@
     </p:spTree>
     <p:extLst>
       <p:ext uri="{BB962C8B-B14F-4D97-AF65-F5344CB8AC3E}">
-        <p14:creationId xmlns:p14="http://schemas.microsoft.com/office/powerpoint/2010/main" val="23973663"/>
+        <p14:creationId xmlns:p14="http://schemas.microsoft.com/office/powerpoint/2010/main" val="2666592918"/>
       </p:ext>
     </p:extLst>
   </p:cSld>
@@ -10479,6 +11386,1478 @@
           <a:p>
             <a:r>
               <a:rPr lang="en-GB" dirty="0"/>
+              <a:t>Figure 1.2</a:t>
+            </a:r>
+          </a:p>
+        </p:txBody>
+      </p:sp>
+      <p:sp>
+        <p:nvSpPr>
+          <p:cNvPr id="3" name="Content Placeholder 2">
+            <a:extLst>
+              <a:ext uri="{FF2B5EF4-FFF2-40B4-BE49-F238E27FC236}">
+                <a16:creationId xmlns:a16="http://schemas.microsoft.com/office/drawing/2014/main" id="{00BDC442-26ED-41FE-8C90-4C80544A0F20}"/>
+              </a:ext>
+            </a:extLst>
+          </p:cNvPr>
+          <p:cNvSpPr>
+            <a:spLocks noGrp="1"/>
+          </p:cNvSpPr>
+          <p:nvPr>
+            <p:ph idx="1"/>
+          </p:nvPr>
+        </p:nvSpPr>
+        <p:spPr>
+          <a:xfrm>
+            <a:off x="838200" y="5435855"/>
+            <a:ext cx="10915746" cy="1057020"/>
+          </a:xfrm>
+        </p:spPr>
+        <p:txBody>
+          <a:bodyPr/>
+          <a:lstStyle/>
+          <a:p>
+            <a:pPr marL="0" indent="0">
+              <a:buNone/>
+            </a:pPr>
+            <a:r>
+              <a:rPr lang="en-GB" dirty="0"/>
+              <a:t>ALT TEXT</a:t>
+            </a:r>
+          </a:p>
+          <a:p>
+            <a:pPr marL="0" indent="0">
+              <a:buNone/>
+            </a:pPr>
+            <a:r>
+              <a:rPr lang="en-US" sz="1800" b="1" dirty="0">
+                <a:effectLst/>
+                <a:latin typeface="Times New Roman" panose="02020603050405020304" pitchFamily="18" charset="0"/>
+                <a:ea typeface="Times New Roman" panose="02020603050405020304" pitchFamily="18" charset="0"/>
+              </a:rPr>
+              <a:t>Figure 1.2. A complex audio routing graph. It applies an envelope, </a:t>
+            </a:r>
+            <a:r>
+              <a:rPr lang="en-US" sz="1800" b="1" dirty="0" err="1">
+                <a:effectLst/>
+                <a:latin typeface="Times New Roman" panose="02020603050405020304" pitchFamily="18" charset="0"/>
+                <a:ea typeface="Times New Roman" panose="02020603050405020304" pitchFamily="18" charset="0"/>
+              </a:rPr>
+              <a:t>filterbank</a:t>
+            </a:r>
+            <a:r>
+              <a:rPr lang="en-US" sz="1800" b="1" dirty="0">
+                <a:effectLst/>
+                <a:latin typeface="Times New Roman" panose="02020603050405020304" pitchFamily="18" charset="0"/>
+                <a:ea typeface="Times New Roman" panose="02020603050405020304" pitchFamily="18" charset="0"/>
+              </a:rPr>
+              <a:t>, distortion and reverb to noise.</a:t>
+            </a:r>
+            <a:endParaRPr lang="en-GB" sz="1800" b="1" dirty="0">
+              <a:effectLst/>
+              <a:latin typeface="Times New Roman" panose="02020603050405020304" pitchFamily="18" charset="0"/>
+              <a:ea typeface="Times New Roman" panose="02020603050405020304" pitchFamily="18" charset="0"/>
+            </a:endParaRPr>
+          </a:p>
+          <a:p>
+            <a:pPr marL="0" indent="0">
+              <a:buNone/>
+            </a:pPr>
+            <a:endParaRPr lang="en-GB" dirty="0"/>
+          </a:p>
+        </p:txBody>
+      </p:sp>
+      <p:sp>
+        <p:nvSpPr>
+          <p:cNvPr id="32" name="Rectangle 31">
+            <a:extLst>
+              <a:ext uri="{FF2B5EF4-FFF2-40B4-BE49-F238E27FC236}">
+                <a16:creationId xmlns:a16="http://schemas.microsoft.com/office/drawing/2014/main" id="{46E0C75C-FA02-4D9A-A201-3C445623B266}"/>
+              </a:ext>
+            </a:extLst>
+          </p:cNvPr>
+          <p:cNvSpPr/>
+          <p:nvPr/>
+        </p:nvSpPr>
+        <p:spPr>
+          <a:xfrm>
+            <a:off x="3241980" y="2913067"/>
+            <a:ext cx="1291134" cy="282435"/>
+          </a:xfrm>
+          <a:prstGeom prst="rect">
+            <a:avLst/>
+          </a:prstGeom>
+          <a:solidFill>
+            <a:schemeClr val="tx1">
+              <a:lumMod val="50000"/>
+              <a:lumOff val="50000"/>
+            </a:schemeClr>
+          </a:solidFill>
+        </p:spPr>
+        <p:style>
+          <a:lnRef idx="2">
+            <a:schemeClr val="accent1">
+              <a:shade val="50000"/>
+            </a:schemeClr>
+          </a:lnRef>
+          <a:fillRef idx="1">
+            <a:schemeClr val="accent1"/>
+          </a:fillRef>
+          <a:effectRef idx="0">
+            <a:schemeClr val="accent1"/>
+          </a:effectRef>
+          <a:fontRef idx="minor">
+            <a:schemeClr val="lt1"/>
+          </a:fontRef>
+        </p:style>
+        <p:txBody>
+          <a:bodyPr rtlCol="0" anchor="ctr"/>
+          <a:lstStyle/>
+          <a:p>
+            <a:pPr algn="ctr"/>
+            <a:r>
+              <a:rPr lang="en-GB" sz="1400" dirty="0" err="1"/>
+              <a:t>gainNode</a:t>
+            </a:r>
+            <a:endParaRPr lang="en-GB" sz="1400" dirty="0"/>
+          </a:p>
+        </p:txBody>
+      </p:sp>
+      <p:sp>
+        <p:nvSpPr>
+          <p:cNvPr id="33" name="Rectangle 32">
+            <a:extLst>
+              <a:ext uri="{FF2B5EF4-FFF2-40B4-BE49-F238E27FC236}">
+                <a16:creationId xmlns:a16="http://schemas.microsoft.com/office/drawing/2014/main" id="{97F043BD-EF02-4717-A01A-AC097A33E36C}"/>
+              </a:ext>
+            </a:extLst>
+          </p:cNvPr>
+          <p:cNvSpPr/>
+          <p:nvPr/>
+        </p:nvSpPr>
+        <p:spPr>
+          <a:xfrm>
+            <a:off x="4935005" y="2671093"/>
+            <a:ext cx="1291134" cy="394972"/>
+          </a:xfrm>
+          <a:prstGeom prst="rect">
+            <a:avLst/>
+          </a:prstGeom>
+          <a:solidFill>
+            <a:schemeClr val="tx1">
+              <a:lumMod val="50000"/>
+              <a:lumOff val="50000"/>
+            </a:schemeClr>
+          </a:solidFill>
+        </p:spPr>
+        <p:style>
+          <a:lnRef idx="2">
+            <a:schemeClr val="accent1">
+              <a:shade val="50000"/>
+            </a:schemeClr>
+          </a:lnRef>
+          <a:fillRef idx="1">
+            <a:schemeClr val="accent1"/>
+          </a:fillRef>
+          <a:effectRef idx="0">
+            <a:schemeClr val="accent1"/>
+          </a:effectRef>
+          <a:fontRef idx="minor">
+            <a:schemeClr val="lt1"/>
+          </a:fontRef>
+        </p:style>
+        <p:txBody>
+          <a:bodyPr rtlCol="0" anchor="ctr"/>
+          <a:lstStyle/>
+          <a:p>
+            <a:pPr algn="ctr"/>
+            <a:r>
+              <a:rPr lang="en-GB" sz="1400" dirty="0" err="1"/>
+              <a:t>BiquadNode</a:t>
+            </a:r>
+            <a:endParaRPr lang="en-GB" sz="1400" dirty="0"/>
+          </a:p>
+          <a:p>
+            <a:pPr algn="ctr"/>
+            <a:r>
+              <a:rPr lang="en-GB" sz="1400" i="1" dirty="0"/>
+              <a:t>Peaking</a:t>
+            </a:r>
+          </a:p>
+        </p:txBody>
+      </p:sp>
+      <p:sp>
+        <p:nvSpPr>
+          <p:cNvPr id="34" name="Rectangle 33">
+            <a:extLst>
+              <a:ext uri="{FF2B5EF4-FFF2-40B4-BE49-F238E27FC236}">
+                <a16:creationId xmlns:a16="http://schemas.microsoft.com/office/drawing/2014/main" id="{B6B1E425-2765-4065-806E-C191C8F76460}"/>
+              </a:ext>
+            </a:extLst>
+          </p:cNvPr>
+          <p:cNvSpPr/>
+          <p:nvPr/>
+        </p:nvSpPr>
+        <p:spPr>
+          <a:xfrm>
+            <a:off x="4935005" y="2186649"/>
+            <a:ext cx="1291134" cy="394972"/>
+          </a:xfrm>
+          <a:prstGeom prst="rect">
+            <a:avLst/>
+          </a:prstGeom>
+          <a:solidFill>
+            <a:schemeClr val="tx1">
+              <a:lumMod val="50000"/>
+              <a:lumOff val="50000"/>
+            </a:schemeClr>
+          </a:solidFill>
+        </p:spPr>
+        <p:style>
+          <a:lnRef idx="2">
+            <a:schemeClr val="accent1">
+              <a:shade val="50000"/>
+            </a:schemeClr>
+          </a:lnRef>
+          <a:fillRef idx="1">
+            <a:schemeClr val="accent1"/>
+          </a:fillRef>
+          <a:effectRef idx="0">
+            <a:schemeClr val="accent1"/>
+          </a:effectRef>
+          <a:fontRef idx="minor">
+            <a:schemeClr val="lt1"/>
+          </a:fontRef>
+        </p:style>
+        <p:txBody>
+          <a:bodyPr rtlCol="0" anchor="ctr"/>
+          <a:lstStyle/>
+          <a:p>
+            <a:pPr algn="ctr"/>
+            <a:r>
+              <a:rPr lang="en-GB" sz="1400" dirty="0" err="1"/>
+              <a:t>BiquadNode</a:t>
+            </a:r>
+            <a:endParaRPr lang="en-GB" sz="1400" dirty="0"/>
+          </a:p>
+          <a:p>
+            <a:pPr algn="ctr"/>
+            <a:r>
+              <a:rPr lang="en-GB" sz="1400" i="1" dirty="0" err="1"/>
+              <a:t>Lowshelf</a:t>
+            </a:r>
+            <a:endParaRPr lang="en-GB" sz="1400" i="1" dirty="0"/>
+          </a:p>
+        </p:txBody>
+      </p:sp>
+      <p:sp>
+        <p:nvSpPr>
+          <p:cNvPr id="35" name="Rectangle 34">
+            <a:extLst>
+              <a:ext uri="{FF2B5EF4-FFF2-40B4-BE49-F238E27FC236}">
+                <a16:creationId xmlns:a16="http://schemas.microsoft.com/office/drawing/2014/main" id="{6F4A2BC4-62D8-44B4-BB6D-65CCBB52F31B}"/>
+              </a:ext>
+            </a:extLst>
+          </p:cNvPr>
+          <p:cNvSpPr/>
+          <p:nvPr/>
+        </p:nvSpPr>
+        <p:spPr>
+          <a:xfrm>
+            <a:off x="4935005" y="3179891"/>
+            <a:ext cx="1291134" cy="394972"/>
+          </a:xfrm>
+          <a:prstGeom prst="rect">
+            <a:avLst/>
+          </a:prstGeom>
+          <a:solidFill>
+            <a:schemeClr val="tx1">
+              <a:lumMod val="50000"/>
+              <a:lumOff val="50000"/>
+            </a:schemeClr>
+          </a:solidFill>
+        </p:spPr>
+        <p:style>
+          <a:lnRef idx="2">
+            <a:schemeClr val="accent1">
+              <a:shade val="50000"/>
+            </a:schemeClr>
+          </a:lnRef>
+          <a:fillRef idx="1">
+            <a:schemeClr val="accent1"/>
+          </a:fillRef>
+          <a:effectRef idx="0">
+            <a:schemeClr val="accent1"/>
+          </a:effectRef>
+          <a:fontRef idx="minor">
+            <a:schemeClr val="lt1"/>
+          </a:fontRef>
+        </p:style>
+        <p:txBody>
+          <a:bodyPr rtlCol="0" anchor="ctr"/>
+          <a:lstStyle/>
+          <a:p>
+            <a:pPr algn="ctr"/>
+            <a:r>
+              <a:rPr lang="en-GB" sz="1400" dirty="0" err="1"/>
+              <a:t>BiquadNode</a:t>
+            </a:r>
+            <a:endParaRPr lang="en-GB" sz="1400" dirty="0"/>
+          </a:p>
+          <a:p>
+            <a:pPr algn="ctr"/>
+            <a:r>
+              <a:rPr lang="en-GB" sz="1400" i="1" dirty="0"/>
+              <a:t>Peaking</a:t>
+            </a:r>
+          </a:p>
+        </p:txBody>
+      </p:sp>
+      <p:cxnSp>
+        <p:nvCxnSpPr>
+          <p:cNvPr id="36" name="Straight Arrow Connector 35">
+            <a:extLst>
+              <a:ext uri="{FF2B5EF4-FFF2-40B4-BE49-F238E27FC236}">
+                <a16:creationId xmlns:a16="http://schemas.microsoft.com/office/drawing/2014/main" id="{A36814BC-A775-440A-B1AD-F47A402C1AC1}"/>
+              </a:ext>
+            </a:extLst>
+          </p:cNvPr>
+          <p:cNvCxnSpPr>
+            <a:cxnSpLocks/>
+            <a:stCxn id="32" idx="0"/>
+          </p:cNvCxnSpPr>
+          <p:nvPr/>
+        </p:nvCxnSpPr>
+        <p:spPr>
+          <a:xfrm flipV="1">
+            <a:off x="3887546" y="2327868"/>
+            <a:ext cx="1088980" cy="585199"/>
+          </a:xfrm>
+          <a:prstGeom prst="straightConnector1">
+            <a:avLst/>
+          </a:prstGeom>
+          <a:ln w="19050">
+            <a:solidFill>
+              <a:srgbClr val="990099"/>
+            </a:solidFill>
+            <a:tailEnd type="triangle"/>
+          </a:ln>
+        </p:spPr>
+        <p:style>
+          <a:lnRef idx="1">
+            <a:schemeClr val="accent1"/>
+          </a:lnRef>
+          <a:fillRef idx="0">
+            <a:schemeClr val="accent1"/>
+          </a:fillRef>
+          <a:effectRef idx="0">
+            <a:schemeClr val="accent1"/>
+          </a:effectRef>
+          <a:fontRef idx="minor">
+            <a:schemeClr val="tx1"/>
+          </a:fontRef>
+        </p:style>
+      </p:cxnSp>
+      <p:cxnSp>
+        <p:nvCxnSpPr>
+          <p:cNvPr id="37" name="Straight Arrow Connector 36">
+            <a:extLst>
+              <a:ext uri="{FF2B5EF4-FFF2-40B4-BE49-F238E27FC236}">
+                <a16:creationId xmlns:a16="http://schemas.microsoft.com/office/drawing/2014/main" id="{3C32EBE5-2C25-402A-A9B0-B10D0CCF0B2D}"/>
+              </a:ext>
+            </a:extLst>
+          </p:cNvPr>
+          <p:cNvCxnSpPr>
+            <a:cxnSpLocks/>
+            <a:stCxn id="32" idx="3"/>
+          </p:cNvCxnSpPr>
+          <p:nvPr/>
+        </p:nvCxnSpPr>
+        <p:spPr>
+          <a:xfrm flipV="1">
+            <a:off x="4533114" y="2812312"/>
+            <a:ext cx="443413" cy="241972"/>
+          </a:xfrm>
+          <a:prstGeom prst="straightConnector1">
+            <a:avLst/>
+          </a:prstGeom>
+          <a:ln w="19050">
+            <a:solidFill>
+              <a:srgbClr val="990099"/>
+            </a:solidFill>
+            <a:tailEnd type="triangle"/>
+          </a:ln>
+        </p:spPr>
+        <p:style>
+          <a:lnRef idx="1">
+            <a:schemeClr val="accent1"/>
+          </a:lnRef>
+          <a:fillRef idx="0">
+            <a:schemeClr val="accent1"/>
+          </a:fillRef>
+          <a:effectRef idx="0">
+            <a:schemeClr val="accent1"/>
+          </a:effectRef>
+          <a:fontRef idx="minor">
+            <a:schemeClr val="tx1"/>
+          </a:fontRef>
+        </p:style>
+      </p:cxnSp>
+      <p:cxnSp>
+        <p:nvCxnSpPr>
+          <p:cNvPr id="38" name="Straight Arrow Connector 37">
+            <a:extLst>
+              <a:ext uri="{FF2B5EF4-FFF2-40B4-BE49-F238E27FC236}">
+                <a16:creationId xmlns:a16="http://schemas.microsoft.com/office/drawing/2014/main" id="{FCB1C893-EDE2-424D-9196-750829709FCF}"/>
+              </a:ext>
+            </a:extLst>
+          </p:cNvPr>
+          <p:cNvCxnSpPr>
+            <a:cxnSpLocks/>
+            <a:stCxn id="32" idx="3"/>
+          </p:cNvCxnSpPr>
+          <p:nvPr/>
+        </p:nvCxnSpPr>
+        <p:spPr>
+          <a:xfrm>
+            <a:off x="4533114" y="3054285"/>
+            <a:ext cx="443413" cy="266826"/>
+          </a:xfrm>
+          <a:prstGeom prst="straightConnector1">
+            <a:avLst/>
+          </a:prstGeom>
+          <a:ln w="19050">
+            <a:solidFill>
+              <a:srgbClr val="990099"/>
+            </a:solidFill>
+            <a:tailEnd type="triangle"/>
+          </a:ln>
+        </p:spPr>
+        <p:style>
+          <a:lnRef idx="1">
+            <a:schemeClr val="accent1"/>
+          </a:lnRef>
+          <a:fillRef idx="0">
+            <a:schemeClr val="accent1"/>
+          </a:fillRef>
+          <a:effectRef idx="0">
+            <a:schemeClr val="accent1"/>
+          </a:effectRef>
+          <a:fontRef idx="minor">
+            <a:schemeClr val="tx1"/>
+          </a:fontRef>
+        </p:style>
+      </p:cxnSp>
+      <p:cxnSp>
+        <p:nvCxnSpPr>
+          <p:cNvPr id="39" name="Straight Arrow Connector 38">
+            <a:extLst>
+              <a:ext uri="{FF2B5EF4-FFF2-40B4-BE49-F238E27FC236}">
+                <a16:creationId xmlns:a16="http://schemas.microsoft.com/office/drawing/2014/main" id="{99A4A590-29D9-4381-AF50-D9FF0682C81D}"/>
+              </a:ext>
+            </a:extLst>
+          </p:cNvPr>
+          <p:cNvCxnSpPr>
+            <a:cxnSpLocks/>
+            <a:stCxn id="33" idx="3"/>
+            <a:endCxn id="47" idx="1"/>
+          </p:cNvCxnSpPr>
+          <p:nvPr/>
+        </p:nvCxnSpPr>
+        <p:spPr>
+          <a:xfrm>
+            <a:off x="6226139" y="2868579"/>
+            <a:ext cx="450359" cy="185706"/>
+          </a:xfrm>
+          <a:prstGeom prst="straightConnector1">
+            <a:avLst/>
+          </a:prstGeom>
+          <a:ln w="19050">
+            <a:solidFill>
+              <a:srgbClr val="990099"/>
+            </a:solidFill>
+            <a:tailEnd type="triangle"/>
+          </a:ln>
+        </p:spPr>
+        <p:style>
+          <a:lnRef idx="1">
+            <a:schemeClr val="accent1"/>
+          </a:lnRef>
+          <a:fillRef idx="0">
+            <a:schemeClr val="accent1"/>
+          </a:fillRef>
+          <a:effectRef idx="0">
+            <a:schemeClr val="accent1"/>
+          </a:effectRef>
+          <a:fontRef idx="minor">
+            <a:schemeClr val="tx1"/>
+          </a:fontRef>
+        </p:style>
+      </p:cxnSp>
+      <p:cxnSp>
+        <p:nvCxnSpPr>
+          <p:cNvPr id="40" name="Straight Arrow Connector 39">
+            <a:extLst>
+              <a:ext uri="{FF2B5EF4-FFF2-40B4-BE49-F238E27FC236}">
+                <a16:creationId xmlns:a16="http://schemas.microsoft.com/office/drawing/2014/main" id="{1152908B-3867-4478-ABC8-C0B32ABADFEB}"/>
+              </a:ext>
+            </a:extLst>
+          </p:cNvPr>
+          <p:cNvCxnSpPr>
+            <a:cxnSpLocks/>
+            <a:stCxn id="34" idx="3"/>
+            <a:endCxn id="47" idx="0"/>
+          </p:cNvCxnSpPr>
+          <p:nvPr/>
+        </p:nvCxnSpPr>
+        <p:spPr>
+          <a:xfrm>
+            <a:off x="6226139" y="2384135"/>
+            <a:ext cx="1194344" cy="528932"/>
+          </a:xfrm>
+          <a:prstGeom prst="straightConnector1">
+            <a:avLst/>
+          </a:prstGeom>
+          <a:ln w="19050">
+            <a:solidFill>
+              <a:srgbClr val="990099"/>
+            </a:solidFill>
+            <a:tailEnd type="triangle"/>
+          </a:ln>
+        </p:spPr>
+        <p:style>
+          <a:lnRef idx="1">
+            <a:schemeClr val="accent1"/>
+          </a:lnRef>
+          <a:fillRef idx="0">
+            <a:schemeClr val="accent1"/>
+          </a:fillRef>
+          <a:effectRef idx="0">
+            <a:schemeClr val="accent1"/>
+          </a:effectRef>
+          <a:fontRef idx="minor">
+            <a:schemeClr val="tx1"/>
+          </a:fontRef>
+        </p:style>
+      </p:cxnSp>
+      <p:cxnSp>
+        <p:nvCxnSpPr>
+          <p:cNvPr id="41" name="Straight Arrow Connector 40">
+            <a:extLst>
+              <a:ext uri="{FF2B5EF4-FFF2-40B4-BE49-F238E27FC236}">
+                <a16:creationId xmlns:a16="http://schemas.microsoft.com/office/drawing/2014/main" id="{86868C88-BA92-4318-AED9-F6695D8B481B}"/>
+              </a:ext>
+            </a:extLst>
+          </p:cNvPr>
+          <p:cNvCxnSpPr>
+            <a:cxnSpLocks/>
+            <a:stCxn id="35" idx="3"/>
+            <a:endCxn id="47" idx="1"/>
+          </p:cNvCxnSpPr>
+          <p:nvPr/>
+        </p:nvCxnSpPr>
+        <p:spPr>
+          <a:xfrm flipV="1">
+            <a:off x="6226139" y="3054285"/>
+            <a:ext cx="450359" cy="323092"/>
+          </a:xfrm>
+          <a:prstGeom prst="straightConnector1">
+            <a:avLst/>
+          </a:prstGeom>
+          <a:ln w="19050">
+            <a:solidFill>
+              <a:srgbClr val="990099"/>
+            </a:solidFill>
+            <a:tailEnd type="triangle"/>
+          </a:ln>
+        </p:spPr>
+        <p:style>
+          <a:lnRef idx="1">
+            <a:schemeClr val="accent1"/>
+          </a:lnRef>
+          <a:fillRef idx="0">
+            <a:schemeClr val="accent1"/>
+          </a:fillRef>
+          <a:effectRef idx="0">
+            <a:schemeClr val="accent1"/>
+          </a:effectRef>
+          <a:fontRef idx="minor">
+            <a:schemeClr val="tx1"/>
+          </a:fontRef>
+        </p:style>
+      </p:cxnSp>
+      <p:sp>
+        <p:nvSpPr>
+          <p:cNvPr id="42" name="Rectangle 41">
+            <a:extLst>
+              <a:ext uri="{FF2B5EF4-FFF2-40B4-BE49-F238E27FC236}">
+                <a16:creationId xmlns:a16="http://schemas.microsoft.com/office/drawing/2014/main" id="{F776193D-D886-40E3-8E08-2ABCC32C2D40}"/>
+              </a:ext>
+            </a:extLst>
+          </p:cNvPr>
+          <p:cNvSpPr/>
+          <p:nvPr/>
+        </p:nvSpPr>
+        <p:spPr>
+          <a:xfrm>
+            <a:off x="4935005" y="3645155"/>
+            <a:ext cx="1291134" cy="394972"/>
+          </a:xfrm>
+          <a:prstGeom prst="rect">
+            <a:avLst/>
+          </a:prstGeom>
+          <a:solidFill>
+            <a:schemeClr val="tx1">
+              <a:lumMod val="50000"/>
+              <a:lumOff val="50000"/>
+            </a:schemeClr>
+          </a:solidFill>
+        </p:spPr>
+        <p:style>
+          <a:lnRef idx="2">
+            <a:schemeClr val="accent1">
+              <a:shade val="50000"/>
+            </a:schemeClr>
+          </a:lnRef>
+          <a:fillRef idx="1">
+            <a:schemeClr val="accent1"/>
+          </a:fillRef>
+          <a:effectRef idx="0">
+            <a:schemeClr val="accent1"/>
+          </a:effectRef>
+          <a:fontRef idx="minor">
+            <a:schemeClr val="lt1"/>
+          </a:fontRef>
+        </p:style>
+        <p:txBody>
+          <a:bodyPr rtlCol="0" anchor="ctr"/>
+          <a:lstStyle/>
+          <a:p>
+            <a:pPr algn="ctr"/>
+            <a:r>
+              <a:rPr lang="en-GB" sz="1400" dirty="0" err="1"/>
+              <a:t>BiquadNode</a:t>
+            </a:r>
+            <a:endParaRPr lang="en-GB" sz="1400" dirty="0"/>
+          </a:p>
+          <a:p>
+            <a:pPr algn="ctr"/>
+            <a:r>
+              <a:rPr lang="en-GB" sz="1400" i="1" dirty="0" err="1"/>
+              <a:t>Highshelf</a:t>
+            </a:r>
+            <a:endParaRPr lang="en-GB" sz="1400" i="1" dirty="0"/>
+          </a:p>
+        </p:txBody>
+      </p:sp>
+      <p:cxnSp>
+        <p:nvCxnSpPr>
+          <p:cNvPr id="43" name="Straight Arrow Connector 42">
+            <a:extLst>
+              <a:ext uri="{FF2B5EF4-FFF2-40B4-BE49-F238E27FC236}">
+                <a16:creationId xmlns:a16="http://schemas.microsoft.com/office/drawing/2014/main" id="{7A122360-8862-4E08-B270-2C207B85E167}"/>
+              </a:ext>
+            </a:extLst>
+          </p:cNvPr>
+          <p:cNvCxnSpPr>
+            <a:cxnSpLocks/>
+            <a:stCxn id="32" idx="2"/>
+          </p:cNvCxnSpPr>
+          <p:nvPr/>
+        </p:nvCxnSpPr>
+        <p:spPr>
+          <a:xfrm>
+            <a:off x="3887546" y="3195502"/>
+            <a:ext cx="1088980" cy="590872"/>
+          </a:xfrm>
+          <a:prstGeom prst="straightConnector1">
+            <a:avLst/>
+          </a:prstGeom>
+          <a:ln w="19050">
+            <a:solidFill>
+              <a:srgbClr val="990099"/>
+            </a:solidFill>
+            <a:tailEnd type="triangle"/>
+          </a:ln>
+        </p:spPr>
+        <p:style>
+          <a:lnRef idx="1">
+            <a:schemeClr val="accent1"/>
+          </a:lnRef>
+          <a:fillRef idx="0">
+            <a:schemeClr val="accent1"/>
+          </a:fillRef>
+          <a:effectRef idx="0">
+            <a:schemeClr val="accent1"/>
+          </a:effectRef>
+          <a:fontRef idx="minor">
+            <a:schemeClr val="tx1"/>
+          </a:fontRef>
+        </p:style>
+      </p:cxnSp>
+      <p:cxnSp>
+        <p:nvCxnSpPr>
+          <p:cNvPr id="44" name="Straight Arrow Connector 43">
+            <a:extLst>
+              <a:ext uri="{FF2B5EF4-FFF2-40B4-BE49-F238E27FC236}">
+                <a16:creationId xmlns:a16="http://schemas.microsoft.com/office/drawing/2014/main" id="{8CF94B65-96EE-480A-8501-52CE10057356}"/>
+              </a:ext>
+            </a:extLst>
+          </p:cNvPr>
+          <p:cNvCxnSpPr>
+            <a:cxnSpLocks/>
+            <a:stCxn id="42" idx="3"/>
+            <a:endCxn id="47" idx="2"/>
+          </p:cNvCxnSpPr>
+          <p:nvPr/>
+        </p:nvCxnSpPr>
+        <p:spPr>
+          <a:xfrm flipV="1">
+            <a:off x="6226139" y="3195502"/>
+            <a:ext cx="1194344" cy="647139"/>
+          </a:xfrm>
+          <a:prstGeom prst="straightConnector1">
+            <a:avLst/>
+          </a:prstGeom>
+          <a:ln w="19050">
+            <a:solidFill>
+              <a:srgbClr val="990099"/>
+            </a:solidFill>
+            <a:tailEnd type="triangle"/>
+          </a:ln>
+        </p:spPr>
+        <p:style>
+          <a:lnRef idx="1">
+            <a:schemeClr val="accent1"/>
+          </a:lnRef>
+          <a:fillRef idx="0">
+            <a:schemeClr val="accent1"/>
+          </a:fillRef>
+          <a:effectRef idx="0">
+            <a:schemeClr val="accent1"/>
+          </a:effectRef>
+          <a:fontRef idx="minor">
+            <a:schemeClr val="tx1"/>
+          </a:fontRef>
+        </p:style>
+      </p:cxnSp>
+      <p:sp>
+        <p:nvSpPr>
+          <p:cNvPr id="45" name="Rectangle 44">
+            <a:extLst>
+              <a:ext uri="{FF2B5EF4-FFF2-40B4-BE49-F238E27FC236}">
+                <a16:creationId xmlns:a16="http://schemas.microsoft.com/office/drawing/2014/main" id="{910B863F-9F33-481A-AFD4-0307A3E555D5}"/>
+              </a:ext>
+            </a:extLst>
+          </p:cNvPr>
+          <p:cNvSpPr/>
+          <p:nvPr/>
+        </p:nvSpPr>
+        <p:spPr>
+          <a:xfrm>
+            <a:off x="1267042" y="2829146"/>
+            <a:ext cx="1643572" cy="464311"/>
+          </a:xfrm>
+          <a:prstGeom prst="rect">
+            <a:avLst/>
+          </a:prstGeom>
+          <a:solidFill>
+            <a:schemeClr val="tx1">
+              <a:lumMod val="50000"/>
+              <a:lumOff val="50000"/>
+            </a:schemeClr>
+          </a:solidFill>
+        </p:spPr>
+        <p:style>
+          <a:lnRef idx="2">
+            <a:schemeClr val="accent1">
+              <a:shade val="50000"/>
+            </a:schemeClr>
+          </a:lnRef>
+          <a:fillRef idx="1">
+            <a:schemeClr val="accent1"/>
+          </a:fillRef>
+          <a:effectRef idx="0">
+            <a:schemeClr val="accent1"/>
+          </a:effectRef>
+          <a:fontRef idx="minor">
+            <a:schemeClr val="lt1"/>
+          </a:fontRef>
+        </p:style>
+        <p:txBody>
+          <a:bodyPr rtlCol="0" anchor="ctr"/>
+          <a:lstStyle/>
+          <a:p>
+            <a:pPr algn="ctr"/>
+            <a:r>
+              <a:rPr lang="en-GB" sz="1400" dirty="0" err="1"/>
+              <a:t>audioWorkletNode</a:t>
+            </a:r>
+            <a:endParaRPr lang="en-GB" sz="1400" dirty="0"/>
+          </a:p>
+          <a:p>
+            <a:pPr algn="ctr"/>
+            <a:r>
+              <a:rPr lang="en-GB" sz="1400" i="1" dirty="0" err="1"/>
+              <a:t>whiteNoise</a:t>
+            </a:r>
+            <a:endParaRPr lang="en-GB" sz="1400" i="1" dirty="0"/>
+          </a:p>
+        </p:txBody>
+      </p:sp>
+      <p:cxnSp>
+        <p:nvCxnSpPr>
+          <p:cNvPr id="46" name="Straight Arrow Connector 45">
+            <a:extLst>
+              <a:ext uri="{FF2B5EF4-FFF2-40B4-BE49-F238E27FC236}">
+                <a16:creationId xmlns:a16="http://schemas.microsoft.com/office/drawing/2014/main" id="{0B364141-624E-4D3E-9EB0-5932EB012089}"/>
+              </a:ext>
+            </a:extLst>
+          </p:cNvPr>
+          <p:cNvCxnSpPr>
+            <a:cxnSpLocks/>
+            <a:stCxn id="45" idx="3"/>
+            <a:endCxn id="32" idx="1"/>
+          </p:cNvCxnSpPr>
+          <p:nvPr/>
+        </p:nvCxnSpPr>
+        <p:spPr>
+          <a:xfrm flipV="1">
+            <a:off x="2910614" y="3054285"/>
+            <a:ext cx="331366" cy="7017"/>
+          </a:xfrm>
+          <a:prstGeom prst="straightConnector1">
+            <a:avLst/>
+          </a:prstGeom>
+          <a:ln w="19050">
+            <a:solidFill>
+              <a:srgbClr val="990099"/>
+            </a:solidFill>
+            <a:tailEnd type="triangle"/>
+          </a:ln>
+        </p:spPr>
+        <p:style>
+          <a:lnRef idx="1">
+            <a:schemeClr val="accent1"/>
+          </a:lnRef>
+          <a:fillRef idx="0">
+            <a:schemeClr val="accent1"/>
+          </a:fillRef>
+          <a:effectRef idx="0">
+            <a:schemeClr val="accent1"/>
+          </a:effectRef>
+          <a:fontRef idx="minor">
+            <a:schemeClr val="tx1"/>
+          </a:fontRef>
+        </p:style>
+      </p:cxnSp>
+      <p:sp>
+        <p:nvSpPr>
+          <p:cNvPr id="47" name="Rectangle 46">
+            <a:extLst>
+              <a:ext uri="{FF2B5EF4-FFF2-40B4-BE49-F238E27FC236}">
+                <a16:creationId xmlns:a16="http://schemas.microsoft.com/office/drawing/2014/main" id="{C38311F9-B189-4B6A-8DF8-463E6E39901F}"/>
+              </a:ext>
+            </a:extLst>
+          </p:cNvPr>
+          <p:cNvSpPr/>
+          <p:nvPr/>
+        </p:nvSpPr>
+        <p:spPr>
+          <a:xfrm>
+            <a:off x="6676498" y="2913067"/>
+            <a:ext cx="1487970" cy="282435"/>
+          </a:xfrm>
+          <a:prstGeom prst="rect">
+            <a:avLst/>
+          </a:prstGeom>
+          <a:solidFill>
+            <a:schemeClr val="tx1">
+              <a:lumMod val="50000"/>
+              <a:lumOff val="50000"/>
+            </a:schemeClr>
+          </a:solidFill>
+        </p:spPr>
+        <p:style>
+          <a:lnRef idx="2">
+            <a:schemeClr val="accent1">
+              <a:shade val="50000"/>
+            </a:schemeClr>
+          </a:lnRef>
+          <a:fillRef idx="1">
+            <a:schemeClr val="accent1"/>
+          </a:fillRef>
+          <a:effectRef idx="0">
+            <a:schemeClr val="accent1"/>
+          </a:effectRef>
+          <a:fontRef idx="minor">
+            <a:schemeClr val="lt1"/>
+          </a:fontRef>
+        </p:style>
+        <p:txBody>
+          <a:bodyPr rtlCol="0" anchor="ctr"/>
+          <a:lstStyle/>
+          <a:p>
+            <a:pPr algn="ctr"/>
+            <a:r>
+              <a:rPr lang="en-GB" sz="1400" dirty="0" err="1"/>
+              <a:t>waveshaperNode</a:t>
+            </a:r>
+            <a:endParaRPr lang="en-GB" sz="1400" dirty="0"/>
+          </a:p>
+        </p:txBody>
+      </p:sp>
+      <p:sp>
+        <p:nvSpPr>
+          <p:cNvPr id="48" name="Rectangle 47">
+            <a:extLst>
+              <a:ext uri="{FF2B5EF4-FFF2-40B4-BE49-F238E27FC236}">
+                <a16:creationId xmlns:a16="http://schemas.microsoft.com/office/drawing/2014/main" id="{8377EF9B-A4C6-43E6-B49C-AD78CF5A2731}"/>
+              </a:ext>
+            </a:extLst>
+          </p:cNvPr>
+          <p:cNvSpPr/>
+          <p:nvPr/>
+        </p:nvSpPr>
+        <p:spPr>
+          <a:xfrm>
+            <a:off x="10073877" y="2913067"/>
+            <a:ext cx="1119088" cy="282435"/>
+          </a:xfrm>
+          <a:prstGeom prst="rect">
+            <a:avLst/>
+          </a:prstGeom>
+          <a:solidFill>
+            <a:schemeClr val="tx1">
+              <a:lumMod val="50000"/>
+              <a:lumOff val="50000"/>
+            </a:schemeClr>
+          </a:solidFill>
+        </p:spPr>
+        <p:style>
+          <a:lnRef idx="2">
+            <a:schemeClr val="accent1">
+              <a:shade val="50000"/>
+            </a:schemeClr>
+          </a:lnRef>
+          <a:fillRef idx="1">
+            <a:schemeClr val="accent1"/>
+          </a:fillRef>
+          <a:effectRef idx="0">
+            <a:schemeClr val="accent1"/>
+          </a:effectRef>
+          <a:fontRef idx="minor">
+            <a:schemeClr val="lt1"/>
+          </a:fontRef>
+        </p:style>
+        <p:txBody>
+          <a:bodyPr rtlCol="0" anchor="ctr"/>
+          <a:lstStyle/>
+          <a:p>
+            <a:pPr algn="ctr"/>
+            <a:r>
+              <a:rPr lang="en-GB" sz="1400" dirty="0"/>
+              <a:t>destination</a:t>
+            </a:r>
+          </a:p>
+        </p:txBody>
+      </p:sp>
+      <p:cxnSp>
+        <p:nvCxnSpPr>
+          <p:cNvPr id="49" name="Straight Arrow Connector 48">
+            <a:extLst>
+              <a:ext uri="{FF2B5EF4-FFF2-40B4-BE49-F238E27FC236}">
+                <a16:creationId xmlns:a16="http://schemas.microsoft.com/office/drawing/2014/main" id="{C1AB5411-DF01-43B9-B074-0971C8D908AD}"/>
+              </a:ext>
+            </a:extLst>
+          </p:cNvPr>
+          <p:cNvCxnSpPr>
+            <a:cxnSpLocks/>
+            <a:endCxn id="48" idx="1"/>
+          </p:cNvCxnSpPr>
+          <p:nvPr/>
+        </p:nvCxnSpPr>
+        <p:spPr>
+          <a:xfrm>
+            <a:off x="9746520" y="3054284"/>
+            <a:ext cx="327358" cy="1"/>
+          </a:xfrm>
+          <a:prstGeom prst="straightConnector1">
+            <a:avLst/>
+          </a:prstGeom>
+          <a:ln w="19050">
+            <a:solidFill>
+              <a:srgbClr val="990099"/>
+            </a:solidFill>
+            <a:tailEnd type="triangle"/>
+          </a:ln>
+        </p:spPr>
+        <p:style>
+          <a:lnRef idx="1">
+            <a:schemeClr val="accent1"/>
+          </a:lnRef>
+          <a:fillRef idx="0">
+            <a:schemeClr val="accent1"/>
+          </a:fillRef>
+          <a:effectRef idx="0">
+            <a:schemeClr val="accent1"/>
+          </a:effectRef>
+          <a:fontRef idx="minor">
+            <a:schemeClr val="tx1"/>
+          </a:fontRef>
+        </p:style>
+      </p:cxnSp>
+      <p:sp>
+        <p:nvSpPr>
+          <p:cNvPr id="50" name="Rectangle 49">
+            <a:extLst>
+              <a:ext uri="{FF2B5EF4-FFF2-40B4-BE49-F238E27FC236}">
+                <a16:creationId xmlns:a16="http://schemas.microsoft.com/office/drawing/2014/main" id="{60C7ADDE-E7D7-4D83-8A06-38E6F1AB7891}"/>
+              </a:ext>
+            </a:extLst>
+          </p:cNvPr>
+          <p:cNvSpPr/>
+          <p:nvPr/>
+        </p:nvSpPr>
+        <p:spPr>
+          <a:xfrm>
+            <a:off x="8465581" y="2915981"/>
+            <a:ext cx="1360781" cy="282435"/>
+          </a:xfrm>
+          <a:prstGeom prst="rect">
+            <a:avLst/>
+          </a:prstGeom>
+          <a:solidFill>
+            <a:schemeClr val="tx1">
+              <a:lumMod val="50000"/>
+              <a:lumOff val="50000"/>
+            </a:schemeClr>
+          </a:solidFill>
+        </p:spPr>
+        <p:style>
+          <a:lnRef idx="2">
+            <a:schemeClr val="accent1">
+              <a:shade val="50000"/>
+            </a:schemeClr>
+          </a:lnRef>
+          <a:fillRef idx="1">
+            <a:schemeClr val="accent1"/>
+          </a:fillRef>
+          <a:effectRef idx="0">
+            <a:schemeClr val="accent1"/>
+          </a:effectRef>
+          <a:fontRef idx="minor">
+            <a:schemeClr val="lt1"/>
+          </a:fontRef>
+        </p:style>
+        <p:txBody>
+          <a:bodyPr rtlCol="0" anchor="ctr"/>
+          <a:lstStyle/>
+          <a:p>
+            <a:pPr algn="ctr"/>
+            <a:r>
+              <a:rPr lang="en-GB" sz="1400" dirty="0" err="1"/>
+              <a:t>convolverNode</a:t>
+            </a:r>
+            <a:endParaRPr lang="en-GB" sz="1400" dirty="0"/>
+          </a:p>
+        </p:txBody>
+      </p:sp>
+      <p:cxnSp>
+        <p:nvCxnSpPr>
+          <p:cNvPr id="51" name="Straight Arrow Connector 50">
+            <a:extLst>
+              <a:ext uri="{FF2B5EF4-FFF2-40B4-BE49-F238E27FC236}">
+                <a16:creationId xmlns:a16="http://schemas.microsoft.com/office/drawing/2014/main" id="{22D89999-F377-4474-BDBA-4FC40984B6B0}"/>
+              </a:ext>
+            </a:extLst>
+          </p:cNvPr>
+          <p:cNvCxnSpPr>
+            <a:cxnSpLocks/>
+            <a:endCxn id="50" idx="1"/>
+          </p:cNvCxnSpPr>
+          <p:nvPr/>
+        </p:nvCxnSpPr>
+        <p:spPr>
+          <a:xfrm>
+            <a:off x="8083687" y="3057198"/>
+            <a:ext cx="381894" cy="1"/>
+          </a:xfrm>
+          <a:prstGeom prst="straightConnector1">
+            <a:avLst/>
+          </a:prstGeom>
+          <a:ln w="19050">
+            <a:solidFill>
+              <a:srgbClr val="990099"/>
+            </a:solidFill>
+            <a:tailEnd type="triangle"/>
+          </a:ln>
+        </p:spPr>
+        <p:style>
+          <a:lnRef idx="1">
+            <a:schemeClr val="accent1"/>
+          </a:lnRef>
+          <a:fillRef idx="0">
+            <a:schemeClr val="accent1"/>
+          </a:fillRef>
+          <a:effectRef idx="0">
+            <a:schemeClr val="accent1"/>
+          </a:effectRef>
+          <a:fontRef idx="minor">
+            <a:schemeClr val="tx1"/>
+          </a:fontRef>
+        </p:style>
+      </p:cxnSp>
+      <p:sp>
+        <p:nvSpPr>
+          <p:cNvPr id="52" name="Rectangle 51">
+            <a:extLst>
+              <a:ext uri="{FF2B5EF4-FFF2-40B4-BE49-F238E27FC236}">
+                <a16:creationId xmlns:a16="http://schemas.microsoft.com/office/drawing/2014/main" id="{639F975E-1AA5-448B-A01A-B302641D9F99}"/>
+              </a:ext>
+            </a:extLst>
+          </p:cNvPr>
+          <p:cNvSpPr/>
+          <p:nvPr/>
+        </p:nvSpPr>
+        <p:spPr>
+          <a:xfrm>
+            <a:off x="2636600" y="3728640"/>
+            <a:ext cx="1895180" cy="282435"/>
+          </a:xfrm>
+          <a:prstGeom prst="rect">
+            <a:avLst/>
+          </a:prstGeom>
+          <a:solidFill>
+            <a:srgbClr val="800080"/>
+          </a:solidFill>
+        </p:spPr>
+        <p:style>
+          <a:lnRef idx="2">
+            <a:schemeClr val="accent1">
+              <a:shade val="50000"/>
+            </a:schemeClr>
+          </a:lnRef>
+          <a:fillRef idx="1">
+            <a:schemeClr val="accent1"/>
+          </a:fillRef>
+          <a:effectRef idx="0">
+            <a:schemeClr val="accent1"/>
+          </a:effectRef>
+          <a:fontRef idx="minor">
+            <a:schemeClr val="lt1"/>
+          </a:fontRef>
+        </p:style>
+        <p:txBody>
+          <a:bodyPr rtlCol="0" anchor="ctr"/>
+          <a:lstStyle/>
+          <a:p>
+            <a:pPr algn="ctr"/>
+            <a:r>
+              <a:rPr lang="en-GB" sz="1400" dirty="0" err="1"/>
+              <a:t>setValueCurveAtTime</a:t>
+            </a:r>
+            <a:endParaRPr lang="en-GB" sz="1400" dirty="0"/>
+          </a:p>
+        </p:txBody>
+      </p:sp>
+      <p:sp>
+        <p:nvSpPr>
+          <p:cNvPr id="53" name="Rectangle 52">
+            <a:extLst>
+              <a:ext uri="{FF2B5EF4-FFF2-40B4-BE49-F238E27FC236}">
+                <a16:creationId xmlns:a16="http://schemas.microsoft.com/office/drawing/2014/main" id="{69D963B6-2441-4DC4-BB47-48CFCC409577}"/>
+              </a:ext>
+            </a:extLst>
+          </p:cNvPr>
+          <p:cNvSpPr/>
+          <p:nvPr/>
+        </p:nvSpPr>
+        <p:spPr>
+          <a:xfrm>
+            <a:off x="7203838" y="3634917"/>
+            <a:ext cx="987430" cy="282435"/>
+          </a:xfrm>
+          <a:prstGeom prst="rect">
+            <a:avLst/>
+          </a:prstGeom>
+          <a:solidFill>
+            <a:srgbClr val="800080"/>
+          </a:solidFill>
+        </p:spPr>
+        <p:style>
+          <a:lnRef idx="2">
+            <a:schemeClr val="accent1">
+              <a:shade val="50000"/>
+            </a:schemeClr>
+          </a:lnRef>
+          <a:fillRef idx="1">
+            <a:schemeClr val="accent1"/>
+          </a:fillRef>
+          <a:effectRef idx="0">
+            <a:schemeClr val="accent1"/>
+          </a:effectRef>
+          <a:fontRef idx="minor">
+            <a:schemeClr val="lt1"/>
+          </a:fontRef>
+        </p:style>
+        <p:txBody>
+          <a:bodyPr rtlCol="0" anchor="ctr"/>
+          <a:lstStyle/>
+          <a:p>
+            <a:pPr algn="ctr"/>
+            <a:r>
+              <a:rPr lang="en-GB" sz="1400" dirty="0"/>
+              <a:t>curve</a:t>
+            </a:r>
+          </a:p>
+        </p:txBody>
+      </p:sp>
+      <p:cxnSp>
+        <p:nvCxnSpPr>
+          <p:cNvPr id="54" name="Straight Arrow Connector 53">
+            <a:extLst>
+              <a:ext uri="{FF2B5EF4-FFF2-40B4-BE49-F238E27FC236}">
+                <a16:creationId xmlns:a16="http://schemas.microsoft.com/office/drawing/2014/main" id="{37CCE4A0-DAC6-450B-997B-BB91DB29446C}"/>
+              </a:ext>
+            </a:extLst>
+          </p:cNvPr>
+          <p:cNvCxnSpPr>
+            <a:cxnSpLocks/>
+            <a:stCxn id="53" idx="0"/>
+          </p:cNvCxnSpPr>
+          <p:nvPr/>
+        </p:nvCxnSpPr>
+        <p:spPr>
+          <a:xfrm flipV="1">
+            <a:off x="7697553" y="3191292"/>
+            <a:ext cx="0" cy="443625"/>
+          </a:xfrm>
+          <a:prstGeom prst="straightConnector1">
+            <a:avLst/>
+          </a:prstGeom>
+          <a:ln w="19050">
+            <a:tailEnd type="triangle"/>
+          </a:ln>
+        </p:spPr>
+        <p:style>
+          <a:lnRef idx="1">
+            <a:schemeClr val="accent1"/>
+          </a:lnRef>
+          <a:fillRef idx="0">
+            <a:schemeClr val="accent1"/>
+          </a:fillRef>
+          <a:effectRef idx="0">
+            <a:schemeClr val="accent1"/>
+          </a:effectRef>
+          <a:fontRef idx="minor">
+            <a:schemeClr val="tx1"/>
+          </a:fontRef>
+        </p:style>
+      </p:cxnSp>
+      <p:cxnSp>
+        <p:nvCxnSpPr>
+          <p:cNvPr id="55" name="Straight Arrow Connector 54">
+            <a:extLst>
+              <a:ext uri="{FF2B5EF4-FFF2-40B4-BE49-F238E27FC236}">
+                <a16:creationId xmlns:a16="http://schemas.microsoft.com/office/drawing/2014/main" id="{3DF3E151-29E0-436A-98FC-DC83BA5DE730}"/>
+              </a:ext>
+            </a:extLst>
+          </p:cNvPr>
+          <p:cNvCxnSpPr>
+            <a:cxnSpLocks/>
+            <a:stCxn id="52" idx="0"/>
+          </p:cNvCxnSpPr>
+          <p:nvPr/>
+        </p:nvCxnSpPr>
+        <p:spPr>
+          <a:xfrm flipV="1">
+            <a:off x="3584190" y="3179891"/>
+            <a:ext cx="0" cy="548749"/>
+          </a:xfrm>
+          <a:prstGeom prst="straightConnector1">
+            <a:avLst/>
+          </a:prstGeom>
+          <a:ln w="19050">
+            <a:solidFill>
+              <a:srgbClr val="990099"/>
+            </a:solidFill>
+            <a:tailEnd type="triangle"/>
+          </a:ln>
+        </p:spPr>
+        <p:style>
+          <a:lnRef idx="1">
+            <a:schemeClr val="accent1"/>
+          </a:lnRef>
+          <a:fillRef idx="0">
+            <a:schemeClr val="accent1"/>
+          </a:fillRef>
+          <a:effectRef idx="0">
+            <a:schemeClr val="accent1"/>
+          </a:effectRef>
+          <a:fontRef idx="minor">
+            <a:schemeClr val="tx1"/>
+          </a:fontRef>
+        </p:style>
+      </p:cxnSp>
+      <p:sp>
+        <p:nvSpPr>
+          <p:cNvPr id="56" name="Rectangle 55">
+            <a:extLst>
+              <a:ext uri="{FF2B5EF4-FFF2-40B4-BE49-F238E27FC236}">
+                <a16:creationId xmlns:a16="http://schemas.microsoft.com/office/drawing/2014/main" id="{7BD10476-3A92-407A-84B4-B34B1C6860D1}"/>
+              </a:ext>
+            </a:extLst>
+          </p:cNvPr>
+          <p:cNvSpPr/>
+          <p:nvPr/>
+        </p:nvSpPr>
+        <p:spPr>
+          <a:xfrm>
+            <a:off x="8654164" y="3645155"/>
+            <a:ext cx="987430" cy="282435"/>
+          </a:xfrm>
+          <a:prstGeom prst="rect">
+            <a:avLst/>
+          </a:prstGeom>
+          <a:solidFill>
+            <a:srgbClr val="800080"/>
+          </a:solidFill>
+        </p:spPr>
+        <p:style>
+          <a:lnRef idx="2">
+            <a:schemeClr val="accent1">
+              <a:shade val="50000"/>
+            </a:schemeClr>
+          </a:lnRef>
+          <a:fillRef idx="1">
+            <a:schemeClr val="accent1"/>
+          </a:fillRef>
+          <a:effectRef idx="0">
+            <a:schemeClr val="accent1"/>
+          </a:effectRef>
+          <a:fontRef idx="minor">
+            <a:schemeClr val="lt1"/>
+          </a:fontRef>
+        </p:style>
+        <p:txBody>
+          <a:bodyPr rtlCol="0" anchor="ctr"/>
+          <a:lstStyle/>
+          <a:p>
+            <a:pPr algn="ctr"/>
+            <a:r>
+              <a:rPr lang="en-GB" sz="1400" dirty="0"/>
+              <a:t>buffer</a:t>
+            </a:r>
+          </a:p>
+        </p:txBody>
+      </p:sp>
+      <p:cxnSp>
+        <p:nvCxnSpPr>
+          <p:cNvPr id="57" name="Straight Arrow Connector 56">
+            <a:extLst>
+              <a:ext uri="{FF2B5EF4-FFF2-40B4-BE49-F238E27FC236}">
+                <a16:creationId xmlns:a16="http://schemas.microsoft.com/office/drawing/2014/main" id="{EAB4EB93-C8CD-4B1C-81E0-F61152C671D7}"/>
+              </a:ext>
+            </a:extLst>
+          </p:cNvPr>
+          <p:cNvCxnSpPr>
+            <a:cxnSpLocks/>
+            <a:stCxn id="56" idx="0"/>
+            <a:endCxn id="50" idx="2"/>
+          </p:cNvCxnSpPr>
+          <p:nvPr/>
+        </p:nvCxnSpPr>
+        <p:spPr>
+          <a:xfrm flipH="1" flipV="1">
+            <a:off x="9145972" y="3198416"/>
+            <a:ext cx="1907" cy="446739"/>
+          </a:xfrm>
+          <a:prstGeom prst="straightConnector1">
+            <a:avLst/>
+          </a:prstGeom>
+          <a:ln w="19050">
+            <a:solidFill>
+              <a:srgbClr val="990099"/>
+            </a:solidFill>
+            <a:tailEnd type="triangle"/>
+          </a:ln>
+        </p:spPr>
+        <p:style>
+          <a:lnRef idx="1">
+            <a:schemeClr val="accent1"/>
+          </a:lnRef>
+          <a:fillRef idx="0">
+            <a:schemeClr val="accent1"/>
+          </a:fillRef>
+          <a:effectRef idx="0">
+            <a:schemeClr val="accent1"/>
+          </a:effectRef>
+          <a:fontRef idx="minor">
+            <a:schemeClr val="tx1"/>
+          </a:fontRef>
+        </p:style>
+      </p:cxnSp>
+    </p:spTree>
+    <p:extLst>
+      <p:ext uri="{BB962C8B-B14F-4D97-AF65-F5344CB8AC3E}">
+        <p14:creationId xmlns:p14="http://schemas.microsoft.com/office/powerpoint/2010/main" val="23973663"/>
+      </p:ext>
+    </p:extLst>
+  </p:cSld>
+  <p:clrMapOvr>
+    <a:masterClrMapping/>
+  </p:clrMapOvr>
+</p:sld>
+</file>
+
+<file path=ppt/slides/slide12.xml><?xml version="1.0" encoding="utf-8"?>
+<p:sld xmlns:a="http://schemas.openxmlformats.org/drawingml/2006/main" xmlns:r="http://schemas.openxmlformats.org/officeDocument/2006/relationships" xmlns:p="http://schemas.openxmlformats.org/presentationml/2006/main">
+  <p:cSld>
+    <p:spTree>
+      <p:nvGrpSpPr>
+        <p:cNvPr id="1" name=""/>
+        <p:cNvGrpSpPr/>
+        <p:nvPr/>
+      </p:nvGrpSpPr>
+      <p:grpSpPr>
+        <a:xfrm>
+          <a:off x="0" y="0"/>
+          <a:ext cx="0" cy="0"/>
+          <a:chOff x="0" y="0"/>
+          <a:chExt cx="0" cy="0"/>
+        </a:xfrm>
+      </p:grpSpPr>
+      <p:sp>
+        <p:nvSpPr>
+          <p:cNvPr id="2" name="Title 1">
+            <a:extLst>
+              <a:ext uri="{FF2B5EF4-FFF2-40B4-BE49-F238E27FC236}">
+                <a16:creationId xmlns:a16="http://schemas.microsoft.com/office/drawing/2014/main" id="{CA15A9C7-17CC-4176-A591-2D8582D8ED04}"/>
+              </a:ext>
+            </a:extLst>
+          </p:cNvPr>
+          <p:cNvSpPr>
+            <a:spLocks noGrp="1"/>
+          </p:cNvSpPr>
+          <p:nvPr>
+            <p:ph type="title"/>
+          </p:nvPr>
+        </p:nvSpPr>
+        <p:spPr>
+          <a:xfrm>
+            <a:off x="838200" y="365126"/>
+            <a:ext cx="10474628" cy="636580"/>
+          </a:xfrm>
+        </p:spPr>
+        <p:txBody>
+          <a:bodyPr>
+            <a:normAutofit fontScale="90000"/>
+          </a:bodyPr>
+          <a:lstStyle/>
+          <a:p>
+            <a:r>
+              <a:rPr lang="en-GB" dirty="0"/>
               <a:t>Figure 10.1</a:t>
             </a:r>
           </a:p>
@@ -10587,7 +12966,7 @@
 </p:sld>
 </file>
 
-<file path=ppt/slides/slide12.xml><?xml version="1.0" encoding="utf-8"?>
+<file path=ppt/slides/slide13.xml><?xml version="1.0" encoding="utf-8"?>
 <p:sld xmlns:a="http://schemas.openxmlformats.org/drawingml/2006/main" xmlns:r="http://schemas.openxmlformats.org/officeDocument/2006/relationships" xmlns:p="http://schemas.openxmlformats.org/presentationml/2006/main">
   <p:cSld>
     <p:spTree>
@@ -11216,7 +13595,7 @@
 </p:sld>
 </file>
 
-<file path=ppt/slides/slide13.xml><?xml version="1.0" encoding="utf-8"?>
+<file path=ppt/slides/slide14.xml><?xml version="1.0" encoding="utf-8"?>
 <p:sld xmlns:a="http://schemas.openxmlformats.org/drawingml/2006/main" xmlns:r="http://schemas.openxmlformats.org/officeDocument/2006/relationships" xmlns:p="http://schemas.openxmlformats.org/presentationml/2006/main">
   <p:cSld>
     <p:spTree>
@@ -11952,7 +14331,7 @@
 </p:sld>
 </file>
 
-<file path=ppt/slides/slide14.xml><?xml version="1.0" encoding="utf-8"?>
+<file path=ppt/slides/slide15.xml><?xml version="1.0" encoding="utf-8"?>
 <p:sld xmlns:a="http://schemas.openxmlformats.org/drawingml/2006/main" xmlns:r="http://schemas.openxmlformats.org/officeDocument/2006/relationships" xmlns:p="http://schemas.openxmlformats.org/presentationml/2006/main">
   <p:cSld>
     <p:spTree>
@@ -13460,7 +15839,7 @@
 </p:sld>
 </file>
 
-<file path=ppt/slides/slide15.xml><?xml version="1.0" encoding="utf-8"?>
+<file path=ppt/slides/slide16.xml><?xml version="1.0" encoding="utf-8"?>
 <p:sld xmlns:a="http://schemas.openxmlformats.org/drawingml/2006/main" xmlns:r="http://schemas.openxmlformats.org/officeDocument/2006/relationships" xmlns:p="http://schemas.openxmlformats.org/presentationml/2006/main">
   <p:cSld>
     <p:spTree>
@@ -14466,7 +16845,7 @@
 </p:sld>
 </file>
 
-<file path=ppt/slides/slide16.xml><?xml version="1.0" encoding="utf-8"?>
+<file path=ppt/slides/slide17.xml><?xml version="1.0" encoding="utf-8"?>
 <p:sld xmlns:a="http://schemas.openxmlformats.org/drawingml/2006/main" xmlns:r="http://schemas.openxmlformats.org/officeDocument/2006/relationships" xmlns:p="http://schemas.openxmlformats.org/presentationml/2006/main">
   <p:cSld>
     <p:spTree>
@@ -23209,6 +25588,989 @@
         <p:cNvPr id="1" name="">
           <a:extLst>
             <a:ext uri="{FF2B5EF4-FFF2-40B4-BE49-F238E27FC236}">
+              <a16:creationId xmlns:a16="http://schemas.microsoft.com/office/drawing/2014/main" id="{926CBE72-7A3B-7615-3C65-8FBCFFF0D90C}"/>
+            </a:ext>
+          </a:extLst>
+        </p:cNvPr>
+        <p:cNvGrpSpPr/>
+        <p:nvPr/>
+      </p:nvGrpSpPr>
+      <p:grpSpPr>
+        <a:xfrm>
+          <a:off x="0" y="0"/>
+          <a:ext cx="0" cy="0"/>
+          <a:chOff x="0" y="0"/>
+          <a:chExt cx="0" cy="0"/>
+        </a:xfrm>
+      </p:grpSpPr>
+      <p:sp>
+        <p:nvSpPr>
+          <p:cNvPr id="4" name="Title 3">
+            <a:extLst>
+              <a:ext uri="{FF2B5EF4-FFF2-40B4-BE49-F238E27FC236}">
+                <a16:creationId xmlns:a16="http://schemas.microsoft.com/office/drawing/2014/main" id="{8E3700C4-F680-0CFD-3A37-CCFD09512E77}"/>
+              </a:ext>
+            </a:extLst>
+          </p:cNvPr>
+          <p:cNvSpPr>
+            <a:spLocks noGrp="1"/>
+          </p:cNvSpPr>
+          <p:nvPr>
+            <p:ph type="title"/>
+          </p:nvPr>
+        </p:nvSpPr>
+        <p:spPr/>
+        <p:txBody>
+          <a:bodyPr/>
+          <a:lstStyle/>
+          <a:p>
+            <a:r>
+              <a:rPr lang="en-US" dirty="0"/>
+              <a:t>Guitar pluck</a:t>
+            </a:r>
+            <a:endParaRPr lang="en-GB" dirty="0"/>
+          </a:p>
+        </p:txBody>
+      </p:sp>
+      <p:sp>
+        <p:nvSpPr>
+          <p:cNvPr id="6" name="Rectangle 5">
+            <a:extLst>
+              <a:ext uri="{FF2B5EF4-FFF2-40B4-BE49-F238E27FC236}">
+                <a16:creationId xmlns:a16="http://schemas.microsoft.com/office/drawing/2014/main" id="{3ECFCF52-676B-4BC8-43B1-DE52E70F6EDF}"/>
+              </a:ext>
+            </a:extLst>
+          </p:cNvPr>
+          <p:cNvSpPr/>
+          <p:nvPr/>
+        </p:nvSpPr>
+        <p:spPr>
+          <a:xfrm>
+            <a:off x="582750" y="2070454"/>
+            <a:ext cx="1116000" cy="648000"/>
+          </a:xfrm>
+          <a:prstGeom prst="rect">
+            <a:avLst/>
+          </a:prstGeom>
+          <a:solidFill>
+            <a:srgbClr val="7030A0"/>
+          </a:solidFill>
+        </p:spPr>
+        <p:style>
+          <a:lnRef idx="2">
+            <a:schemeClr val="accent1">
+              <a:shade val="50000"/>
+            </a:schemeClr>
+          </a:lnRef>
+          <a:fillRef idx="1">
+            <a:schemeClr val="accent1"/>
+          </a:fillRef>
+          <a:effectRef idx="0">
+            <a:schemeClr val="accent1"/>
+          </a:effectRef>
+          <a:fontRef idx="minor">
+            <a:schemeClr val="lt1"/>
+          </a:fontRef>
+        </p:style>
+        <p:txBody>
+          <a:bodyPr rtlCol="0" anchor="ctr"/>
+          <a:lstStyle/>
+          <a:p>
+            <a:pPr algn="ctr"/>
+            <a:r>
+              <a:rPr lang="en-GB" dirty="0"/>
+              <a:t>Noise</a:t>
+            </a:r>
+          </a:p>
+        </p:txBody>
+      </p:sp>
+      <p:sp>
+        <p:nvSpPr>
+          <p:cNvPr id="7" name="Rectangle 6">
+            <a:extLst>
+              <a:ext uri="{FF2B5EF4-FFF2-40B4-BE49-F238E27FC236}">
+                <a16:creationId xmlns:a16="http://schemas.microsoft.com/office/drawing/2014/main" id="{F5709A0A-0C51-2037-B5C7-30313B545A6B}"/>
+              </a:ext>
+            </a:extLst>
+          </p:cNvPr>
+          <p:cNvSpPr/>
+          <p:nvPr/>
+        </p:nvSpPr>
+        <p:spPr>
+          <a:xfrm>
+            <a:off x="2188346" y="2070454"/>
+            <a:ext cx="1116000" cy="648000"/>
+          </a:xfrm>
+          <a:prstGeom prst="rect">
+            <a:avLst/>
+          </a:prstGeom>
+          <a:solidFill>
+            <a:srgbClr val="7030A0"/>
+          </a:solidFill>
+        </p:spPr>
+        <p:style>
+          <a:lnRef idx="2">
+            <a:schemeClr val="accent1">
+              <a:shade val="50000"/>
+            </a:schemeClr>
+          </a:lnRef>
+          <a:fillRef idx="1">
+            <a:schemeClr val="accent1"/>
+          </a:fillRef>
+          <a:effectRef idx="0">
+            <a:schemeClr val="accent1"/>
+          </a:effectRef>
+          <a:fontRef idx="minor">
+            <a:schemeClr val="lt1"/>
+          </a:fontRef>
+        </p:style>
+        <p:txBody>
+          <a:bodyPr rtlCol="0" anchor="ctr"/>
+          <a:lstStyle/>
+          <a:p>
+            <a:pPr algn="ctr"/>
+            <a:r>
+              <a:rPr lang="en-GB" dirty="0"/>
+              <a:t>Noise</a:t>
+            </a:r>
+          </a:p>
+          <a:p>
+            <a:pPr algn="ctr"/>
+            <a:r>
+              <a:rPr lang="en-GB" dirty="0"/>
+              <a:t>Gain</a:t>
+            </a:r>
+          </a:p>
+        </p:txBody>
+      </p:sp>
+      <p:cxnSp>
+        <p:nvCxnSpPr>
+          <p:cNvPr id="11" name="Straight Arrow Connector 10">
+            <a:extLst>
+              <a:ext uri="{FF2B5EF4-FFF2-40B4-BE49-F238E27FC236}">
+                <a16:creationId xmlns:a16="http://schemas.microsoft.com/office/drawing/2014/main" id="{80E2B021-9A3D-CBD1-B00A-9B6159142B7E}"/>
+              </a:ext>
+            </a:extLst>
+          </p:cNvPr>
+          <p:cNvCxnSpPr>
+            <a:cxnSpLocks/>
+            <a:stCxn id="6" idx="3"/>
+            <a:endCxn id="7" idx="1"/>
+          </p:cNvCxnSpPr>
+          <p:nvPr/>
+        </p:nvCxnSpPr>
+        <p:spPr>
+          <a:xfrm>
+            <a:off x="1698750" y="2394454"/>
+            <a:ext cx="489596" cy="0"/>
+          </a:xfrm>
+          <a:prstGeom prst="straightConnector1">
+            <a:avLst/>
+          </a:prstGeom>
+          <a:ln w="31750">
+            <a:solidFill>
+              <a:schemeClr val="tx1"/>
+            </a:solidFill>
+            <a:tailEnd type="arrow" w="lg" len="lg"/>
+          </a:ln>
+        </p:spPr>
+        <p:style>
+          <a:lnRef idx="1">
+            <a:schemeClr val="accent1"/>
+          </a:lnRef>
+          <a:fillRef idx="0">
+            <a:schemeClr val="accent1"/>
+          </a:fillRef>
+          <a:effectRef idx="0">
+            <a:schemeClr val="accent1"/>
+          </a:effectRef>
+          <a:fontRef idx="minor">
+            <a:schemeClr val="tx1"/>
+          </a:fontRef>
+        </p:style>
+      </p:cxnSp>
+      <p:cxnSp>
+        <p:nvCxnSpPr>
+          <p:cNvPr id="12" name="Straight Arrow Connector 11">
+            <a:extLst>
+              <a:ext uri="{FF2B5EF4-FFF2-40B4-BE49-F238E27FC236}">
+                <a16:creationId xmlns:a16="http://schemas.microsoft.com/office/drawing/2014/main" id="{AD7B58CB-077F-5014-23F6-761331B0B083}"/>
+              </a:ext>
+            </a:extLst>
+          </p:cNvPr>
+          <p:cNvCxnSpPr>
+            <a:cxnSpLocks/>
+            <a:stCxn id="7" idx="3"/>
+            <a:endCxn id="22" idx="1"/>
+          </p:cNvCxnSpPr>
+          <p:nvPr/>
+        </p:nvCxnSpPr>
+        <p:spPr>
+          <a:xfrm>
+            <a:off x="3304346" y="2394454"/>
+            <a:ext cx="579624" cy="667666"/>
+          </a:xfrm>
+          <a:prstGeom prst="straightConnector1">
+            <a:avLst/>
+          </a:prstGeom>
+          <a:ln w="31750">
+            <a:solidFill>
+              <a:schemeClr val="tx1"/>
+            </a:solidFill>
+            <a:tailEnd type="arrow" w="lg" len="lg"/>
+          </a:ln>
+        </p:spPr>
+        <p:style>
+          <a:lnRef idx="1">
+            <a:schemeClr val="accent1"/>
+          </a:lnRef>
+          <a:fillRef idx="0">
+            <a:schemeClr val="accent1"/>
+          </a:fillRef>
+          <a:effectRef idx="0">
+            <a:schemeClr val="accent1"/>
+          </a:effectRef>
+          <a:fontRef idx="minor">
+            <a:schemeClr val="tx1"/>
+          </a:fontRef>
+        </p:style>
+      </p:cxnSp>
+      <p:sp>
+        <p:nvSpPr>
+          <p:cNvPr id="18" name="Rectangle 17">
+            <a:extLst>
+              <a:ext uri="{FF2B5EF4-FFF2-40B4-BE49-F238E27FC236}">
+                <a16:creationId xmlns:a16="http://schemas.microsoft.com/office/drawing/2014/main" id="{C9404B45-4BBC-7B9D-F5FD-3157251BDDC3}"/>
+              </a:ext>
+            </a:extLst>
+          </p:cNvPr>
+          <p:cNvSpPr/>
+          <p:nvPr/>
+        </p:nvSpPr>
+        <p:spPr>
+          <a:xfrm>
+            <a:off x="582750" y="3357226"/>
+            <a:ext cx="1116000" cy="648000"/>
+          </a:xfrm>
+          <a:prstGeom prst="rect">
+            <a:avLst/>
+          </a:prstGeom>
+          <a:solidFill>
+            <a:srgbClr val="7030A0"/>
+          </a:solidFill>
+        </p:spPr>
+        <p:style>
+          <a:lnRef idx="2">
+            <a:schemeClr val="accent1">
+              <a:shade val="50000"/>
+            </a:schemeClr>
+          </a:lnRef>
+          <a:fillRef idx="1">
+            <a:schemeClr val="accent1"/>
+          </a:fillRef>
+          <a:effectRef idx="0">
+            <a:schemeClr val="accent1"/>
+          </a:effectRef>
+          <a:fontRef idx="minor">
+            <a:schemeClr val="lt1"/>
+          </a:fontRef>
+        </p:style>
+        <p:txBody>
+          <a:bodyPr rtlCol="0" anchor="ctr"/>
+          <a:lstStyle/>
+          <a:p>
+            <a:pPr algn="ctr"/>
+            <a:r>
+              <a:rPr lang="en-US" dirty="0"/>
+              <a:t>C</a:t>
+            </a:r>
+            <a:r>
+              <a:rPr lang="en-GB" dirty="0" err="1"/>
+              <a:t>haracter</a:t>
+            </a:r>
+            <a:r>
+              <a:rPr lang="en-GB" dirty="0"/>
+              <a:t>	</a:t>
+            </a:r>
+          </a:p>
+        </p:txBody>
+      </p:sp>
+      <p:sp>
+        <p:nvSpPr>
+          <p:cNvPr id="19" name="Rectangle 18">
+            <a:extLst>
+              <a:ext uri="{FF2B5EF4-FFF2-40B4-BE49-F238E27FC236}">
+                <a16:creationId xmlns:a16="http://schemas.microsoft.com/office/drawing/2014/main" id="{ED721FA1-59E0-7278-6D9D-C8BC602CB42E}"/>
+              </a:ext>
+            </a:extLst>
+          </p:cNvPr>
+          <p:cNvSpPr/>
+          <p:nvPr/>
+        </p:nvSpPr>
+        <p:spPr>
+          <a:xfrm>
+            <a:off x="2188346" y="3357226"/>
+            <a:ext cx="1116000" cy="648000"/>
+          </a:xfrm>
+          <a:prstGeom prst="rect">
+            <a:avLst/>
+          </a:prstGeom>
+          <a:solidFill>
+            <a:srgbClr val="7030A0"/>
+          </a:solidFill>
+        </p:spPr>
+        <p:style>
+          <a:lnRef idx="2">
+            <a:schemeClr val="accent1">
+              <a:shade val="50000"/>
+            </a:schemeClr>
+          </a:lnRef>
+          <a:fillRef idx="1">
+            <a:schemeClr val="accent1"/>
+          </a:fillRef>
+          <a:effectRef idx="0">
+            <a:schemeClr val="accent1"/>
+          </a:effectRef>
+          <a:fontRef idx="minor">
+            <a:schemeClr val="lt1"/>
+          </a:fontRef>
+        </p:style>
+        <p:txBody>
+          <a:bodyPr rtlCol="0" anchor="ctr"/>
+          <a:lstStyle/>
+          <a:p>
+            <a:pPr algn="ctr"/>
+            <a:r>
+              <a:rPr lang="en-GB" dirty="0"/>
+              <a:t>Character</a:t>
+            </a:r>
+          </a:p>
+          <a:p>
+            <a:pPr algn="ctr"/>
+            <a:r>
+              <a:rPr lang="en-GB" dirty="0"/>
+              <a:t>Gain</a:t>
+            </a:r>
+          </a:p>
+        </p:txBody>
+      </p:sp>
+      <p:cxnSp>
+        <p:nvCxnSpPr>
+          <p:cNvPr id="20" name="Straight Arrow Connector 19">
+            <a:extLst>
+              <a:ext uri="{FF2B5EF4-FFF2-40B4-BE49-F238E27FC236}">
+                <a16:creationId xmlns:a16="http://schemas.microsoft.com/office/drawing/2014/main" id="{195DA94A-73B9-8F1E-A7D7-0B0C11DB1564}"/>
+              </a:ext>
+            </a:extLst>
+          </p:cNvPr>
+          <p:cNvCxnSpPr>
+            <a:cxnSpLocks/>
+            <a:stCxn id="18" idx="3"/>
+            <a:endCxn id="19" idx="1"/>
+          </p:cNvCxnSpPr>
+          <p:nvPr/>
+        </p:nvCxnSpPr>
+        <p:spPr>
+          <a:xfrm>
+            <a:off x="1698750" y="3681226"/>
+            <a:ext cx="489596" cy="0"/>
+          </a:xfrm>
+          <a:prstGeom prst="straightConnector1">
+            <a:avLst/>
+          </a:prstGeom>
+          <a:ln w="31750">
+            <a:solidFill>
+              <a:schemeClr val="tx1"/>
+            </a:solidFill>
+            <a:tailEnd type="arrow" w="lg" len="lg"/>
+          </a:ln>
+        </p:spPr>
+        <p:style>
+          <a:lnRef idx="1">
+            <a:schemeClr val="accent1"/>
+          </a:lnRef>
+          <a:fillRef idx="0">
+            <a:schemeClr val="accent1"/>
+          </a:fillRef>
+          <a:effectRef idx="0">
+            <a:schemeClr val="accent1"/>
+          </a:effectRef>
+          <a:fontRef idx="minor">
+            <a:schemeClr val="tx1"/>
+          </a:fontRef>
+        </p:style>
+      </p:cxnSp>
+      <p:cxnSp>
+        <p:nvCxnSpPr>
+          <p:cNvPr id="21" name="Straight Arrow Connector 20">
+            <a:extLst>
+              <a:ext uri="{FF2B5EF4-FFF2-40B4-BE49-F238E27FC236}">
+                <a16:creationId xmlns:a16="http://schemas.microsoft.com/office/drawing/2014/main" id="{13A20D8A-8C45-D1FB-4545-9BC5F19A3D82}"/>
+              </a:ext>
+            </a:extLst>
+          </p:cNvPr>
+          <p:cNvCxnSpPr>
+            <a:cxnSpLocks/>
+            <a:stCxn id="19" idx="3"/>
+            <a:endCxn id="22" idx="1"/>
+          </p:cNvCxnSpPr>
+          <p:nvPr/>
+        </p:nvCxnSpPr>
+        <p:spPr>
+          <a:xfrm flipV="1">
+            <a:off x="3304346" y="3062120"/>
+            <a:ext cx="579624" cy="619106"/>
+          </a:xfrm>
+          <a:prstGeom prst="straightConnector1">
+            <a:avLst/>
+          </a:prstGeom>
+          <a:ln w="31750">
+            <a:solidFill>
+              <a:schemeClr val="tx1"/>
+            </a:solidFill>
+            <a:tailEnd type="arrow" w="lg" len="lg"/>
+          </a:ln>
+        </p:spPr>
+        <p:style>
+          <a:lnRef idx="1">
+            <a:schemeClr val="accent1"/>
+          </a:lnRef>
+          <a:fillRef idx="0">
+            <a:schemeClr val="accent1"/>
+          </a:fillRef>
+          <a:effectRef idx="0">
+            <a:schemeClr val="accent1"/>
+          </a:effectRef>
+          <a:fontRef idx="minor">
+            <a:schemeClr val="tx1"/>
+          </a:fontRef>
+        </p:style>
+      </p:cxnSp>
+      <p:sp>
+        <p:nvSpPr>
+          <p:cNvPr id="22" name="Rectangle 21">
+            <a:extLst>
+              <a:ext uri="{FF2B5EF4-FFF2-40B4-BE49-F238E27FC236}">
+                <a16:creationId xmlns:a16="http://schemas.microsoft.com/office/drawing/2014/main" id="{A8D53F85-1D7C-FAB8-F5F3-2C620063B6B2}"/>
+              </a:ext>
+            </a:extLst>
+          </p:cNvPr>
+          <p:cNvSpPr/>
+          <p:nvPr/>
+        </p:nvSpPr>
+        <p:spPr>
+          <a:xfrm>
+            <a:off x="3883970" y="2738120"/>
+            <a:ext cx="972000" cy="648000"/>
+          </a:xfrm>
+          <a:prstGeom prst="rect">
+            <a:avLst/>
+          </a:prstGeom>
+          <a:solidFill>
+            <a:srgbClr val="7030A0"/>
+          </a:solidFill>
+        </p:spPr>
+        <p:style>
+          <a:lnRef idx="2">
+            <a:schemeClr val="accent1">
+              <a:shade val="50000"/>
+            </a:schemeClr>
+          </a:lnRef>
+          <a:fillRef idx="1">
+            <a:schemeClr val="accent1"/>
+          </a:fillRef>
+          <a:effectRef idx="0">
+            <a:schemeClr val="accent1"/>
+          </a:effectRef>
+          <a:fontRef idx="minor">
+            <a:schemeClr val="lt1"/>
+          </a:fontRef>
+        </p:style>
+        <p:txBody>
+          <a:bodyPr rtlCol="0" anchor="ctr"/>
+          <a:lstStyle/>
+          <a:p>
+            <a:pPr algn="ctr"/>
+            <a:r>
+              <a:rPr lang="en-GB" dirty="0"/>
+              <a:t>Pluck</a:t>
+            </a:r>
+          </a:p>
+          <a:p>
+            <a:pPr algn="ctr"/>
+            <a:r>
+              <a:rPr lang="en-GB" dirty="0"/>
+              <a:t>Damper</a:t>
+            </a:r>
+          </a:p>
+        </p:txBody>
+      </p:sp>
+      <p:sp>
+        <p:nvSpPr>
+          <p:cNvPr id="23" name="Rectangle 22">
+            <a:extLst>
+              <a:ext uri="{FF2B5EF4-FFF2-40B4-BE49-F238E27FC236}">
+                <a16:creationId xmlns:a16="http://schemas.microsoft.com/office/drawing/2014/main" id="{98A40771-A9B0-9FFE-A985-E8389160220A}"/>
+              </a:ext>
+            </a:extLst>
+          </p:cNvPr>
+          <p:cNvSpPr/>
+          <p:nvPr/>
+        </p:nvSpPr>
+        <p:spPr>
+          <a:xfrm>
+            <a:off x="5372294" y="2734162"/>
+            <a:ext cx="828000" cy="648000"/>
+          </a:xfrm>
+          <a:prstGeom prst="rect">
+            <a:avLst/>
+          </a:prstGeom>
+          <a:solidFill>
+            <a:srgbClr val="7030A0"/>
+          </a:solidFill>
+        </p:spPr>
+        <p:style>
+          <a:lnRef idx="2">
+            <a:schemeClr val="accent1">
+              <a:shade val="50000"/>
+            </a:schemeClr>
+          </a:lnRef>
+          <a:fillRef idx="1">
+            <a:schemeClr val="accent1"/>
+          </a:fillRef>
+          <a:effectRef idx="0">
+            <a:schemeClr val="accent1"/>
+          </a:effectRef>
+          <a:fontRef idx="minor">
+            <a:schemeClr val="lt1"/>
+          </a:fontRef>
+        </p:style>
+        <p:txBody>
+          <a:bodyPr rtlCol="0" anchor="ctr"/>
+          <a:lstStyle/>
+          <a:p>
+            <a:pPr algn="ctr"/>
+            <a:r>
+              <a:rPr lang="en-GB" dirty="0"/>
+              <a:t>Input</a:t>
+            </a:r>
+          </a:p>
+        </p:txBody>
+      </p:sp>
+      <p:sp>
+        <p:nvSpPr>
+          <p:cNvPr id="24" name="Rectangle 23">
+            <a:extLst>
+              <a:ext uri="{FF2B5EF4-FFF2-40B4-BE49-F238E27FC236}">
+                <a16:creationId xmlns:a16="http://schemas.microsoft.com/office/drawing/2014/main" id="{338EB1A2-6315-FFB0-B726-CD2B7129DBD9}"/>
+              </a:ext>
+            </a:extLst>
+          </p:cNvPr>
+          <p:cNvSpPr/>
+          <p:nvPr/>
+        </p:nvSpPr>
+        <p:spPr>
+          <a:xfrm>
+            <a:off x="8589631" y="2743312"/>
+            <a:ext cx="900000" cy="648000"/>
+          </a:xfrm>
+          <a:prstGeom prst="rect">
+            <a:avLst/>
+          </a:prstGeom>
+          <a:solidFill>
+            <a:srgbClr val="7030A0"/>
+          </a:solidFill>
+        </p:spPr>
+        <p:style>
+          <a:lnRef idx="2">
+            <a:schemeClr val="accent1">
+              <a:shade val="50000"/>
+            </a:schemeClr>
+          </a:lnRef>
+          <a:fillRef idx="1">
+            <a:schemeClr val="accent1"/>
+          </a:fillRef>
+          <a:effectRef idx="0">
+            <a:schemeClr val="accent1"/>
+          </a:effectRef>
+          <a:fontRef idx="minor">
+            <a:schemeClr val="lt1"/>
+          </a:fontRef>
+        </p:style>
+        <p:txBody>
+          <a:bodyPr rtlCol="0" anchor="ctr"/>
+          <a:lstStyle/>
+          <a:p>
+            <a:pPr algn="ctr"/>
+            <a:r>
+              <a:rPr lang="en-GB" dirty="0"/>
+              <a:t>Output</a:t>
+            </a:r>
+          </a:p>
+        </p:txBody>
+      </p:sp>
+      <p:sp>
+        <p:nvSpPr>
+          <p:cNvPr id="25" name="Rectangle 24">
+            <a:extLst>
+              <a:ext uri="{FF2B5EF4-FFF2-40B4-BE49-F238E27FC236}">
+                <a16:creationId xmlns:a16="http://schemas.microsoft.com/office/drawing/2014/main" id="{17297845-6383-5A2E-34E7-0F39930007E7}"/>
+              </a:ext>
+            </a:extLst>
+          </p:cNvPr>
+          <p:cNvSpPr/>
+          <p:nvPr/>
+        </p:nvSpPr>
+        <p:spPr>
+          <a:xfrm>
+            <a:off x="6988709" y="1974349"/>
+            <a:ext cx="1080000" cy="648000"/>
+          </a:xfrm>
+          <a:prstGeom prst="rect">
+            <a:avLst/>
+          </a:prstGeom>
+          <a:solidFill>
+            <a:srgbClr val="7030A0"/>
+          </a:solidFill>
+        </p:spPr>
+        <p:style>
+          <a:lnRef idx="2">
+            <a:schemeClr val="accent1">
+              <a:shade val="50000"/>
+            </a:schemeClr>
+          </a:lnRef>
+          <a:fillRef idx="1">
+            <a:schemeClr val="accent1"/>
+          </a:fillRef>
+          <a:effectRef idx="0">
+            <a:schemeClr val="accent1"/>
+          </a:effectRef>
+          <a:fontRef idx="minor">
+            <a:schemeClr val="lt1"/>
+          </a:fontRef>
+        </p:style>
+        <p:txBody>
+          <a:bodyPr rtlCol="0" anchor="ctr"/>
+          <a:lstStyle/>
+          <a:p>
+            <a:pPr algn="ctr"/>
+            <a:r>
+              <a:rPr lang="en-GB" dirty="0"/>
+              <a:t>Feedback</a:t>
+            </a:r>
+          </a:p>
+          <a:p>
+            <a:pPr algn="ctr"/>
+            <a:r>
+              <a:rPr lang="en-GB" dirty="0"/>
+              <a:t>Delay</a:t>
+            </a:r>
+          </a:p>
+        </p:txBody>
+      </p:sp>
+      <p:sp>
+        <p:nvSpPr>
+          <p:cNvPr id="29" name="Rectangle 28">
+            <a:extLst>
+              <a:ext uri="{FF2B5EF4-FFF2-40B4-BE49-F238E27FC236}">
+                <a16:creationId xmlns:a16="http://schemas.microsoft.com/office/drawing/2014/main" id="{EA7753CE-83E1-BD72-AFB8-0DC6A5610C08}"/>
+              </a:ext>
+            </a:extLst>
+          </p:cNvPr>
+          <p:cNvSpPr/>
+          <p:nvPr/>
+        </p:nvSpPr>
+        <p:spPr>
+          <a:xfrm>
+            <a:off x="10063613" y="2743312"/>
+            <a:ext cx="1260000" cy="648000"/>
+          </a:xfrm>
+          <a:prstGeom prst="rect">
+            <a:avLst/>
+          </a:prstGeom>
+          <a:solidFill>
+            <a:srgbClr val="7030A0"/>
+          </a:solidFill>
+        </p:spPr>
+        <p:style>
+          <a:lnRef idx="2">
+            <a:schemeClr val="accent1">
+              <a:shade val="50000"/>
+            </a:schemeClr>
+          </a:lnRef>
+          <a:fillRef idx="1">
+            <a:schemeClr val="accent1"/>
+          </a:fillRef>
+          <a:effectRef idx="0">
+            <a:schemeClr val="accent1"/>
+          </a:effectRef>
+          <a:fontRef idx="minor">
+            <a:schemeClr val="lt1"/>
+          </a:fontRef>
+        </p:style>
+        <p:txBody>
+          <a:bodyPr rtlCol="0" anchor="ctr"/>
+          <a:lstStyle/>
+          <a:p>
+            <a:pPr algn="ctr"/>
+            <a:r>
+              <a:rPr lang="en-GB" dirty="0"/>
+              <a:t>destination</a:t>
+            </a:r>
+          </a:p>
+        </p:txBody>
+      </p:sp>
+      <p:cxnSp>
+        <p:nvCxnSpPr>
+          <p:cNvPr id="34" name="Straight Arrow Connector 33">
+            <a:extLst>
+              <a:ext uri="{FF2B5EF4-FFF2-40B4-BE49-F238E27FC236}">
+                <a16:creationId xmlns:a16="http://schemas.microsoft.com/office/drawing/2014/main" id="{FAEB404C-8CF6-CDB9-CEA5-4C2206BA2D4D}"/>
+              </a:ext>
+            </a:extLst>
+          </p:cNvPr>
+          <p:cNvCxnSpPr>
+            <a:cxnSpLocks/>
+            <a:stCxn id="24" idx="3"/>
+            <a:endCxn id="29" idx="1"/>
+          </p:cNvCxnSpPr>
+          <p:nvPr/>
+        </p:nvCxnSpPr>
+        <p:spPr>
+          <a:xfrm>
+            <a:off x="9489631" y="3067312"/>
+            <a:ext cx="573982" cy="0"/>
+          </a:xfrm>
+          <a:prstGeom prst="straightConnector1">
+            <a:avLst/>
+          </a:prstGeom>
+          <a:ln w="31750">
+            <a:solidFill>
+              <a:schemeClr val="tx1"/>
+            </a:solidFill>
+            <a:tailEnd type="arrow" w="lg" len="lg"/>
+          </a:ln>
+        </p:spPr>
+        <p:style>
+          <a:lnRef idx="1">
+            <a:schemeClr val="accent1"/>
+          </a:lnRef>
+          <a:fillRef idx="0">
+            <a:schemeClr val="accent1"/>
+          </a:fillRef>
+          <a:effectRef idx="0">
+            <a:schemeClr val="accent1"/>
+          </a:effectRef>
+          <a:fontRef idx="minor">
+            <a:schemeClr val="tx1"/>
+          </a:fontRef>
+        </p:style>
+      </p:cxnSp>
+      <p:cxnSp>
+        <p:nvCxnSpPr>
+          <p:cNvPr id="37" name="Straight Arrow Connector 36">
+            <a:extLst>
+              <a:ext uri="{FF2B5EF4-FFF2-40B4-BE49-F238E27FC236}">
+                <a16:creationId xmlns:a16="http://schemas.microsoft.com/office/drawing/2014/main" id="{26667E17-6FBC-EEB6-9A94-4D22E518CD5C}"/>
+              </a:ext>
+            </a:extLst>
+          </p:cNvPr>
+          <p:cNvCxnSpPr>
+            <a:cxnSpLocks/>
+            <a:stCxn id="22" idx="3"/>
+            <a:endCxn id="23" idx="1"/>
+          </p:cNvCxnSpPr>
+          <p:nvPr/>
+        </p:nvCxnSpPr>
+        <p:spPr>
+          <a:xfrm flipV="1">
+            <a:off x="4855970" y="3058162"/>
+            <a:ext cx="516324" cy="3958"/>
+          </a:xfrm>
+          <a:prstGeom prst="straightConnector1">
+            <a:avLst/>
+          </a:prstGeom>
+          <a:ln w="31750">
+            <a:solidFill>
+              <a:schemeClr val="tx1"/>
+            </a:solidFill>
+            <a:tailEnd type="arrow" w="lg" len="lg"/>
+          </a:ln>
+        </p:spPr>
+        <p:style>
+          <a:lnRef idx="1">
+            <a:schemeClr val="accent1"/>
+          </a:lnRef>
+          <a:fillRef idx="0">
+            <a:schemeClr val="accent1"/>
+          </a:fillRef>
+          <a:effectRef idx="0">
+            <a:schemeClr val="accent1"/>
+          </a:effectRef>
+          <a:fontRef idx="minor">
+            <a:schemeClr val="tx1"/>
+          </a:fontRef>
+        </p:style>
+      </p:cxnSp>
+      <p:cxnSp>
+        <p:nvCxnSpPr>
+          <p:cNvPr id="40" name="Straight Arrow Connector 39">
+            <a:extLst>
+              <a:ext uri="{FF2B5EF4-FFF2-40B4-BE49-F238E27FC236}">
+                <a16:creationId xmlns:a16="http://schemas.microsoft.com/office/drawing/2014/main" id="{4403F563-2933-6F30-3505-8DA96E4DEF98}"/>
+              </a:ext>
+            </a:extLst>
+          </p:cNvPr>
+          <p:cNvCxnSpPr>
+            <a:cxnSpLocks/>
+            <a:stCxn id="25" idx="3"/>
+            <a:endCxn id="24" idx="1"/>
+          </p:cNvCxnSpPr>
+          <p:nvPr/>
+        </p:nvCxnSpPr>
+        <p:spPr>
+          <a:xfrm>
+            <a:off x="8068709" y="2298349"/>
+            <a:ext cx="520922" cy="768963"/>
+          </a:xfrm>
+          <a:prstGeom prst="straightConnector1">
+            <a:avLst/>
+          </a:prstGeom>
+          <a:ln w="31750">
+            <a:solidFill>
+              <a:schemeClr val="tx1"/>
+            </a:solidFill>
+            <a:tailEnd type="arrow" w="lg" len="lg"/>
+          </a:ln>
+        </p:spPr>
+        <p:style>
+          <a:lnRef idx="1">
+            <a:schemeClr val="accent1"/>
+          </a:lnRef>
+          <a:fillRef idx="0">
+            <a:schemeClr val="accent1"/>
+          </a:fillRef>
+          <a:effectRef idx="0">
+            <a:schemeClr val="accent1"/>
+          </a:effectRef>
+          <a:fontRef idx="minor">
+            <a:schemeClr val="tx1"/>
+          </a:fontRef>
+        </p:style>
+      </p:cxnSp>
+      <p:cxnSp>
+        <p:nvCxnSpPr>
+          <p:cNvPr id="43" name="Straight Arrow Connector 42">
+            <a:extLst>
+              <a:ext uri="{FF2B5EF4-FFF2-40B4-BE49-F238E27FC236}">
+                <a16:creationId xmlns:a16="http://schemas.microsoft.com/office/drawing/2014/main" id="{B90B7AF5-1B28-A0A9-DDA7-4F170CCC9824}"/>
+              </a:ext>
+            </a:extLst>
+          </p:cNvPr>
+          <p:cNvCxnSpPr>
+            <a:cxnSpLocks/>
+            <a:stCxn id="23" idx="3"/>
+            <a:endCxn id="25" idx="1"/>
+          </p:cNvCxnSpPr>
+          <p:nvPr/>
+        </p:nvCxnSpPr>
+        <p:spPr>
+          <a:xfrm flipV="1">
+            <a:off x="6200294" y="2298349"/>
+            <a:ext cx="788415" cy="759813"/>
+          </a:xfrm>
+          <a:prstGeom prst="straightConnector1">
+            <a:avLst/>
+          </a:prstGeom>
+          <a:ln w="31750">
+            <a:solidFill>
+              <a:schemeClr val="tx1"/>
+            </a:solidFill>
+            <a:tailEnd type="arrow" w="lg" len="lg"/>
+          </a:ln>
+        </p:spPr>
+        <p:style>
+          <a:lnRef idx="1">
+            <a:schemeClr val="accent1"/>
+          </a:lnRef>
+          <a:fillRef idx="0">
+            <a:schemeClr val="accent1"/>
+          </a:fillRef>
+          <a:effectRef idx="0">
+            <a:schemeClr val="accent1"/>
+          </a:effectRef>
+          <a:fontRef idx="minor">
+            <a:schemeClr val="tx1"/>
+          </a:fontRef>
+        </p:style>
+      </p:cxnSp>
+      <p:cxnSp>
+        <p:nvCxnSpPr>
+          <p:cNvPr id="46" name="Straight Arrow Connector 45">
+            <a:extLst>
+              <a:ext uri="{FF2B5EF4-FFF2-40B4-BE49-F238E27FC236}">
+                <a16:creationId xmlns:a16="http://schemas.microsoft.com/office/drawing/2014/main" id="{C24F2816-8D1B-FCC6-12E5-0A18BE9196F3}"/>
+              </a:ext>
+            </a:extLst>
+          </p:cNvPr>
+          <p:cNvCxnSpPr>
+            <a:cxnSpLocks/>
+            <a:stCxn id="23" idx="3"/>
+            <a:endCxn id="24" idx="1"/>
+          </p:cNvCxnSpPr>
+          <p:nvPr/>
+        </p:nvCxnSpPr>
+        <p:spPr>
+          <a:xfrm>
+            <a:off x="6200294" y="3058162"/>
+            <a:ext cx="2389337" cy="9150"/>
+          </a:xfrm>
+          <a:prstGeom prst="straightConnector1">
+            <a:avLst/>
+          </a:prstGeom>
+          <a:ln w="31750">
+            <a:solidFill>
+              <a:schemeClr val="tx1"/>
+            </a:solidFill>
+            <a:tailEnd type="arrow" w="lg" len="lg"/>
+          </a:ln>
+        </p:spPr>
+        <p:style>
+          <a:lnRef idx="1">
+            <a:schemeClr val="accent1"/>
+          </a:lnRef>
+          <a:fillRef idx="0">
+            <a:schemeClr val="accent1"/>
+          </a:fillRef>
+          <a:effectRef idx="0">
+            <a:schemeClr val="accent1"/>
+          </a:effectRef>
+          <a:fontRef idx="minor">
+            <a:schemeClr val="tx1"/>
+          </a:fontRef>
+        </p:style>
+      </p:cxnSp>
+    </p:spTree>
+    <p:extLst>
+      <p:ext uri="{BB962C8B-B14F-4D97-AF65-F5344CB8AC3E}">
+        <p14:creationId xmlns:p14="http://schemas.microsoft.com/office/powerpoint/2010/main" val="2618786155"/>
+      </p:ext>
+    </p:extLst>
+  </p:cSld>
+  <p:clrMapOvr>
+    <a:masterClrMapping/>
+  </p:clrMapOvr>
+</p:sld>
+</file>
+
+<file path=ppt/slides/slide3.xml><?xml version="1.0" encoding="utf-8"?>
+<p:sld xmlns:a="http://schemas.openxmlformats.org/drawingml/2006/main" xmlns:r="http://schemas.openxmlformats.org/officeDocument/2006/relationships" xmlns:p="http://schemas.openxmlformats.org/presentationml/2006/main">
+  <p:cSld>
+    <p:spTree>
+      <p:nvGrpSpPr>
+        <p:cNvPr id="1" name="">
+          <a:extLst>
+            <a:ext uri="{FF2B5EF4-FFF2-40B4-BE49-F238E27FC236}">
               <a16:creationId xmlns:a16="http://schemas.microsoft.com/office/drawing/2014/main" id="{846B0D6E-B1BC-349A-BBFC-0959A3ECA2E0}"/>
             </a:ext>
           </a:extLst>
@@ -24545,7 +27907,7 @@
 </p:sld>
 </file>
 
-<file path=ppt/slides/slide3.xml><?xml version="1.0" encoding="utf-8"?>
+<file path=ppt/slides/slide4.xml><?xml version="1.0" encoding="utf-8"?>
 <p:sld xmlns:a="http://schemas.openxmlformats.org/drawingml/2006/main" xmlns:r="http://schemas.openxmlformats.org/officeDocument/2006/relationships" xmlns:p="http://schemas.openxmlformats.org/presentationml/2006/main">
   <p:cSld>
     <p:spTree>
@@ -25281,7 +28643,7 @@
 </p:sld>
 </file>
 
-<file path=ppt/slides/slide4.xml><?xml version="1.0" encoding="utf-8"?>
+<file path=ppt/slides/slide5.xml><?xml version="1.0" encoding="utf-8"?>
 <p:sld xmlns:a="http://schemas.openxmlformats.org/drawingml/2006/main" xmlns:r="http://schemas.openxmlformats.org/officeDocument/2006/relationships" xmlns:p="http://schemas.openxmlformats.org/presentationml/2006/main">
   <p:cSld>
     <p:spTree>
@@ -26275,7 +29637,7 @@
 </p:sld>
 </file>
 
-<file path=ppt/slides/slide5.xml><?xml version="1.0" encoding="utf-8"?>
+<file path=ppt/slides/slide6.xml><?xml version="1.0" encoding="utf-8"?>
 <p:sld xmlns:a="http://schemas.openxmlformats.org/drawingml/2006/main" xmlns:r="http://schemas.openxmlformats.org/officeDocument/2006/relationships" xmlns:p="http://schemas.openxmlformats.org/presentationml/2006/main">
   <p:cSld>
     <p:spTree>
@@ -27256,7 +30618,7 @@
 </p:sld>
 </file>
 
-<file path=ppt/slides/slide6.xml><?xml version="1.0" encoding="utf-8"?>
+<file path=ppt/slides/slide7.xml><?xml version="1.0" encoding="utf-8"?>
 <p:sld xmlns:a="http://schemas.openxmlformats.org/drawingml/2006/main" xmlns:r="http://schemas.openxmlformats.org/officeDocument/2006/relationships" xmlns:p="http://schemas.openxmlformats.org/presentationml/2006/main">
   <p:cSld>
     <p:spTree>
@@ -29482,7 +32844,7 @@
 </p:sld>
 </file>
 
-<file path=ppt/slides/slide7.xml><?xml version="1.0" encoding="utf-8"?>
+<file path=ppt/slides/slide8.xml><?xml version="1.0" encoding="utf-8"?>
 <p:sld xmlns:a="http://schemas.openxmlformats.org/drawingml/2006/main" xmlns:r="http://schemas.openxmlformats.org/officeDocument/2006/relationships" xmlns:p="http://schemas.openxmlformats.org/presentationml/2006/main">
   <p:cSld>
     <p:spTree>
@@ -31274,7 +34636,7 @@
 </p:sld>
 </file>
 
-<file path=ppt/slides/slide8.xml><?xml version="1.0" encoding="utf-8"?>
+<file path=ppt/slides/slide9.xml><?xml version="1.0" encoding="utf-8"?>
 <p:sld xmlns:a="http://schemas.openxmlformats.org/drawingml/2006/main" xmlns:r="http://schemas.openxmlformats.org/officeDocument/2006/relationships" xmlns:p="http://schemas.openxmlformats.org/presentationml/2006/main">
   <p:cSld>
     <p:spTree>
@@ -32495,1387 +35857,6 @@
     <p:extLst>
       <p:ext uri="{BB962C8B-B14F-4D97-AF65-F5344CB8AC3E}">
         <p14:creationId xmlns:p14="http://schemas.microsoft.com/office/powerpoint/2010/main" val="2410624631"/>
-      </p:ext>
-    </p:extLst>
-  </p:cSld>
-  <p:clrMapOvr>
-    <a:masterClrMapping/>
-  </p:clrMapOvr>
-</p:sld>
-</file>
-
-<file path=ppt/slides/slide9.xml><?xml version="1.0" encoding="utf-8"?>
-<p:sld xmlns:a="http://schemas.openxmlformats.org/drawingml/2006/main" xmlns:r="http://schemas.openxmlformats.org/officeDocument/2006/relationships" xmlns:p="http://schemas.openxmlformats.org/presentationml/2006/main">
-  <p:cSld>
-    <p:spTree>
-      <p:nvGrpSpPr>
-        <p:cNvPr id="1" name="">
-          <a:extLst>
-            <a:ext uri="{FF2B5EF4-FFF2-40B4-BE49-F238E27FC236}">
-              <a16:creationId xmlns:a16="http://schemas.microsoft.com/office/drawing/2014/main" id="{D73B9F21-9062-7418-2625-6FCA8C5BAD04}"/>
-            </a:ext>
-          </a:extLst>
-        </p:cNvPr>
-        <p:cNvGrpSpPr/>
-        <p:nvPr/>
-      </p:nvGrpSpPr>
-      <p:grpSpPr>
-        <a:xfrm>
-          <a:off x="0" y="0"/>
-          <a:ext cx="0" cy="0"/>
-          <a:chOff x="0" y="0"/>
-          <a:chExt cx="0" cy="0"/>
-        </a:xfrm>
-      </p:grpSpPr>
-      <p:sp>
-        <p:nvSpPr>
-          <p:cNvPr id="2" name="Title 1">
-            <a:extLst>
-              <a:ext uri="{FF2B5EF4-FFF2-40B4-BE49-F238E27FC236}">
-                <a16:creationId xmlns:a16="http://schemas.microsoft.com/office/drawing/2014/main" id="{466FDC71-4D61-F953-7925-BB2244595418}"/>
-              </a:ext>
-            </a:extLst>
-          </p:cNvPr>
-          <p:cNvSpPr>
-            <a:spLocks noGrp="1"/>
-          </p:cNvSpPr>
-          <p:nvPr>
-            <p:ph type="title"/>
-          </p:nvPr>
-        </p:nvSpPr>
-        <p:spPr>
-          <a:xfrm>
-            <a:off x="838200" y="365126"/>
-            <a:ext cx="10515600" cy="1059638"/>
-          </a:xfrm>
-        </p:spPr>
-        <p:txBody>
-          <a:bodyPr/>
-          <a:lstStyle/>
-          <a:p>
-            <a:r>
-              <a:rPr lang="en-US" dirty="0"/>
-              <a:t>Flute example</a:t>
-            </a:r>
-            <a:endParaRPr lang="en-GB" dirty="0"/>
-          </a:p>
-        </p:txBody>
-      </p:sp>
-      <p:graphicFrame>
-        <p:nvGraphicFramePr>
-          <p:cNvPr id="7" name="Table 6">
-            <a:extLst>
-              <a:ext uri="{FF2B5EF4-FFF2-40B4-BE49-F238E27FC236}">
-                <a16:creationId xmlns:a16="http://schemas.microsoft.com/office/drawing/2014/main" id="{A55A3BCE-03BD-E9C3-A608-B6729A0AB1FB}"/>
-              </a:ext>
-            </a:extLst>
-          </p:cNvPr>
-          <p:cNvGraphicFramePr>
-            <a:graphicFrameLocks noGrp="1"/>
-          </p:cNvGraphicFramePr>
-          <p:nvPr>
-            <p:extLst>
-              <p:ext uri="{D42A27DB-BD31-4B8C-83A1-F6EECF244321}">
-                <p14:modId xmlns:p14="http://schemas.microsoft.com/office/powerpoint/2010/main" val="664045263"/>
-              </p:ext>
-            </p:extLst>
-          </p:nvPr>
-        </p:nvGraphicFramePr>
-        <p:xfrm>
-          <a:off x="2248678" y="4414589"/>
-          <a:ext cx="6913983" cy="2225040"/>
-        </p:xfrm>
-        <a:graphic>
-          <a:graphicData uri="http://schemas.openxmlformats.org/drawingml/2006/table">
-            <a:tbl>
-              <a:tblPr firstRow="1" firstCol="1" bandRow="1">
-                <a:tableStyleId>{5C22544A-7EE6-4342-B048-85BDC9FD1C3A}</a:tableStyleId>
-              </a:tblPr>
-              <a:tblGrid>
-                <a:gridCol w="2659224">
-                  <a:extLst>
-                    <a:ext uri="{9D8B030D-6E8A-4147-A177-3AD203B41FA5}">
-                      <a16:colId xmlns:a16="http://schemas.microsoft.com/office/drawing/2014/main" val="4050174211"/>
-                    </a:ext>
-                  </a:extLst>
-                </a:gridCol>
-                <a:gridCol w="1418253">
-                  <a:extLst>
-                    <a:ext uri="{9D8B030D-6E8A-4147-A177-3AD203B41FA5}">
-                      <a16:colId xmlns:a16="http://schemas.microsoft.com/office/drawing/2014/main" val="804342274"/>
-                    </a:ext>
-                  </a:extLst>
-                </a:gridCol>
-                <a:gridCol w="1418253">
-                  <a:extLst>
-                    <a:ext uri="{9D8B030D-6E8A-4147-A177-3AD203B41FA5}">
-                      <a16:colId xmlns:a16="http://schemas.microsoft.com/office/drawing/2014/main" val="810714715"/>
-                    </a:ext>
-                  </a:extLst>
-                </a:gridCol>
-                <a:gridCol w="1418253">
-                  <a:extLst>
-                    <a:ext uri="{9D8B030D-6E8A-4147-A177-3AD203B41FA5}">
-                      <a16:colId xmlns:a16="http://schemas.microsoft.com/office/drawing/2014/main" val="482378900"/>
-                    </a:ext>
-                  </a:extLst>
-                </a:gridCol>
-              </a:tblGrid>
-              <a:tr h="370840">
-                <a:tc>
-                  <a:txBody>
-                    <a:bodyPr/>
-                    <a:lstStyle/>
-                    <a:p>
-                      <a:endParaRPr lang="en-GB" dirty="0"/>
-                    </a:p>
-                  </a:txBody>
-                  <a:tcPr/>
-                </a:tc>
-                <a:tc>
-                  <a:txBody>
-                    <a:bodyPr/>
-                    <a:lstStyle/>
-                    <a:p>
-                      <a:r>
-                        <a:rPr lang="en-US" dirty="0"/>
-                        <a:t>Minimum</a:t>
-                      </a:r>
-                      <a:endParaRPr lang="en-GB" dirty="0"/>
-                    </a:p>
-                  </a:txBody>
-                  <a:tcPr/>
-                </a:tc>
-                <a:tc>
-                  <a:txBody>
-                    <a:bodyPr/>
-                    <a:lstStyle/>
-                    <a:p>
-                      <a:r>
-                        <a:rPr lang="en-US" dirty="0"/>
-                        <a:t>Initial value</a:t>
-                      </a:r>
-                      <a:endParaRPr lang="en-GB" dirty="0"/>
-                    </a:p>
-                  </a:txBody>
-                  <a:tcPr/>
-                </a:tc>
-                <a:tc>
-                  <a:txBody>
-                    <a:bodyPr/>
-                    <a:lstStyle/>
-                    <a:p>
-                      <a:r>
-                        <a:rPr lang="en-US" dirty="0"/>
-                        <a:t>Maximum</a:t>
-                      </a:r>
-                      <a:endParaRPr lang="en-GB" dirty="0"/>
-                    </a:p>
-                  </a:txBody>
-                  <a:tcPr/>
-                </a:tc>
-                <a:extLst>
-                  <a:ext uri="{0D108BD9-81ED-4DB2-BD59-A6C34878D82A}">
-                    <a16:rowId xmlns:a16="http://schemas.microsoft.com/office/drawing/2014/main" val="857141677"/>
-                  </a:ext>
-                </a:extLst>
-              </a:tr>
-              <a:tr h="370840">
-                <a:tc>
-                  <a:txBody>
-                    <a:bodyPr/>
-                    <a:lstStyle/>
-                    <a:p>
-                      <a:r>
-                        <a:rPr lang="en-US" dirty="0"/>
-                        <a:t>Bandpass frequency (Hz)</a:t>
-                      </a:r>
-                      <a:endParaRPr lang="en-GB" dirty="0"/>
-                    </a:p>
-                  </a:txBody>
-                  <a:tcPr/>
-                </a:tc>
-                <a:tc>
-                  <a:txBody>
-                    <a:bodyPr/>
-                    <a:lstStyle/>
-                    <a:p>
-                      <a:r>
-                        <a:rPr lang="en-US" dirty="0"/>
-                        <a:t>80</a:t>
-                      </a:r>
-                      <a:endParaRPr lang="en-GB" dirty="0"/>
-                    </a:p>
-                  </a:txBody>
-                  <a:tcPr/>
-                </a:tc>
-                <a:tc>
-                  <a:txBody>
-                    <a:bodyPr/>
-                    <a:lstStyle/>
-                    <a:p>
-                      <a:r>
-                        <a:rPr lang="en-US" dirty="0"/>
-                        <a:t>1100</a:t>
-                      </a:r>
-                      <a:endParaRPr lang="en-GB" dirty="0"/>
-                    </a:p>
-                  </a:txBody>
-                  <a:tcPr/>
-                </a:tc>
-                <a:tc>
-                  <a:txBody>
-                    <a:bodyPr/>
-                    <a:lstStyle/>
-                    <a:p>
-                      <a:r>
-                        <a:rPr lang="en-US" dirty="0"/>
-                        <a:t>4200</a:t>
-                      </a:r>
-                      <a:endParaRPr lang="en-GB" dirty="0"/>
-                    </a:p>
-                  </a:txBody>
-                  <a:tcPr/>
-                </a:tc>
-                <a:extLst>
-                  <a:ext uri="{0D108BD9-81ED-4DB2-BD59-A6C34878D82A}">
-                    <a16:rowId xmlns:a16="http://schemas.microsoft.com/office/drawing/2014/main" val="904711003"/>
-                  </a:ext>
-                </a:extLst>
-              </a:tr>
-              <a:tr h="370840">
-                <a:tc>
-                  <a:txBody>
-                    <a:bodyPr/>
-                    <a:lstStyle/>
-                    <a:p>
-                      <a:r>
-                        <a:rPr lang="en-US" dirty="0"/>
-                        <a:t>Lowpass frequency (Hz)</a:t>
-                      </a:r>
-                      <a:endParaRPr lang="en-GB" dirty="0"/>
-                    </a:p>
-                  </a:txBody>
-                  <a:tcPr/>
-                </a:tc>
-                <a:tc>
-                  <a:txBody>
-                    <a:bodyPr/>
-                    <a:lstStyle/>
-                    <a:p>
-                      <a:r>
-                        <a:rPr lang="en-US" dirty="0"/>
-                        <a:t>80</a:t>
-                      </a:r>
-                      <a:endParaRPr lang="en-GB" dirty="0"/>
-                    </a:p>
-                  </a:txBody>
-                  <a:tcPr/>
-                </a:tc>
-                <a:tc>
-                  <a:txBody>
-                    <a:bodyPr/>
-                    <a:lstStyle/>
-                    <a:p>
-                      <a:r>
-                        <a:rPr lang="en-US" dirty="0"/>
-                        <a:t>3500</a:t>
-                      </a:r>
-                      <a:endParaRPr lang="en-GB" dirty="0"/>
-                    </a:p>
-                  </a:txBody>
-                  <a:tcPr/>
-                </a:tc>
-                <a:tc>
-                  <a:txBody>
-                    <a:bodyPr/>
-                    <a:lstStyle/>
-                    <a:p>
-                      <a:r>
-                        <a:rPr lang="en-US" dirty="0"/>
-                        <a:t>10000</a:t>
-                      </a:r>
-                      <a:endParaRPr lang="en-GB" dirty="0"/>
-                    </a:p>
-                  </a:txBody>
-                  <a:tcPr/>
-                </a:tc>
-                <a:extLst>
-                  <a:ext uri="{0D108BD9-81ED-4DB2-BD59-A6C34878D82A}">
-                    <a16:rowId xmlns:a16="http://schemas.microsoft.com/office/drawing/2014/main" val="3732809095"/>
-                  </a:ext>
-                </a:extLst>
-              </a:tr>
-              <a:tr h="370840">
-                <a:tc>
-                  <a:txBody>
-                    <a:bodyPr/>
-                    <a:lstStyle/>
-                    <a:p>
-                      <a:r>
-                        <a:rPr lang="en-US" dirty="0"/>
-                        <a:t>Crossfade</a:t>
-                      </a:r>
-                      <a:endParaRPr lang="en-GB" dirty="0"/>
-                    </a:p>
-                  </a:txBody>
-                  <a:tcPr/>
-                </a:tc>
-                <a:tc>
-                  <a:txBody>
-                    <a:bodyPr/>
-                    <a:lstStyle/>
-                    <a:p>
-                      <a:r>
-                        <a:rPr lang="en-US" dirty="0"/>
-                        <a:t>0</a:t>
-                      </a:r>
-                      <a:endParaRPr lang="en-GB" dirty="0"/>
-                    </a:p>
-                  </a:txBody>
-                  <a:tcPr/>
-                </a:tc>
-                <a:tc>
-                  <a:txBody>
-                    <a:bodyPr/>
-                    <a:lstStyle/>
-                    <a:p>
-                      <a:r>
-                        <a:rPr lang="en-US" dirty="0"/>
-                        <a:t>0.6</a:t>
-                      </a:r>
-                      <a:endParaRPr lang="en-GB" dirty="0"/>
-                    </a:p>
-                  </a:txBody>
-                  <a:tcPr/>
-                </a:tc>
-                <a:tc>
-                  <a:txBody>
-                    <a:bodyPr/>
-                    <a:lstStyle/>
-                    <a:p>
-                      <a:r>
-                        <a:rPr lang="en-US" dirty="0"/>
-                        <a:t>0.95</a:t>
-                      </a:r>
-                      <a:endParaRPr lang="en-GB" dirty="0"/>
-                    </a:p>
-                  </a:txBody>
-                  <a:tcPr/>
-                </a:tc>
-                <a:extLst>
-                  <a:ext uri="{0D108BD9-81ED-4DB2-BD59-A6C34878D82A}">
-                    <a16:rowId xmlns:a16="http://schemas.microsoft.com/office/drawing/2014/main" val="1932081808"/>
-                  </a:ext>
-                </a:extLst>
-              </a:tr>
-              <a:tr h="370840">
-                <a:tc>
-                  <a:txBody>
-                    <a:bodyPr/>
-                    <a:lstStyle/>
-                    <a:p>
-                      <a:r>
-                        <a:rPr lang="en-US" dirty="0"/>
-                        <a:t>Feedback</a:t>
-                      </a:r>
-                      <a:endParaRPr lang="en-GB" dirty="0"/>
-                    </a:p>
-                  </a:txBody>
-                  <a:tcPr/>
-                </a:tc>
-                <a:tc>
-                  <a:txBody>
-                    <a:bodyPr/>
-                    <a:lstStyle/>
-                    <a:p>
-                      <a:r>
-                        <a:rPr lang="en-US" dirty="0"/>
-                        <a:t>-2</a:t>
-                      </a:r>
-                      <a:endParaRPr lang="en-GB" dirty="0"/>
-                    </a:p>
-                  </a:txBody>
-                  <a:tcPr/>
-                </a:tc>
-                <a:tc>
-                  <a:txBody>
-                    <a:bodyPr/>
-                    <a:lstStyle/>
-                    <a:p>
-                      <a:r>
-                        <a:rPr lang="en-US" dirty="0"/>
-                        <a:t>1.4</a:t>
-                      </a:r>
-                      <a:endParaRPr lang="en-GB" dirty="0"/>
-                    </a:p>
-                  </a:txBody>
-                  <a:tcPr/>
-                </a:tc>
-                <a:tc>
-                  <a:txBody>
-                    <a:bodyPr/>
-                    <a:lstStyle/>
-                    <a:p>
-                      <a:r>
-                        <a:rPr lang="en-US" dirty="0"/>
-                        <a:t>2</a:t>
-                      </a:r>
-                      <a:endParaRPr lang="en-GB" dirty="0"/>
-                    </a:p>
-                  </a:txBody>
-                  <a:tcPr/>
-                </a:tc>
-                <a:extLst>
-                  <a:ext uri="{0D108BD9-81ED-4DB2-BD59-A6C34878D82A}">
-                    <a16:rowId xmlns:a16="http://schemas.microsoft.com/office/drawing/2014/main" val="1577052905"/>
-                  </a:ext>
-                </a:extLst>
-              </a:tr>
-              <a:tr h="370840">
-                <a:tc>
-                  <a:txBody>
-                    <a:bodyPr/>
-                    <a:lstStyle/>
-                    <a:p>
-                      <a:r>
-                        <a:rPr lang="en-US" dirty="0"/>
-                        <a:t>Exciter cutoff (Hz)</a:t>
-                      </a:r>
-                      <a:endParaRPr lang="en-GB" dirty="0"/>
-                    </a:p>
-                  </a:txBody>
-                  <a:tcPr/>
-                </a:tc>
-                <a:tc>
-                  <a:txBody>
-                    <a:bodyPr/>
-                    <a:lstStyle/>
-                    <a:p>
-                      <a:r>
-                        <a:rPr lang="en-US" dirty="0"/>
-                        <a:t>80</a:t>
-                      </a:r>
-                      <a:endParaRPr lang="en-GB" dirty="0"/>
-                    </a:p>
-                  </a:txBody>
-                  <a:tcPr/>
-                </a:tc>
-                <a:tc>
-                  <a:txBody>
-                    <a:bodyPr/>
-                    <a:lstStyle/>
-                    <a:p>
-                      <a:r>
-                        <a:rPr lang="en-US" dirty="0"/>
-                        <a:t>700</a:t>
-                      </a:r>
-                      <a:endParaRPr lang="en-GB" dirty="0"/>
-                    </a:p>
-                  </a:txBody>
-                  <a:tcPr/>
-                </a:tc>
-                <a:tc>
-                  <a:txBody>
-                    <a:bodyPr/>
-                    <a:lstStyle/>
-                    <a:p>
-                      <a:r>
-                        <a:rPr lang="en-US" dirty="0"/>
-                        <a:t>10000</a:t>
-                      </a:r>
-                      <a:endParaRPr lang="en-GB" dirty="0"/>
-                    </a:p>
-                  </a:txBody>
-                  <a:tcPr/>
-                </a:tc>
-                <a:extLst>
-                  <a:ext uri="{0D108BD9-81ED-4DB2-BD59-A6C34878D82A}">
-                    <a16:rowId xmlns:a16="http://schemas.microsoft.com/office/drawing/2014/main" val="3635758170"/>
-                  </a:ext>
-                </a:extLst>
-              </a:tr>
-            </a:tbl>
-          </a:graphicData>
-        </a:graphic>
-      </p:graphicFrame>
-      <p:sp>
-        <p:nvSpPr>
-          <p:cNvPr id="8" name="Rectangle 7">
-            <a:extLst>
-              <a:ext uri="{FF2B5EF4-FFF2-40B4-BE49-F238E27FC236}">
-                <a16:creationId xmlns:a16="http://schemas.microsoft.com/office/drawing/2014/main" id="{D687D345-9BA3-5787-FBDA-4E26BD192E9F}"/>
-              </a:ext>
-            </a:extLst>
-          </p:cNvPr>
-          <p:cNvSpPr/>
-          <p:nvPr/>
-        </p:nvSpPr>
-        <p:spPr>
-          <a:xfrm>
-            <a:off x="1804854" y="3270501"/>
-            <a:ext cx="1122740" cy="648000"/>
-          </a:xfrm>
-          <a:prstGeom prst="rect">
-            <a:avLst/>
-          </a:prstGeom>
-          <a:solidFill>
-            <a:srgbClr val="7030A0"/>
-          </a:solidFill>
-        </p:spPr>
-        <p:style>
-          <a:lnRef idx="2">
-            <a:schemeClr val="accent1">
-              <a:shade val="50000"/>
-            </a:schemeClr>
-          </a:lnRef>
-          <a:fillRef idx="1">
-            <a:schemeClr val="accent1"/>
-          </a:fillRef>
-          <a:effectRef idx="0">
-            <a:schemeClr val="accent1"/>
-          </a:effectRef>
-          <a:fontRef idx="minor">
-            <a:schemeClr val="lt1"/>
-          </a:fontRef>
-        </p:style>
-        <p:txBody>
-          <a:bodyPr rtlCol="0" anchor="ctr"/>
-          <a:lstStyle/>
-          <a:p>
-            <a:pPr algn="ctr"/>
-            <a:r>
-              <a:rPr lang="en-GB" dirty="0"/>
-              <a:t>Excitation</a:t>
-            </a:r>
-          </a:p>
-        </p:txBody>
-      </p:sp>
-      <p:sp>
-        <p:nvSpPr>
-          <p:cNvPr id="9" name="Rectangle 8">
-            <a:extLst>
-              <a:ext uri="{FF2B5EF4-FFF2-40B4-BE49-F238E27FC236}">
-                <a16:creationId xmlns:a16="http://schemas.microsoft.com/office/drawing/2014/main" id="{963AB04F-C2CD-9063-D820-66A93FD05E58}"/>
-              </a:ext>
-            </a:extLst>
-          </p:cNvPr>
-          <p:cNvSpPr/>
-          <p:nvPr/>
-        </p:nvSpPr>
-        <p:spPr>
-          <a:xfrm>
-            <a:off x="3103287" y="1854976"/>
-            <a:ext cx="1080000" cy="648000"/>
-          </a:xfrm>
-          <a:prstGeom prst="rect">
-            <a:avLst/>
-          </a:prstGeom>
-          <a:solidFill>
-            <a:srgbClr val="7030A0"/>
-          </a:solidFill>
-        </p:spPr>
-        <p:style>
-          <a:lnRef idx="2">
-            <a:schemeClr val="accent1">
-              <a:shade val="50000"/>
-            </a:schemeClr>
-          </a:lnRef>
-          <a:fillRef idx="1">
-            <a:schemeClr val="accent1"/>
-          </a:fillRef>
-          <a:effectRef idx="0">
-            <a:schemeClr val="accent1"/>
-          </a:effectRef>
-          <a:fontRef idx="minor">
-            <a:schemeClr val="lt1"/>
-          </a:fontRef>
-        </p:style>
-        <p:txBody>
-          <a:bodyPr rtlCol="0" anchor="ctr"/>
-          <a:lstStyle/>
-          <a:p>
-            <a:pPr algn="ctr"/>
-            <a:r>
-              <a:rPr lang="en-GB" dirty="0"/>
-              <a:t>Sigmoid</a:t>
-            </a:r>
-          </a:p>
-        </p:txBody>
-      </p:sp>
-      <p:sp>
-        <p:nvSpPr>
-          <p:cNvPr id="10" name="Rectangle 9">
-            <a:extLst>
-              <a:ext uri="{FF2B5EF4-FFF2-40B4-BE49-F238E27FC236}">
-                <a16:creationId xmlns:a16="http://schemas.microsoft.com/office/drawing/2014/main" id="{4CB746D3-4225-3F91-8E4F-E90781ED0162}"/>
-              </a:ext>
-            </a:extLst>
-          </p:cNvPr>
-          <p:cNvSpPr/>
-          <p:nvPr/>
-        </p:nvSpPr>
-        <p:spPr>
-          <a:xfrm>
-            <a:off x="7491376" y="3270501"/>
-            <a:ext cx="1296000" cy="648000"/>
-          </a:xfrm>
-          <a:prstGeom prst="rect">
-            <a:avLst/>
-          </a:prstGeom>
-          <a:solidFill>
-            <a:srgbClr val="7030A0"/>
-          </a:solidFill>
-        </p:spPr>
-        <p:style>
-          <a:lnRef idx="2">
-            <a:schemeClr val="accent1">
-              <a:shade val="50000"/>
-            </a:schemeClr>
-          </a:lnRef>
-          <a:fillRef idx="1">
-            <a:schemeClr val="accent1"/>
-          </a:fillRef>
-          <a:effectRef idx="0">
-            <a:schemeClr val="accent1"/>
-          </a:effectRef>
-          <a:fontRef idx="minor">
-            <a:schemeClr val="lt1"/>
-          </a:fontRef>
-        </p:style>
-        <p:txBody>
-          <a:bodyPr rtlCol="0" anchor="ctr"/>
-          <a:lstStyle/>
-          <a:p>
-            <a:pPr algn="ctr"/>
-            <a:r>
-              <a:rPr lang="en-GB" dirty="0"/>
-              <a:t>Crossfade</a:t>
-            </a:r>
-          </a:p>
-        </p:txBody>
-      </p:sp>
-      <p:cxnSp>
-        <p:nvCxnSpPr>
-          <p:cNvPr id="11" name="Straight Arrow Connector 10">
-            <a:extLst>
-              <a:ext uri="{FF2B5EF4-FFF2-40B4-BE49-F238E27FC236}">
-                <a16:creationId xmlns:a16="http://schemas.microsoft.com/office/drawing/2014/main" id="{6D015CE4-78D5-7FB0-DD35-79D2CE3F1478}"/>
-              </a:ext>
-            </a:extLst>
-          </p:cNvPr>
-          <p:cNvCxnSpPr>
-            <a:cxnSpLocks/>
-          </p:cNvCxnSpPr>
-          <p:nvPr/>
-        </p:nvCxnSpPr>
-        <p:spPr>
-          <a:xfrm>
-            <a:off x="2927594" y="3594501"/>
-            <a:ext cx="436841" cy="0"/>
-          </a:xfrm>
-          <a:prstGeom prst="straightConnector1">
-            <a:avLst/>
-          </a:prstGeom>
-          <a:ln w="31750">
-            <a:solidFill>
-              <a:schemeClr val="tx1"/>
-            </a:solidFill>
-            <a:tailEnd type="arrow" w="lg" len="lg"/>
-          </a:ln>
-        </p:spPr>
-        <p:style>
-          <a:lnRef idx="1">
-            <a:schemeClr val="accent1"/>
-          </a:lnRef>
-          <a:fillRef idx="0">
-            <a:schemeClr val="accent1"/>
-          </a:fillRef>
-          <a:effectRef idx="0">
-            <a:schemeClr val="accent1"/>
-          </a:effectRef>
-          <a:fontRef idx="minor">
-            <a:schemeClr val="tx1"/>
-          </a:fontRef>
-        </p:style>
-      </p:cxnSp>
-      <p:cxnSp>
-        <p:nvCxnSpPr>
-          <p:cNvPr id="12" name="Straight Arrow Connector 11">
-            <a:extLst>
-              <a:ext uri="{FF2B5EF4-FFF2-40B4-BE49-F238E27FC236}">
-                <a16:creationId xmlns:a16="http://schemas.microsoft.com/office/drawing/2014/main" id="{130E5AA8-7BF7-D49D-139C-610FCBD50705}"/>
-              </a:ext>
-            </a:extLst>
-          </p:cNvPr>
-          <p:cNvCxnSpPr>
-            <a:cxnSpLocks/>
-            <a:endCxn id="9" idx="3"/>
-          </p:cNvCxnSpPr>
-          <p:nvPr/>
-        </p:nvCxnSpPr>
-        <p:spPr>
-          <a:xfrm flipH="1">
-            <a:off x="4183287" y="2178976"/>
-            <a:ext cx="3956089" cy="0"/>
-          </a:xfrm>
-          <a:prstGeom prst="straightConnector1">
-            <a:avLst/>
-          </a:prstGeom>
-          <a:ln w="31750">
-            <a:solidFill>
-              <a:schemeClr val="tx1"/>
-            </a:solidFill>
-            <a:tailEnd type="arrow" w="lg" len="lg"/>
-          </a:ln>
-        </p:spPr>
-        <p:style>
-          <a:lnRef idx="1">
-            <a:schemeClr val="accent1"/>
-          </a:lnRef>
-          <a:fillRef idx="0">
-            <a:schemeClr val="accent1"/>
-          </a:fillRef>
-          <a:effectRef idx="0">
-            <a:schemeClr val="accent1"/>
-          </a:effectRef>
-          <a:fontRef idx="minor">
-            <a:schemeClr val="tx1"/>
-          </a:fontRef>
-        </p:style>
-      </p:cxnSp>
-      <p:cxnSp>
-        <p:nvCxnSpPr>
-          <p:cNvPr id="13" name="Straight Arrow Connector 12">
-            <a:extLst>
-              <a:ext uri="{FF2B5EF4-FFF2-40B4-BE49-F238E27FC236}">
-                <a16:creationId xmlns:a16="http://schemas.microsoft.com/office/drawing/2014/main" id="{C7E7FA54-C360-394D-0D40-12C13FB4323B}"/>
-              </a:ext>
-            </a:extLst>
-          </p:cNvPr>
-          <p:cNvCxnSpPr>
-            <a:cxnSpLocks/>
-            <a:stCxn id="10" idx="0"/>
-          </p:cNvCxnSpPr>
-          <p:nvPr/>
-        </p:nvCxnSpPr>
-        <p:spPr>
-          <a:xfrm flipV="1">
-            <a:off x="8139376" y="2130188"/>
-            <a:ext cx="4337" cy="1140313"/>
-          </a:xfrm>
-          <a:prstGeom prst="straightConnector1">
-            <a:avLst/>
-          </a:prstGeom>
-          <a:ln w="31750">
-            <a:solidFill>
-              <a:schemeClr val="tx1"/>
-            </a:solidFill>
-            <a:tailEnd type="none" w="lg" len="lg"/>
-          </a:ln>
-        </p:spPr>
-        <p:style>
-          <a:lnRef idx="1">
-            <a:schemeClr val="accent1"/>
-          </a:lnRef>
-          <a:fillRef idx="0">
-            <a:schemeClr val="accent1"/>
-          </a:fillRef>
-          <a:effectRef idx="0">
-            <a:schemeClr val="accent1"/>
-          </a:effectRef>
-          <a:fontRef idx="minor">
-            <a:schemeClr val="tx1"/>
-          </a:fontRef>
-        </p:style>
-      </p:cxnSp>
-      <p:cxnSp>
-        <p:nvCxnSpPr>
-          <p:cNvPr id="14" name="Straight Arrow Connector 13">
-            <a:extLst>
-              <a:ext uri="{FF2B5EF4-FFF2-40B4-BE49-F238E27FC236}">
-                <a16:creationId xmlns:a16="http://schemas.microsoft.com/office/drawing/2014/main" id="{3509DA6E-3ADC-5BBD-DBAD-FB3AA50DDF9A}"/>
-              </a:ext>
-            </a:extLst>
-          </p:cNvPr>
-          <p:cNvCxnSpPr>
-            <a:cxnSpLocks/>
-            <a:stCxn id="9" idx="2"/>
-            <a:endCxn id="15" idx="0"/>
-          </p:cNvCxnSpPr>
-          <p:nvPr/>
-        </p:nvCxnSpPr>
-        <p:spPr>
-          <a:xfrm flipH="1">
-            <a:off x="3634435" y="2502976"/>
-            <a:ext cx="8852" cy="821525"/>
-          </a:xfrm>
-          <a:prstGeom prst="straightConnector1">
-            <a:avLst/>
-          </a:prstGeom>
-          <a:ln w="31750">
-            <a:solidFill>
-              <a:schemeClr val="tx1"/>
-            </a:solidFill>
-            <a:tailEnd type="arrow" w="lg" len="lg"/>
-          </a:ln>
-        </p:spPr>
-        <p:style>
-          <a:lnRef idx="1">
-            <a:schemeClr val="accent1"/>
-          </a:lnRef>
-          <a:fillRef idx="0">
-            <a:schemeClr val="accent1"/>
-          </a:fillRef>
-          <a:effectRef idx="0">
-            <a:schemeClr val="accent1"/>
-          </a:effectRef>
-          <a:fontRef idx="minor">
-            <a:schemeClr val="tx1"/>
-          </a:fontRef>
-        </p:style>
-      </p:cxnSp>
-      <p:sp>
-        <p:nvSpPr>
-          <p:cNvPr id="15" name="Oval 14">
-            <a:extLst>
-              <a:ext uri="{FF2B5EF4-FFF2-40B4-BE49-F238E27FC236}">
-                <a16:creationId xmlns:a16="http://schemas.microsoft.com/office/drawing/2014/main" id="{0150F7FA-1FA9-926C-3FEA-2BA97BA0E0D7}"/>
-              </a:ext>
-            </a:extLst>
-          </p:cNvPr>
-          <p:cNvSpPr/>
-          <p:nvPr/>
-        </p:nvSpPr>
-        <p:spPr>
-          <a:xfrm>
-            <a:off x="3364435" y="3324501"/>
-            <a:ext cx="540000" cy="540000"/>
-          </a:xfrm>
-          <a:prstGeom prst="ellipse">
-            <a:avLst/>
-          </a:prstGeom>
-          <a:solidFill>
-            <a:srgbClr val="7030A0"/>
-          </a:solidFill>
-          <a:ln w="31750"/>
-        </p:spPr>
-        <p:style>
-          <a:lnRef idx="2">
-            <a:schemeClr val="accent1">
-              <a:shade val="50000"/>
-            </a:schemeClr>
-          </a:lnRef>
-          <a:fillRef idx="1">
-            <a:schemeClr val="accent1"/>
-          </a:fillRef>
-          <a:effectRef idx="0">
-            <a:schemeClr val="accent1"/>
-          </a:effectRef>
-          <a:fontRef idx="minor">
-            <a:schemeClr val="lt1"/>
-          </a:fontRef>
-        </p:style>
-        <p:txBody>
-          <a:bodyPr rtlCol="0" anchor="ctr"/>
-          <a:lstStyle/>
-          <a:p>
-            <a:pPr algn="ctr"/>
-            <a:r>
-              <a:rPr lang="en-GB" sz="3600" dirty="0">
-                <a:solidFill>
-                  <a:schemeClr val="bg1"/>
-                </a:solidFill>
-              </a:rPr>
-              <a:t>+</a:t>
-            </a:r>
-          </a:p>
-        </p:txBody>
-      </p:sp>
-      <p:cxnSp>
-        <p:nvCxnSpPr>
-          <p:cNvPr id="16" name="Straight Arrow Connector 15">
-            <a:extLst>
-              <a:ext uri="{FF2B5EF4-FFF2-40B4-BE49-F238E27FC236}">
-                <a16:creationId xmlns:a16="http://schemas.microsoft.com/office/drawing/2014/main" id="{D4BA2B7A-132B-1A40-6A37-CC9C9EDA4D64}"/>
-              </a:ext>
-            </a:extLst>
-          </p:cNvPr>
-          <p:cNvCxnSpPr>
-            <a:cxnSpLocks/>
-          </p:cNvCxnSpPr>
-          <p:nvPr/>
-        </p:nvCxnSpPr>
-        <p:spPr>
-          <a:xfrm>
-            <a:off x="3904435" y="3591901"/>
-            <a:ext cx="597712" cy="1"/>
-          </a:xfrm>
-          <a:prstGeom prst="straightConnector1">
-            <a:avLst/>
-          </a:prstGeom>
-          <a:ln w="31750">
-            <a:solidFill>
-              <a:schemeClr val="tx1"/>
-            </a:solidFill>
-            <a:tailEnd type="arrow" w="lg" len="lg"/>
-          </a:ln>
-        </p:spPr>
-        <p:style>
-          <a:lnRef idx="1">
-            <a:schemeClr val="accent1"/>
-          </a:lnRef>
-          <a:fillRef idx="0">
-            <a:schemeClr val="accent1"/>
-          </a:fillRef>
-          <a:effectRef idx="0">
-            <a:schemeClr val="accent1"/>
-          </a:effectRef>
-          <a:fontRef idx="minor">
-            <a:schemeClr val="tx1"/>
-          </a:fontRef>
-        </p:style>
-      </p:cxnSp>
-      <p:cxnSp>
-        <p:nvCxnSpPr>
-          <p:cNvPr id="17" name="Straight Arrow Connector 16">
-            <a:extLst>
-              <a:ext uri="{FF2B5EF4-FFF2-40B4-BE49-F238E27FC236}">
-                <a16:creationId xmlns:a16="http://schemas.microsoft.com/office/drawing/2014/main" id="{179FBC64-626C-AC1B-ED95-FD90C6C70227}"/>
-              </a:ext>
-            </a:extLst>
-          </p:cNvPr>
-          <p:cNvCxnSpPr>
-            <a:cxnSpLocks/>
-            <a:stCxn id="22" idx="3"/>
-            <a:endCxn id="10" idx="1"/>
-          </p:cNvCxnSpPr>
-          <p:nvPr/>
-        </p:nvCxnSpPr>
-        <p:spPr>
-          <a:xfrm>
-            <a:off x="6810187" y="3320101"/>
-            <a:ext cx="681189" cy="274400"/>
-          </a:xfrm>
-          <a:prstGeom prst="straightConnector1">
-            <a:avLst/>
-          </a:prstGeom>
-          <a:ln w="31750">
-            <a:solidFill>
-              <a:schemeClr val="tx1"/>
-            </a:solidFill>
-            <a:tailEnd type="arrow" w="lg" len="lg"/>
-          </a:ln>
-        </p:spPr>
-        <p:style>
-          <a:lnRef idx="1">
-            <a:schemeClr val="accent1"/>
-          </a:lnRef>
-          <a:fillRef idx="0">
-            <a:schemeClr val="accent1"/>
-          </a:fillRef>
-          <a:effectRef idx="0">
-            <a:schemeClr val="accent1"/>
-          </a:effectRef>
-          <a:fontRef idx="minor">
-            <a:schemeClr val="tx1"/>
-          </a:fontRef>
-        </p:style>
-      </p:cxnSp>
-      <p:cxnSp>
-        <p:nvCxnSpPr>
-          <p:cNvPr id="18" name="Straight Arrow Connector 17">
-            <a:extLst>
-              <a:ext uri="{FF2B5EF4-FFF2-40B4-BE49-F238E27FC236}">
-                <a16:creationId xmlns:a16="http://schemas.microsoft.com/office/drawing/2014/main" id="{2632A4E1-6B8C-125C-1045-9AD7E8B53DE2}"/>
-              </a:ext>
-            </a:extLst>
-          </p:cNvPr>
-          <p:cNvCxnSpPr>
-            <a:cxnSpLocks/>
-            <a:stCxn id="21" idx="3"/>
-            <a:endCxn id="22" idx="1"/>
-          </p:cNvCxnSpPr>
-          <p:nvPr/>
-        </p:nvCxnSpPr>
-        <p:spPr>
-          <a:xfrm flipV="1">
-            <a:off x="5257089" y="3320101"/>
-            <a:ext cx="658194" cy="274401"/>
-          </a:xfrm>
-          <a:prstGeom prst="straightConnector1">
-            <a:avLst/>
-          </a:prstGeom>
-          <a:ln w="31750">
-            <a:solidFill>
-              <a:schemeClr val="tx1"/>
-            </a:solidFill>
-            <a:tailEnd type="arrow" w="lg" len="lg"/>
-          </a:ln>
-        </p:spPr>
-        <p:style>
-          <a:lnRef idx="1">
-            <a:schemeClr val="accent1"/>
-          </a:lnRef>
-          <a:fillRef idx="0">
-            <a:schemeClr val="accent1"/>
-          </a:fillRef>
-          <a:effectRef idx="0">
-            <a:schemeClr val="accent1"/>
-          </a:effectRef>
-          <a:fontRef idx="minor">
-            <a:schemeClr val="tx1"/>
-          </a:fontRef>
-        </p:style>
-      </p:cxnSp>
-      <p:sp>
-        <p:nvSpPr>
-          <p:cNvPr id="19" name="Rectangle 18">
-            <a:extLst>
-              <a:ext uri="{FF2B5EF4-FFF2-40B4-BE49-F238E27FC236}">
-                <a16:creationId xmlns:a16="http://schemas.microsoft.com/office/drawing/2014/main" id="{A7EF1D8C-766D-4987-7919-46E701509059}"/>
-              </a:ext>
-            </a:extLst>
-          </p:cNvPr>
-          <p:cNvSpPr/>
-          <p:nvPr/>
-        </p:nvSpPr>
-        <p:spPr>
-          <a:xfrm>
-            <a:off x="9383167" y="3270501"/>
-            <a:ext cx="907535" cy="648000"/>
-          </a:xfrm>
-          <a:prstGeom prst="rect">
-            <a:avLst/>
-          </a:prstGeom>
-          <a:solidFill>
-            <a:srgbClr val="7030A0"/>
-          </a:solidFill>
-        </p:spPr>
-        <p:style>
-          <a:lnRef idx="2">
-            <a:schemeClr val="accent1">
-              <a:shade val="50000"/>
-            </a:schemeClr>
-          </a:lnRef>
-          <a:fillRef idx="1">
-            <a:schemeClr val="accent1"/>
-          </a:fillRef>
-          <a:effectRef idx="0">
-            <a:schemeClr val="accent1"/>
-          </a:effectRef>
-          <a:fontRef idx="minor">
-            <a:schemeClr val="lt1"/>
-          </a:fontRef>
-        </p:style>
-        <p:txBody>
-          <a:bodyPr rtlCol="0" anchor="ctr"/>
-          <a:lstStyle/>
-          <a:p>
-            <a:pPr algn="ctr"/>
-            <a:r>
-              <a:rPr lang="en-GB" dirty="0"/>
-              <a:t>Output</a:t>
-            </a:r>
-          </a:p>
-        </p:txBody>
-      </p:sp>
-      <p:cxnSp>
-        <p:nvCxnSpPr>
-          <p:cNvPr id="20" name="Straight Arrow Connector 19">
-            <a:extLst>
-              <a:ext uri="{FF2B5EF4-FFF2-40B4-BE49-F238E27FC236}">
-                <a16:creationId xmlns:a16="http://schemas.microsoft.com/office/drawing/2014/main" id="{D2CC6891-FC55-E9E2-2DE3-DA0CDB0A5686}"/>
-              </a:ext>
-            </a:extLst>
-          </p:cNvPr>
-          <p:cNvCxnSpPr>
-            <a:cxnSpLocks/>
-          </p:cNvCxnSpPr>
-          <p:nvPr/>
-        </p:nvCxnSpPr>
-        <p:spPr>
-          <a:xfrm>
-            <a:off x="8787376" y="3594501"/>
-            <a:ext cx="595791" cy="0"/>
-          </a:xfrm>
-          <a:prstGeom prst="straightConnector1">
-            <a:avLst/>
-          </a:prstGeom>
-          <a:ln w="31750">
-            <a:solidFill>
-              <a:schemeClr val="tx1"/>
-            </a:solidFill>
-            <a:tailEnd type="arrow" w="lg" len="lg"/>
-          </a:ln>
-        </p:spPr>
-        <p:style>
-          <a:lnRef idx="1">
-            <a:schemeClr val="accent1"/>
-          </a:lnRef>
-          <a:fillRef idx="0">
-            <a:schemeClr val="accent1"/>
-          </a:fillRef>
-          <a:effectRef idx="0">
-            <a:schemeClr val="accent1"/>
-          </a:effectRef>
-          <a:fontRef idx="minor">
-            <a:schemeClr val="tx1"/>
-          </a:fontRef>
-        </p:style>
-      </p:cxnSp>
-      <p:sp>
-        <p:nvSpPr>
-          <p:cNvPr id="21" name="Rectangle 20">
-            <a:extLst>
-              <a:ext uri="{FF2B5EF4-FFF2-40B4-BE49-F238E27FC236}">
-                <a16:creationId xmlns:a16="http://schemas.microsoft.com/office/drawing/2014/main" id="{F66D9AA5-5626-806F-7E51-BA8454A34AF0}"/>
-              </a:ext>
-            </a:extLst>
-          </p:cNvPr>
-          <p:cNvSpPr/>
-          <p:nvPr/>
-        </p:nvSpPr>
-        <p:spPr>
-          <a:xfrm>
-            <a:off x="4362185" y="3394194"/>
-            <a:ext cx="894904" cy="400615"/>
-          </a:xfrm>
-          <a:prstGeom prst="rect">
-            <a:avLst/>
-          </a:prstGeom>
-          <a:solidFill>
-            <a:srgbClr val="7030A0"/>
-          </a:solidFill>
-        </p:spPr>
-        <p:style>
-          <a:lnRef idx="2">
-            <a:schemeClr val="accent1">
-              <a:shade val="50000"/>
-            </a:schemeClr>
-          </a:lnRef>
-          <a:fillRef idx="1">
-            <a:schemeClr val="accent1"/>
-          </a:fillRef>
-          <a:effectRef idx="0">
-            <a:schemeClr val="accent1"/>
-          </a:effectRef>
-          <a:fontRef idx="minor">
-            <a:schemeClr val="lt1"/>
-          </a:fontRef>
-        </p:style>
-        <p:txBody>
-          <a:bodyPr rtlCol="0" anchor="ctr"/>
-          <a:lstStyle/>
-          <a:p>
-            <a:pPr algn="ctr"/>
-            <a:r>
-              <a:rPr lang="en-GB" dirty="0"/>
-              <a:t>Delay</a:t>
-            </a:r>
-          </a:p>
-        </p:txBody>
-      </p:sp>
-      <p:sp>
-        <p:nvSpPr>
-          <p:cNvPr id="22" name="Rectangle 21">
-            <a:extLst>
-              <a:ext uri="{FF2B5EF4-FFF2-40B4-BE49-F238E27FC236}">
-                <a16:creationId xmlns:a16="http://schemas.microsoft.com/office/drawing/2014/main" id="{23214572-F1FB-57C6-EEC7-D016130F3ABD}"/>
-              </a:ext>
-            </a:extLst>
-          </p:cNvPr>
-          <p:cNvSpPr/>
-          <p:nvPr/>
-        </p:nvSpPr>
-        <p:spPr>
-          <a:xfrm>
-            <a:off x="5915283" y="3119793"/>
-            <a:ext cx="894904" cy="400615"/>
-          </a:xfrm>
-          <a:prstGeom prst="rect">
-            <a:avLst/>
-          </a:prstGeom>
-          <a:solidFill>
-            <a:srgbClr val="7030A0"/>
-          </a:solidFill>
-        </p:spPr>
-        <p:style>
-          <a:lnRef idx="2">
-            <a:schemeClr val="accent1">
-              <a:shade val="50000"/>
-            </a:schemeClr>
-          </a:lnRef>
-          <a:fillRef idx="1">
-            <a:schemeClr val="accent1"/>
-          </a:fillRef>
-          <a:effectRef idx="0">
-            <a:schemeClr val="accent1"/>
-          </a:effectRef>
-          <a:fontRef idx="minor">
-            <a:schemeClr val="lt1"/>
-          </a:fontRef>
-        </p:style>
-        <p:txBody>
-          <a:bodyPr rtlCol="0" anchor="ctr"/>
-          <a:lstStyle/>
-          <a:p>
-            <a:pPr algn="ctr"/>
-            <a:r>
-              <a:rPr lang="en-GB" b="1" dirty="0"/>
-              <a:t>BP</a:t>
-            </a:r>
-          </a:p>
-        </p:txBody>
-      </p:sp>
-      <p:sp>
-        <p:nvSpPr>
-          <p:cNvPr id="23" name="Rectangle 22">
-            <a:extLst>
-              <a:ext uri="{FF2B5EF4-FFF2-40B4-BE49-F238E27FC236}">
-                <a16:creationId xmlns:a16="http://schemas.microsoft.com/office/drawing/2014/main" id="{380588AD-8860-84C1-DCB2-22F0AB9A00CC}"/>
-              </a:ext>
-            </a:extLst>
-          </p:cNvPr>
-          <p:cNvSpPr/>
-          <p:nvPr/>
-        </p:nvSpPr>
-        <p:spPr>
-          <a:xfrm>
-            <a:off x="5917692" y="3681087"/>
-            <a:ext cx="894904" cy="400615"/>
-          </a:xfrm>
-          <a:prstGeom prst="rect">
-            <a:avLst/>
-          </a:prstGeom>
-          <a:solidFill>
-            <a:srgbClr val="7030A0"/>
-          </a:solidFill>
-        </p:spPr>
-        <p:style>
-          <a:lnRef idx="2">
-            <a:schemeClr val="accent1">
-              <a:shade val="50000"/>
-            </a:schemeClr>
-          </a:lnRef>
-          <a:fillRef idx="1">
-            <a:schemeClr val="accent1"/>
-          </a:fillRef>
-          <a:effectRef idx="0">
-            <a:schemeClr val="accent1"/>
-          </a:effectRef>
-          <a:fontRef idx="minor">
-            <a:schemeClr val="lt1"/>
-          </a:fontRef>
-        </p:style>
-        <p:txBody>
-          <a:bodyPr rtlCol="0" anchor="ctr"/>
-          <a:lstStyle/>
-          <a:p>
-            <a:pPr algn="ctr"/>
-            <a:r>
-              <a:rPr lang="en-GB" b="1" dirty="0"/>
-              <a:t>LP</a:t>
-            </a:r>
-          </a:p>
-        </p:txBody>
-      </p:sp>
-      <p:cxnSp>
-        <p:nvCxnSpPr>
-          <p:cNvPr id="24" name="Straight Arrow Connector 23">
-            <a:extLst>
-              <a:ext uri="{FF2B5EF4-FFF2-40B4-BE49-F238E27FC236}">
-                <a16:creationId xmlns:a16="http://schemas.microsoft.com/office/drawing/2014/main" id="{83718287-B0A3-AF62-6AF6-40005B9B8629}"/>
-              </a:ext>
-            </a:extLst>
-          </p:cNvPr>
-          <p:cNvCxnSpPr>
-            <a:cxnSpLocks/>
-            <a:stCxn id="21" idx="3"/>
-            <a:endCxn id="23" idx="1"/>
-          </p:cNvCxnSpPr>
-          <p:nvPr/>
-        </p:nvCxnSpPr>
-        <p:spPr>
-          <a:xfrm>
-            <a:off x="5257089" y="3594502"/>
-            <a:ext cx="660603" cy="286893"/>
-          </a:xfrm>
-          <a:prstGeom prst="straightConnector1">
-            <a:avLst/>
-          </a:prstGeom>
-          <a:ln w="31750">
-            <a:solidFill>
-              <a:schemeClr val="tx1"/>
-            </a:solidFill>
-            <a:tailEnd type="arrow" w="lg" len="lg"/>
-          </a:ln>
-        </p:spPr>
-        <p:style>
-          <a:lnRef idx="1">
-            <a:schemeClr val="accent1"/>
-          </a:lnRef>
-          <a:fillRef idx="0">
-            <a:schemeClr val="accent1"/>
-          </a:fillRef>
-          <a:effectRef idx="0">
-            <a:schemeClr val="accent1"/>
-          </a:effectRef>
-          <a:fontRef idx="minor">
-            <a:schemeClr val="tx1"/>
-          </a:fontRef>
-        </p:style>
-      </p:cxnSp>
-      <p:cxnSp>
-        <p:nvCxnSpPr>
-          <p:cNvPr id="26" name="Straight Arrow Connector 25">
-            <a:extLst>
-              <a:ext uri="{FF2B5EF4-FFF2-40B4-BE49-F238E27FC236}">
-                <a16:creationId xmlns:a16="http://schemas.microsoft.com/office/drawing/2014/main" id="{7FE88E37-B478-53B5-F3F0-4DD7DC050481}"/>
-              </a:ext>
-            </a:extLst>
-          </p:cNvPr>
-          <p:cNvCxnSpPr>
-            <a:cxnSpLocks/>
-            <a:stCxn id="23" idx="3"/>
-            <a:endCxn id="10" idx="1"/>
-          </p:cNvCxnSpPr>
-          <p:nvPr/>
-        </p:nvCxnSpPr>
-        <p:spPr>
-          <a:xfrm flipV="1">
-            <a:off x="6812596" y="3594501"/>
-            <a:ext cx="678780" cy="286894"/>
-          </a:xfrm>
-          <a:prstGeom prst="straightConnector1">
-            <a:avLst/>
-          </a:prstGeom>
-          <a:ln w="31750">
-            <a:solidFill>
-              <a:schemeClr val="tx1"/>
-            </a:solidFill>
-            <a:tailEnd type="arrow" w="lg" len="lg"/>
-          </a:ln>
-        </p:spPr>
-        <p:style>
-          <a:lnRef idx="1">
-            <a:schemeClr val="accent1"/>
-          </a:lnRef>
-          <a:fillRef idx="0">
-            <a:schemeClr val="accent1"/>
-          </a:fillRef>
-          <a:effectRef idx="0">
-            <a:schemeClr val="accent1"/>
-          </a:effectRef>
-          <a:fontRef idx="minor">
-            <a:schemeClr val="tx1"/>
-          </a:fontRef>
-        </p:style>
-      </p:cxnSp>
-    </p:spTree>
-    <p:extLst>
-      <p:ext uri="{BB962C8B-B14F-4D97-AF65-F5344CB8AC3E}">
-        <p14:creationId xmlns:p14="http://schemas.microsoft.com/office/powerpoint/2010/main" val="2666592918"/>
       </p:ext>
     </p:extLst>
   </p:cSld>
